--- a/content/decks/media-studies/media-studies-s1-lesson-02-semiotics-signs-and-codes.pptx
+++ b/content/decks/media-studies/media-studies-s1-lesson-02-semiotics-signs-and-codes.pptx
@@ -17,9 +17,12 @@
     <p:sldId id="265" r:id="rId11"/>
     <p:sldId id="266" r:id="rId12"/>
     <p:sldId id="267" r:id="rId13"/>
+    <p:sldId id="268" r:id="rId14"/>
+    <p:sldId id="269" r:id="rId15"/>
+    <p:sldId id="270" r:id="rId16"/>
   </p:sldIdLst>
   <p:notesMasterIdLst>
-    <p:notesMasterId r:id="rId14"/>
+    <p:notesMasterId r:id="rId17"/>
   </p:notesMasterIdLst>
   <p:sldSz cx="12192000" cy="6858000"/>
   <p:notesSz cx="6858000" cy="12192000"/>
@@ -513,7 +516,7 @@
           <a:p>
             <a:r>
               <a:rPr lang="en-US" dirty="0"/>
-              <a:t>Semiotics and sign theory in one week, compressed from two. The coursebook gives 2.1 four pages against thirty-eight for the technical sections; the days released here pay for camera, sound, mise-en-scene and editing.</a:t>
+              <a:t>Semiotics and sign theory in one week, compressed from two. The coursebook gives 2.1 four pages against thirty-eight for the technical sections; the days released here pay for camera, sound, mise-en-scene and editing. Taught from Deck U2.2 on D1; the WS 2.1 theory-card spine starts today with Saussure and Barthes.</a:t>
             </a:r>
             <a:endParaRPr lang="en-US" dirty="0"/>
           </a:p>
@@ -601,7 +604,7 @@
           <a:p>
             <a:r>
               <a:rPr lang="en-US" dirty="0"/>
-              <a:t/>
+              <a:t>D3's caption swap staged on the slide so the mechanism is visible before pairs write their own three captions for a fresh image.</a:t>
             </a:r>
             <a:endParaRPr lang="en-US" dirty="0"/>
           </a:p>
@@ -689,7 +692,7 @@
           <a:p>
             <a:r>
               <a:rPr lang="en-US" dirty="0"/>
-              <a:t/>
+              <a:t>D3's 35-minute block, previously slide-less. Cells: Dior J'adore (library), a public-domain broadsheet front page, a social-app splash photograph (Unsplash, credited). Not a Chinese app as core, per the exam-example rule.</a:t>
             </a:r>
             <a:endParaRPr lang="en-US" dirty="0"/>
           </a:p>
@@ -777,7 +780,7 @@
           <a:p>
             <a:r>
               <a:rPr lang="en-US" dirty="0"/>
-              <a:t/>
+              <a:t>D4's mapping exercise on screen: one dense still, all four families in table form, then the personal code checklist. Audio is named as the family a still cannot show, which is itself the teaching.</a:t>
             </a:r>
             <a:endParaRPr lang="en-US" dirty="0"/>
           </a:p>
@@ -801,6 +804,270 @@
             <a:fld id="{F7021451-1387-4CA6-816F-3879F97B5CBC}" type="slidenum">
               <a:rPr lang="en-US"/>
               <a:t>12</a:t>
+            </a:fld>
+            <a:endParaRPr lang="en-US"/>
+          </a:p>
+        </p:txBody>
+      </p:sp>
+    </p:spTree>
+    <p:extLst>
+      <p:ext uri="{BB962C8B-B14F-4D97-AF65-F5344CB8AC3E}">
+        <p14:creationId xmlns:p14="http://schemas.microsoft.com/office/powerpoint/2010/main" val="1024086991"/>
+      </p:ext>
+    </p:extLst>
+  </p:cSld>
+  <p:clrMapOvr>
+    <a:masterClrMapping/>
+  </p:clrMapOvr>
+</p:notes>
+</file>
+
+<file path=ppt/notesSlides/notesSlide13.xml><?xml version="1.0" encoding="utf-8"?>
+<p:notes xmlns:a="http://schemas.openxmlformats.org/drawingml/2006/main" xmlns:r="http://schemas.openxmlformats.org/officeDocument/2006/relationships" xmlns:p="http://schemas.openxmlformats.org/presentationml/2006/main">
+  <p:cSld>
+    <p:spTree>
+      <p:nvGrpSpPr>
+        <p:cNvPr id="1" name=""/>
+        <p:cNvGrpSpPr/>
+        <p:nvPr/>
+      </p:nvGrpSpPr>
+      <p:grpSpPr>
+        <a:xfrm>
+          <a:off x="0" y="0"/>
+          <a:ext cx="0" cy="0"/>
+          <a:chOff x="0" y="0"/>
+          <a:chExt cx="0" cy="0"/>
+        </a:xfrm>
+      </p:grpSpPr>
+      <p:sp>
+        <p:nvSpPr>
+          <p:cNvPr id="2" name="Slide Image Placeholder 1"/>
+          <p:cNvSpPr>
+            <a:spLocks noGrp="1" noRot="1" noChangeAspect="1"/>
+          </p:cNvSpPr>
+          <p:nvPr>
+            <p:ph type="sldImg"/>
+          </p:nvPr>
+        </p:nvSpPr>
+        <p:spPr/>
+      </p:sp>
+      <p:sp>
+        <p:nvSpPr>
+          <p:cNvPr id="3" name="Notes Placeholder 2"/>
+          <p:cNvSpPr>
+            <a:spLocks noGrp="1"/>
+          </p:cNvSpPr>
+          <p:nvPr>
+            <p:ph type="body" idx="1"/>
+          </p:nvPr>
+        </p:nvSpPr>
+        <p:spPr/>
+        <p:txBody>
+          <a:bodyPr/>
+          <a:lstStyle/>
+          <a:p>
+            <a:r>
+              <a:rPr lang="en-US" dirty="0"/>
+              <a:t>The exemplar is peer-checked against on Friday before CS2 is collected. The ad also served as D1's worked reading, so the room has seen it twice by now.</a:t>
+            </a:r>
+            <a:endParaRPr lang="en-US" dirty="0"/>
+          </a:p>
+        </p:txBody>
+      </p:sp>
+      <p:sp>
+        <p:nvSpPr>
+          <p:cNvPr id="4" name="Slide Number Placeholder 3"/>
+          <p:cNvSpPr>
+            <a:spLocks noGrp="1"/>
+          </p:cNvSpPr>
+          <p:nvPr>
+            <p:ph type="sldNum" sz="quarter" idx="10"/>
+          </p:nvPr>
+        </p:nvSpPr>
+        <p:spPr/>
+        <p:txBody>
+          <a:bodyPr/>
+          <a:lstStyle/>
+          <a:p>
+            <a:fld id="{F7021451-1387-4CA6-816F-3879F97B5CBC}" type="slidenum">
+              <a:rPr lang="en-US"/>
+              <a:t>13</a:t>
+            </a:fld>
+            <a:endParaRPr lang="en-US"/>
+          </a:p>
+        </p:txBody>
+      </p:sp>
+    </p:spTree>
+    <p:extLst>
+      <p:ext uri="{BB962C8B-B14F-4D97-AF65-F5344CB8AC3E}">
+        <p14:creationId xmlns:p14="http://schemas.microsoft.com/office/powerpoint/2010/main" val="1024086991"/>
+      </p:ext>
+    </p:extLst>
+  </p:cSld>
+  <p:clrMapOvr>
+    <a:masterClrMapping/>
+  </p:clrMapOvr>
+</p:notes>
+</file>
+
+<file path=ppt/notesSlides/notesSlide14.xml><?xml version="1.0" encoding="utf-8"?>
+<p:notes xmlns:a="http://schemas.openxmlformats.org/drawingml/2006/main" xmlns:r="http://schemas.openxmlformats.org/officeDocument/2006/relationships" xmlns:p="http://schemas.openxmlformats.org/presentationml/2006/main">
+  <p:cSld>
+    <p:spTree>
+      <p:nvGrpSpPr>
+        <p:cNvPr id="1" name=""/>
+        <p:cNvGrpSpPr/>
+        <p:nvPr/>
+      </p:nvGrpSpPr>
+      <p:grpSpPr>
+        <a:xfrm>
+          <a:off x="0" y="0"/>
+          <a:ext cx="0" cy="0"/>
+          <a:chOff x="0" y="0"/>
+          <a:chExt cx="0" cy="0"/>
+        </a:xfrm>
+      </p:grpSpPr>
+      <p:sp>
+        <p:nvSpPr>
+          <p:cNvPr id="2" name="Slide Image Placeholder 1"/>
+          <p:cNvSpPr>
+            <a:spLocks noGrp="1" noRot="1" noChangeAspect="1"/>
+          </p:cNvSpPr>
+          <p:nvPr>
+            <p:ph type="sldImg"/>
+          </p:nvPr>
+        </p:nvSpPr>
+        <p:spPr/>
+      </p:sp>
+      <p:sp>
+        <p:nvSpPr>
+          <p:cNvPr id="3" name="Notes Placeholder 2"/>
+          <p:cNvSpPr>
+            <a:spLocks noGrp="1"/>
+          </p:cNvSpPr>
+          <p:nvPr>
+            <p:ph type="body" idx="1"/>
+          </p:nvPr>
+        </p:nvSpPr>
+        <p:spPr/>
+        <p:txBody>
+          <a:bodyPr/>
+          <a:lstStyle/>
+          <a:p>
+            <a:r>
+              <a:rPr lang="en-US" dirty="0"/>
+              <a:t>The media-area commitment is Wednesday's milestone; the one-line justification goes on the blog the same day.</a:t>
+            </a:r>
+            <a:endParaRPr lang="en-US" dirty="0"/>
+          </a:p>
+        </p:txBody>
+      </p:sp>
+      <p:sp>
+        <p:nvSpPr>
+          <p:cNvPr id="4" name="Slide Number Placeholder 3"/>
+          <p:cNvSpPr>
+            <a:spLocks noGrp="1"/>
+          </p:cNvSpPr>
+          <p:nvPr>
+            <p:ph type="sldNum" sz="quarter" idx="10"/>
+          </p:nvPr>
+        </p:nvSpPr>
+        <p:spPr/>
+        <p:txBody>
+          <a:bodyPr/>
+          <a:lstStyle/>
+          <a:p>
+            <a:fld id="{F7021451-1387-4CA6-816F-3879F97B5CBC}" type="slidenum">
+              <a:rPr lang="en-US"/>
+              <a:t>14</a:t>
+            </a:fld>
+            <a:endParaRPr lang="en-US"/>
+          </a:p>
+        </p:txBody>
+      </p:sp>
+    </p:spTree>
+    <p:extLst>
+      <p:ext uri="{BB962C8B-B14F-4D97-AF65-F5344CB8AC3E}">
+        <p14:creationId xmlns:p14="http://schemas.microsoft.com/office/powerpoint/2010/main" val="1024086991"/>
+      </p:ext>
+    </p:extLst>
+  </p:cSld>
+  <p:clrMapOvr>
+    <a:masterClrMapping/>
+  </p:clrMapOvr>
+</p:notes>
+</file>
+
+<file path=ppt/notesSlides/notesSlide15.xml><?xml version="1.0" encoding="utf-8"?>
+<p:notes xmlns:a="http://schemas.openxmlformats.org/drawingml/2006/main" xmlns:r="http://schemas.openxmlformats.org/officeDocument/2006/relationships" xmlns:p="http://schemas.openxmlformats.org/presentationml/2006/main">
+  <p:cSld>
+    <p:spTree>
+      <p:nvGrpSpPr>
+        <p:cNvPr id="1" name=""/>
+        <p:cNvGrpSpPr/>
+        <p:nvPr/>
+      </p:nvGrpSpPr>
+      <p:grpSpPr>
+        <a:xfrm>
+          <a:off x="0" y="0"/>
+          <a:ext cx="0" cy="0"/>
+          <a:chOff x="0" y="0"/>
+          <a:chExt cx="0" cy="0"/>
+        </a:xfrm>
+      </p:grpSpPr>
+      <p:sp>
+        <p:nvSpPr>
+          <p:cNvPr id="2" name="Slide Image Placeholder 1"/>
+          <p:cNvSpPr>
+            <a:spLocks noGrp="1" noRot="1" noChangeAspect="1"/>
+          </p:cNvSpPr>
+          <p:nvPr>
+            <p:ph type="sldImg"/>
+          </p:nvPr>
+        </p:nvSpPr>
+        <p:spPr/>
+      </p:sp>
+      <p:sp>
+        <p:nvSpPr>
+          <p:cNvPr id="3" name="Notes Placeholder 2"/>
+          <p:cNvSpPr>
+            <a:spLocks noGrp="1"/>
+          </p:cNvSpPr>
+          <p:nvPr>
+            <p:ph type="body" idx="1"/>
+          </p:nvPr>
+        </p:nvSpPr>
+        <p:spPr/>
+        <p:txBody>
+          <a:bodyPr/>
+          <a:lstStyle/>
+          <a:p>
+            <a:r>
+              <a:rPr lang="en-US" dirty="0"/>
+              <a:t/>
+            </a:r>
+            <a:endParaRPr lang="en-US" dirty="0"/>
+          </a:p>
+        </p:txBody>
+      </p:sp>
+      <p:sp>
+        <p:nvSpPr>
+          <p:cNvPr id="4" name="Slide Number Placeholder 3"/>
+          <p:cNvSpPr>
+            <a:spLocks noGrp="1"/>
+          </p:cNvSpPr>
+          <p:nvPr>
+            <p:ph type="sldNum" sz="quarter" idx="10"/>
+          </p:nvPr>
+        </p:nvSpPr>
+        <p:spPr/>
+        <p:txBody>
+          <a:bodyPr/>
+          <a:lstStyle/>
+          <a:p>
+            <a:fld id="{F7021451-1387-4CA6-816F-3879F97B5CBC}" type="slidenum">
+              <a:rPr lang="en-US"/>
+              <a:t>15</a:t>
             </a:fld>
             <a:endParaRPr lang="en-US"/>
           </a:p>
@@ -953,7 +1220,7 @@
           <a:p>
             <a:r>
               <a:rPr lang="en-US" dirty="0"/>
-              <a:t/>
+              <a:t>Taught from Deck U2.2's worked ad reading: sign, signifier, signified, then denotation and connotation on one advertisement, then polysemy: one image, many possible readings, until context and caption narrow them.</a:t>
             </a:r>
             <a:endParaRPr lang="en-US" dirty="0"/>
           </a:p>
@@ -1129,7 +1396,7 @@
           <a:p>
             <a:r>
               <a:rPr lang="en-US" dirty="0"/>
-              <a:t>Pairs build the chain, then challenge each link. The point is that connotation is cultural, not natural.</a:t>
+              <a:t>Pairs build the chain, then challenge each link. The point is that connotation is cultural, not natural. The coursebook's own red-rose two-sentence task (2.1) closes the block.</a:t>
             </a:r>
             <a:endParaRPr lang="en-US" dirty="0"/>
           </a:p>
@@ -1217,7 +1484,7 @@
           <a:p>
             <a:r>
               <a:rPr lang="en-US" dirty="0"/>
-              <a:t/>
+              <a:t>Kept deliberately as one slide with the aside framing: the exam-example rule governs content examples, and the footnote keeps the core exam-facing.</a:t>
             </a:r>
             <a:endParaRPr lang="en-US" dirty="0"/>
           </a:p>
@@ -1305,7 +1572,7 @@
           <a:p>
             <a:r>
               <a:rPr lang="en-US" dirty="0"/>
-              <a:t/>
+              <a:t>Cells: Twemoji (CC BY 4.0), an early radiograph from the library, the Union flag (Commons). Sort Wars deals the twelve contested signs after: emoji, X-ray, wedding ring, siren, brand logo, thumbprint, crucifix, weather vane and friends; the blends are the fun.</a:t>
             </a:r>
             <a:endParaRPr lang="en-US" dirty="0"/>
           </a:p>
@@ -2160,7 +2427,7 @@
                 <a:ea typeface="Arial" pitchFamily="34" charset="-122"/>
                 <a:cs typeface="Arial" pitchFamily="34" charset="-120"/>
               </a:rPr>
-              <a:t>THE TWO-YEAR CHECKLIST</a:t>
+              <a:t>THE CAPTION SWAP</a:t>
             </a:r>
             <a:endParaRPr lang="en-US" sz="1100" dirty="0"/>
           </a:p>
@@ -2199,7 +2466,7 @@
                 <a:ea typeface="Arial" pitchFamily="34" charset="-122"/>
                 <a:cs typeface="Arial" pitchFamily="34" charset="-120"/>
               </a:rPr>
-              <a:t>RUN ALL FOUR ON EVERY EXTRACT</a:t>
+              <a:t>THE IMAGE NEVER CHANGED</a:t>
             </a:r>
             <a:endParaRPr lang="en-US" sz="1100" dirty="0"/>
           </a:p>
@@ -2230,538 +2497,21 @@
       </p:sp>
       <p:sp>
         <p:nvSpPr>
-          <p:cNvPr id="5" name="Text 3"/>
-          <p:cNvSpPr/>
-          <p:nvPr/>
-        </p:nvSpPr>
-        <p:spPr>
-          <a:xfrm>
-            <a:off x="822960" y="932688"/>
-            <a:ext cx="10543032" cy="640080"/>
-          </a:xfrm>
-          <a:prstGeom prst="rect">
-            <a:avLst/>
-          </a:prstGeom>
-          <a:noFill/>
-          <a:ln/>
-        </p:spPr>
-        <p:txBody>
-          <a:bodyPr wrap="square" lIns="0" tIns="0" rIns="0" bIns="0" rtlCol="0" anchor="ctr"/>
-          <a:lstStyle/>
-          <a:p>
-            <a:pPr indent="0" marL="0">
-              <a:buNone/>
-            </a:pPr>
-            <a:r>
-              <a:rPr lang="en-US" sz="3400" dirty="0">
-                <a:solidFill>
-                  <a:srgbClr val="24313F"/>
-                </a:solidFill>
-                <a:latin typeface="Georgia" pitchFamily="34" charset="0"/>
-                <a:ea typeface="Georgia" pitchFamily="34" charset="-122"/>
-                <a:cs typeface="Georgia" pitchFamily="34" charset="-120"/>
-              </a:rPr>
-              <a:t>Four code families</a:t>
-            </a:r>
-            <a:endParaRPr lang="en-US" sz="3400" dirty="0"/>
-          </a:p>
-        </p:txBody>
-      </p:sp>
-      <p:sp>
-        <p:nvSpPr>
-          <p:cNvPr id="6" name="Text 4"/>
-          <p:cNvSpPr/>
-          <p:nvPr/>
-        </p:nvSpPr>
-        <p:spPr>
-          <a:xfrm>
-            <a:off x="822960" y="1920240"/>
-            <a:ext cx="914400" cy="548640"/>
-          </a:xfrm>
-          <a:prstGeom prst="rect">
-            <a:avLst/>
-          </a:prstGeom>
-          <a:noFill/>
-          <a:ln/>
-        </p:spPr>
-        <p:txBody>
-          <a:bodyPr wrap="square" lIns="0" tIns="0" rIns="0" bIns="0" rtlCol="0" anchor="ctr"/>
-          <a:lstStyle/>
-          <a:p>
-            <a:pPr indent="0" marL="0">
-              <a:buNone/>
-            </a:pPr>
-            <a:r>
-              <a:rPr lang="en-US" sz="3000" dirty="0">
-                <a:solidFill>
-                  <a:srgbClr val="A3C1AD"/>
-                </a:solidFill>
-                <a:latin typeface="Georgia" pitchFamily="34" charset="0"/>
-                <a:ea typeface="Georgia" pitchFamily="34" charset="-122"/>
-                <a:cs typeface="Georgia" pitchFamily="34" charset="-120"/>
-              </a:rPr>
-              <a:t>01</a:t>
-            </a:r>
-            <a:endParaRPr lang="en-US" sz="3000" dirty="0"/>
-          </a:p>
-        </p:txBody>
-      </p:sp>
-      <p:sp>
-        <p:nvSpPr>
-          <p:cNvPr id="7" name="Text 5"/>
-          <p:cNvSpPr/>
-          <p:nvPr/>
-        </p:nvSpPr>
-        <p:spPr>
-          <a:xfrm>
-            <a:off x="1737360" y="1938528"/>
-            <a:ext cx="4082796" cy="457200"/>
-          </a:xfrm>
-          <a:prstGeom prst="rect">
-            <a:avLst/>
-          </a:prstGeom>
-          <a:noFill/>
-          <a:ln/>
-        </p:spPr>
-        <p:txBody>
-          <a:bodyPr wrap="square" lIns="0" tIns="0" rIns="0" bIns="0" rtlCol="0" anchor="ctr"/>
-          <a:lstStyle/>
-          <a:p>
-            <a:pPr indent="0" marL="0">
-              <a:buNone/>
-            </a:pPr>
-            <a:r>
-              <a:rPr lang="en-US" sz="2400" dirty="0">
-                <a:solidFill>
-                  <a:srgbClr val="4A6B5D"/>
-                </a:solidFill>
-                <a:latin typeface="Georgia" pitchFamily="34" charset="0"/>
-                <a:ea typeface="Georgia" pitchFamily="34" charset="-122"/>
-                <a:cs typeface="Georgia" pitchFamily="34" charset="-120"/>
-              </a:rPr>
-              <a:t>Technical</a:t>
-            </a:r>
-            <a:endParaRPr lang="en-US" sz="2400" dirty="0"/>
-          </a:p>
-        </p:txBody>
-      </p:sp>
-      <p:sp>
-        <p:nvSpPr>
-          <p:cNvPr id="8" name="Text 6"/>
-          <p:cNvSpPr/>
-          <p:nvPr/>
-        </p:nvSpPr>
-        <p:spPr>
-          <a:xfrm>
-            <a:off x="1737360" y="2487168"/>
-            <a:ext cx="4082796" cy="1188720"/>
-          </a:xfrm>
-          <a:prstGeom prst="rect">
-            <a:avLst/>
-          </a:prstGeom>
-          <a:noFill/>
-          <a:ln/>
-        </p:spPr>
-        <p:txBody>
-          <a:bodyPr wrap="square" lIns="0" tIns="0" rIns="0" bIns="0" rtlCol="0" anchor="t"/>
-          <a:lstStyle/>
-          <a:p>
-            <a:pPr indent="0" marL="0">
-              <a:lnSpc>
-                <a:spcPts val="2100"/>
-              </a:lnSpc>
-              <a:buNone/>
-            </a:pPr>
-            <a:r>
-              <a:rPr lang="en-US" sz="1550" dirty="0">
-                <a:solidFill>
-                  <a:srgbClr val="24313F"/>
-                </a:solidFill>
-                <a:latin typeface="Georgia" pitchFamily="34" charset="0"/>
-                <a:ea typeface="Georgia" pitchFamily="34" charset="-122"/>
-                <a:cs typeface="Georgia" pitchFamily="34" charset="-120"/>
-              </a:rPr>
-              <a:t>Camera, light, editing: how the image is shot and cut.</a:t>
-            </a:r>
-            <a:endParaRPr lang="en-US" sz="1550" dirty="0"/>
-          </a:p>
-        </p:txBody>
-      </p:sp>
-      <p:sp>
-        <p:nvSpPr>
-          <p:cNvPr id="9" name="Text 7"/>
-          <p:cNvSpPr/>
-          <p:nvPr/>
-        </p:nvSpPr>
-        <p:spPr>
-          <a:xfrm>
-            <a:off x="6368796" y="1920240"/>
-            <a:ext cx="914400" cy="548640"/>
-          </a:xfrm>
-          <a:prstGeom prst="rect">
-            <a:avLst/>
-          </a:prstGeom>
-          <a:noFill/>
-          <a:ln/>
-        </p:spPr>
-        <p:txBody>
-          <a:bodyPr wrap="square" lIns="0" tIns="0" rIns="0" bIns="0" rtlCol="0" anchor="ctr"/>
-          <a:lstStyle/>
-          <a:p>
-            <a:pPr indent="0" marL="0">
-              <a:buNone/>
-            </a:pPr>
-            <a:r>
-              <a:rPr lang="en-US" sz="3000" dirty="0">
-                <a:solidFill>
-                  <a:srgbClr val="A3C1AD"/>
-                </a:solidFill>
-                <a:latin typeface="Georgia" pitchFamily="34" charset="0"/>
-                <a:ea typeface="Georgia" pitchFamily="34" charset="-122"/>
-                <a:cs typeface="Georgia" pitchFamily="34" charset="-120"/>
-              </a:rPr>
-              <a:t>02</a:t>
-            </a:r>
-            <a:endParaRPr lang="en-US" sz="3000" dirty="0"/>
-          </a:p>
-        </p:txBody>
-      </p:sp>
-      <p:sp>
-        <p:nvSpPr>
-          <p:cNvPr id="10" name="Text 8"/>
-          <p:cNvSpPr/>
-          <p:nvPr/>
-        </p:nvSpPr>
-        <p:spPr>
-          <a:xfrm>
-            <a:off x="7283196" y="1938528"/>
-            <a:ext cx="4082796" cy="457200"/>
-          </a:xfrm>
-          <a:prstGeom prst="rect">
-            <a:avLst/>
-          </a:prstGeom>
-          <a:noFill/>
-          <a:ln/>
-        </p:spPr>
-        <p:txBody>
-          <a:bodyPr wrap="square" lIns="0" tIns="0" rIns="0" bIns="0" rtlCol="0" anchor="ctr"/>
-          <a:lstStyle/>
-          <a:p>
-            <a:pPr indent="0" marL="0">
-              <a:buNone/>
-            </a:pPr>
-            <a:r>
-              <a:rPr lang="en-US" sz="2400" dirty="0">
-                <a:solidFill>
-                  <a:srgbClr val="4A6B5D"/>
-                </a:solidFill>
-                <a:latin typeface="Georgia" pitchFamily="34" charset="0"/>
-                <a:ea typeface="Georgia" pitchFamily="34" charset="-122"/>
-                <a:cs typeface="Georgia" pitchFamily="34" charset="-120"/>
-              </a:rPr>
-              <a:t>Symbolic</a:t>
-            </a:r>
-            <a:endParaRPr lang="en-US" sz="2400" dirty="0"/>
-          </a:p>
-        </p:txBody>
-      </p:sp>
-      <p:sp>
-        <p:nvSpPr>
-          <p:cNvPr id="11" name="Text 9"/>
-          <p:cNvSpPr/>
-          <p:nvPr/>
-        </p:nvSpPr>
-        <p:spPr>
-          <a:xfrm>
-            <a:off x="7283196" y="2487168"/>
-            <a:ext cx="4082796" cy="1188720"/>
-          </a:xfrm>
-          <a:prstGeom prst="rect">
-            <a:avLst/>
-          </a:prstGeom>
-          <a:noFill/>
-          <a:ln/>
-        </p:spPr>
-        <p:txBody>
-          <a:bodyPr wrap="square" lIns="0" tIns="0" rIns="0" bIns="0" rtlCol="0" anchor="t"/>
-          <a:lstStyle/>
-          <a:p>
-            <a:pPr indent="0" marL="0">
-              <a:lnSpc>
-                <a:spcPts val="2100"/>
-              </a:lnSpc>
-              <a:buNone/>
-            </a:pPr>
-            <a:r>
-              <a:rPr lang="en-US" sz="1550" dirty="0">
-                <a:solidFill>
-                  <a:srgbClr val="24313F"/>
-                </a:solidFill>
-                <a:latin typeface="Georgia" pitchFamily="34" charset="0"/>
-                <a:ea typeface="Georgia" pitchFamily="34" charset="-122"/>
-                <a:cs typeface="Georgia" pitchFamily="34" charset="-120"/>
-              </a:rPr>
-              <a:t>Objects, color, gesture, dress: what the things in frame claim.</a:t>
-            </a:r>
-            <a:endParaRPr lang="en-US" sz="1550" dirty="0"/>
-          </a:p>
-        </p:txBody>
-      </p:sp>
-      <p:sp>
-        <p:nvSpPr>
-          <p:cNvPr id="12" name="Text 10"/>
-          <p:cNvSpPr/>
-          <p:nvPr/>
-        </p:nvSpPr>
-        <p:spPr>
-          <a:xfrm>
-            <a:off x="822960" y="4114800"/>
-            <a:ext cx="914400" cy="548640"/>
-          </a:xfrm>
-          <a:prstGeom prst="rect">
-            <a:avLst/>
-          </a:prstGeom>
-          <a:noFill/>
-          <a:ln/>
-        </p:spPr>
-        <p:txBody>
-          <a:bodyPr wrap="square" lIns="0" tIns="0" rIns="0" bIns="0" rtlCol="0" anchor="ctr"/>
-          <a:lstStyle/>
-          <a:p>
-            <a:pPr indent="0" marL="0">
-              <a:buNone/>
-            </a:pPr>
-            <a:r>
-              <a:rPr lang="en-US" sz="3000" dirty="0">
-                <a:solidFill>
-                  <a:srgbClr val="A3C1AD"/>
-                </a:solidFill>
-                <a:latin typeface="Georgia" pitchFamily="34" charset="0"/>
-                <a:ea typeface="Georgia" pitchFamily="34" charset="-122"/>
-                <a:cs typeface="Georgia" pitchFamily="34" charset="-120"/>
-              </a:rPr>
-              <a:t>03</a:t>
-            </a:r>
-            <a:endParaRPr lang="en-US" sz="3000" dirty="0"/>
-          </a:p>
-        </p:txBody>
-      </p:sp>
-      <p:sp>
-        <p:nvSpPr>
-          <p:cNvPr id="13" name="Text 11"/>
-          <p:cNvSpPr/>
-          <p:nvPr/>
-        </p:nvSpPr>
-        <p:spPr>
-          <a:xfrm>
-            <a:off x="1737360" y="4133088"/>
-            <a:ext cx="4082796" cy="457200"/>
-          </a:xfrm>
-          <a:prstGeom prst="rect">
-            <a:avLst/>
-          </a:prstGeom>
-          <a:noFill/>
-          <a:ln/>
-        </p:spPr>
-        <p:txBody>
-          <a:bodyPr wrap="square" lIns="0" tIns="0" rIns="0" bIns="0" rtlCol="0" anchor="ctr"/>
-          <a:lstStyle/>
-          <a:p>
-            <a:pPr indent="0" marL="0">
-              <a:buNone/>
-            </a:pPr>
-            <a:r>
-              <a:rPr lang="en-US" sz="2400" dirty="0">
-                <a:solidFill>
-                  <a:srgbClr val="4A6B5D"/>
-                </a:solidFill>
-                <a:latin typeface="Georgia" pitchFamily="34" charset="0"/>
-                <a:ea typeface="Georgia" pitchFamily="34" charset="-122"/>
-                <a:cs typeface="Georgia" pitchFamily="34" charset="-120"/>
-              </a:rPr>
-              <a:t>Written</a:t>
-            </a:r>
-            <a:endParaRPr lang="en-US" sz="2400" dirty="0"/>
-          </a:p>
-        </p:txBody>
-      </p:sp>
-      <p:sp>
-        <p:nvSpPr>
-          <p:cNvPr id="14" name="Text 12"/>
-          <p:cNvSpPr/>
-          <p:nvPr/>
-        </p:nvSpPr>
-        <p:spPr>
-          <a:xfrm>
-            <a:off x="1737360" y="4681728"/>
-            <a:ext cx="4082796" cy="1188720"/>
-          </a:xfrm>
-          <a:prstGeom prst="rect">
-            <a:avLst/>
-          </a:prstGeom>
-          <a:noFill/>
-          <a:ln/>
-        </p:spPr>
-        <p:txBody>
-          <a:bodyPr wrap="square" lIns="0" tIns="0" rIns="0" bIns="0" rtlCol="0" anchor="t"/>
-          <a:lstStyle/>
-          <a:p>
-            <a:pPr indent="0" marL="0">
-              <a:lnSpc>
-                <a:spcPts val="2100"/>
-              </a:lnSpc>
-              <a:buNone/>
-            </a:pPr>
-            <a:r>
-              <a:rPr lang="en-US" sz="1550" dirty="0">
-                <a:solidFill>
-                  <a:srgbClr val="24313F"/>
-                </a:solidFill>
-                <a:latin typeface="Georgia" pitchFamily="34" charset="0"/>
-                <a:ea typeface="Georgia" pitchFamily="34" charset="-122"/>
-                <a:cs typeface="Georgia" pitchFamily="34" charset="-120"/>
-              </a:rPr>
-              <a:t>Any text in frame: titles, captions, signs, subtitles.</a:t>
-            </a:r>
-            <a:endParaRPr lang="en-US" sz="1550" dirty="0"/>
-          </a:p>
-        </p:txBody>
-      </p:sp>
-      <p:sp>
-        <p:nvSpPr>
-          <p:cNvPr id="15" name="Text 13"/>
-          <p:cNvSpPr/>
-          <p:nvPr/>
-        </p:nvSpPr>
-        <p:spPr>
-          <a:xfrm>
-            <a:off x="6368796" y="4114800"/>
-            <a:ext cx="914400" cy="548640"/>
-          </a:xfrm>
-          <a:prstGeom prst="rect">
-            <a:avLst/>
-          </a:prstGeom>
-          <a:noFill/>
-          <a:ln/>
-        </p:spPr>
-        <p:txBody>
-          <a:bodyPr wrap="square" lIns="0" tIns="0" rIns="0" bIns="0" rtlCol="0" anchor="ctr"/>
-          <a:lstStyle/>
-          <a:p>
-            <a:pPr indent="0" marL="0">
-              <a:buNone/>
-            </a:pPr>
-            <a:r>
-              <a:rPr lang="en-US" sz="3000" dirty="0">
-                <a:solidFill>
-                  <a:srgbClr val="A3C1AD"/>
-                </a:solidFill>
-                <a:latin typeface="Georgia" pitchFamily="34" charset="0"/>
-                <a:ea typeface="Georgia" pitchFamily="34" charset="-122"/>
-                <a:cs typeface="Georgia" pitchFamily="34" charset="-120"/>
-              </a:rPr>
-              <a:t>04</a:t>
-            </a:r>
-            <a:endParaRPr lang="en-US" sz="3000" dirty="0"/>
-          </a:p>
-        </p:txBody>
-      </p:sp>
-      <p:sp>
-        <p:nvSpPr>
-          <p:cNvPr id="16" name="Text 14"/>
-          <p:cNvSpPr/>
-          <p:nvPr/>
-        </p:nvSpPr>
-        <p:spPr>
-          <a:xfrm>
-            <a:off x="7283196" y="4133088"/>
-            <a:ext cx="4082796" cy="457200"/>
-          </a:xfrm>
-          <a:prstGeom prst="rect">
-            <a:avLst/>
-          </a:prstGeom>
-          <a:noFill/>
-          <a:ln/>
-        </p:spPr>
-        <p:txBody>
-          <a:bodyPr wrap="square" lIns="0" tIns="0" rIns="0" bIns="0" rtlCol="0" anchor="ctr"/>
-          <a:lstStyle/>
-          <a:p>
-            <a:pPr indent="0" marL="0">
-              <a:buNone/>
-            </a:pPr>
-            <a:r>
-              <a:rPr lang="en-US" sz="2400" dirty="0">
-                <a:solidFill>
-                  <a:srgbClr val="4A6B5D"/>
-                </a:solidFill>
-                <a:latin typeface="Georgia" pitchFamily="34" charset="0"/>
-                <a:ea typeface="Georgia" pitchFamily="34" charset="-122"/>
-                <a:cs typeface="Georgia" pitchFamily="34" charset="-120"/>
-              </a:rPr>
-              <a:t>Audio</a:t>
-            </a:r>
-            <a:endParaRPr lang="en-US" sz="2400" dirty="0"/>
-          </a:p>
-        </p:txBody>
-      </p:sp>
-      <p:sp>
-        <p:nvSpPr>
-          <p:cNvPr id="17" name="Text 15"/>
-          <p:cNvSpPr/>
-          <p:nvPr/>
-        </p:nvSpPr>
-        <p:spPr>
-          <a:xfrm>
-            <a:off x="7283196" y="4681728"/>
-            <a:ext cx="4082796" cy="1188720"/>
-          </a:xfrm>
-          <a:prstGeom prst="rect">
-            <a:avLst/>
-          </a:prstGeom>
-          <a:noFill/>
-          <a:ln/>
-        </p:spPr>
-        <p:txBody>
-          <a:bodyPr wrap="square" lIns="0" tIns="0" rIns="0" bIns="0" rtlCol="0" anchor="t"/>
-          <a:lstStyle/>
-          <a:p>
-            <a:pPr indent="0" marL="0">
-              <a:lnSpc>
-                <a:spcPts val="2100"/>
-              </a:lnSpc>
-              <a:buNone/>
-            </a:pPr>
-            <a:r>
-              <a:rPr lang="en-US" sz="1550" dirty="0">
-                <a:solidFill>
-                  <a:srgbClr val="24313F"/>
-                </a:solidFill>
-                <a:latin typeface="Georgia" pitchFamily="34" charset="0"/>
-                <a:ea typeface="Georgia" pitchFamily="34" charset="-122"/>
-                <a:cs typeface="Georgia" pitchFamily="34" charset="-120"/>
-              </a:rPr>
-              <a:t>Sound, music, silence, and what is deliberately absent.</a:t>
-            </a:r>
-            <a:endParaRPr lang="en-US" sz="1550" dirty="0"/>
-          </a:p>
-        </p:txBody>
-      </p:sp>
-      <p:sp>
-        <p:nvSpPr>
-          <p:cNvPr id="18" name="Shape 16"/>
-          <p:cNvSpPr/>
-          <p:nvPr/>
-        </p:nvSpPr>
-        <p:spPr>
-          <a:xfrm>
-            <a:off x="822960" y="6382512"/>
-            <a:ext cx="10543032" cy="0"/>
-          </a:xfrm>
-          <a:prstGeom prst="line">
-            <a:avLst/>
-          </a:prstGeom>
-          <a:noFill/>
+          <p:cNvPr id="5" name="Shape 3"/>
+          <p:cNvSpPr/>
+          <p:nvPr/>
+        </p:nvSpPr>
+        <p:spPr>
+          <a:xfrm>
+            <a:off x="822960" y="1097280"/>
+            <a:ext cx="5943600" cy="4480560"/>
+          </a:xfrm>
+          <a:prstGeom prst="rect">
+            <a:avLst/>
+          </a:prstGeom>
+          <a:solidFill>
+            <a:srgbClr val="FAF8F1"/>
+          </a:solidFill>
           <a:ln w="9525">
             <a:solidFill>
               <a:srgbClr val="D9D4C4"/>
@@ -2770,32 +2520,56 @@
           </a:ln>
         </p:spPr>
       </p:sp>
-      <p:sp>
-        <p:nvSpPr>
-          <p:cNvPr id="19" name="Text 17"/>
-          <p:cNvSpPr/>
-          <p:nvPr/>
-        </p:nvSpPr>
-        <p:spPr>
-          <a:xfrm>
-            <a:off x="822960" y="6419088"/>
-            <a:ext cx="7315200" cy="274320"/>
-          </a:xfrm>
-          <a:prstGeom prst="rect">
-            <a:avLst/>
-          </a:prstGeom>
-          <a:noFill/>
-          <a:ln/>
-        </p:spPr>
-        <p:txBody>
-          <a:bodyPr wrap="square" lIns="0" tIns="0" rIns="0" bIns="0" rtlCol="0" anchor="ctr"/>
-          <a:lstStyle/>
-          <a:p>
-            <a:pPr indent="0" marL="0">
-              <a:buNone/>
-            </a:pPr>
-            <a:r>
-              <a:rPr lang="en-US" sz="900" spc="150" kern="0" dirty="0">
+      <p:pic>
+        <p:nvPicPr>
+          <p:cNvPr id="6" name="Image 0" descr="/Users/dogan/Documents/Vaults/Courses/wiki/classes/media-studies/decks/_build/img/underwood-sweetheart.jpg">    </p:cNvPr>
+          <p:cNvPicPr>
+            <a:picLocks noChangeAspect="1"/>
+          </p:cNvPicPr>
+          <p:nvPr/>
+        </p:nvPicPr>
+        <p:blipFill>
+          <a:blip r:embed="rId1"/>
+          <a:stretch>
+            <a:fillRect/>
+          </a:stretch>
+        </p:blipFill>
+        <p:spPr>
+          <a:xfrm>
+            <a:off x="1095381" y="1225296"/>
+            <a:ext cx="5398758" cy="4224528"/>
+          </a:xfrm>
+          <a:prstGeom prst="rect">
+            <a:avLst/>
+          </a:prstGeom>
+        </p:spPr>
+      </p:pic>
+      <p:sp>
+        <p:nvSpPr>
+          <p:cNvPr id="7" name="Text 4"/>
+          <p:cNvSpPr/>
+          <p:nvPr/>
+        </p:nvSpPr>
+        <p:spPr>
+          <a:xfrm>
+            <a:off x="822960" y="5623560"/>
+            <a:ext cx="5943600" cy="274320"/>
+          </a:xfrm>
+          <a:prstGeom prst="rect">
+            <a:avLst/>
+          </a:prstGeom>
+          <a:noFill/>
+          <a:ln/>
+        </p:spPr>
+        <p:txBody>
+          <a:bodyPr wrap="square" lIns="0" tIns="0" rIns="0" bIns="0" rtlCol="0" anchor="ctr"/>
+          <a:lstStyle/>
+          <a:p>
+            <a:pPr algn="ctr" indent="0" marL="0">
+              <a:buNone/>
+            </a:pPr>
+            <a:r>
+              <a:rPr lang="en-US" sz="950" dirty="0">
                 <a:solidFill>
                   <a:srgbClr val="7A7F72"/>
                 </a:solidFill>
@@ -2803,6 +2577,433 @@
                 <a:ea typeface="Arial" pitchFamily="34" charset="-122"/>
                 <a:cs typeface="Arial" pitchFamily="34" charset="-120"/>
               </a:rPr>
+              <a:t>Underwood &amp; Underwood, c. 1917</a:t>
+            </a:r>
+            <a:endParaRPr lang="en-US" sz="950" dirty="0"/>
+          </a:p>
+        </p:txBody>
+      </p:sp>
+      <p:sp>
+        <p:nvSpPr>
+          <p:cNvPr id="8" name="Shape 5"/>
+          <p:cNvSpPr/>
+          <p:nvPr/>
+        </p:nvSpPr>
+        <p:spPr>
+          <a:xfrm>
+            <a:off x="7132320" y="1371600"/>
+            <a:ext cx="4206240" cy="1234440"/>
+          </a:xfrm>
+          <a:prstGeom prst="rect">
+            <a:avLst/>
+          </a:prstGeom>
+          <a:solidFill>
+            <a:srgbClr val="E8EFE7"/>
+          </a:solidFill>
+          <a:ln/>
+        </p:spPr>
+      </p:sp>
+      <p:sp>
+        <p:nvSpPr>
+          <p:cNvPr id="9" name="Text 6"/>
+          <p:cNvSpPr/>
+          <p:nvPr/>
+        </p:nvSpPr>
+        <p:spPr>
+          <a:xfrm>
+            <a:off x="7360920" y="1508760"/>
+            <a:ext cx="3749040" cy="274320"/>
+          </a:xfrm>
+          <a:prstGeom prst="rect">
+            <a:avLst/>
+          </a:prstGeom>
+          <a:noFill/>
+          <a:ln/>
+        </p:spPr>
+        <p:txBody>
+          <a:bodyPr wrap="square" lIns="0" tIns="0" rIns="0" bIns="0" rtlCol="0" anchor="ctr"/>
+          <a:lstStyle/>
+          <a:p>
+            <a:pPr indent="0" marL="0">
+              <a:buNone/>
+            </a:pPr>
+            <a:r>
+              <a:rPr lang="en-US" sz="1050" b="1" spc="150" kern="0" dirty="0">
+                <a:solidFill>
+                  <a:srgbClr val="4A6B5D"/>
+                </a:solidFill>
+                <a:latin typeface="Arial" pitchFamily="34" charset="0"/>
+                <a:ea typeface="Arial" pitchFamily="34" charset="-122"/>
+                <a:cs typeface="Arial" pitchFamily="34" charset="-120"/>
+              </a:rPr>
+              <a:t>SYMPATHY</a:t>
+            </a:r>
+            <a:endParaRPr lang="en-US" sz="1050" dirty="0"/>
+          </a:p>
+        </p:txBody>
+      </p:sp>
+      <p:sp>
+        <p:nvSpPr>
+          <p:cNvPr id="10" name="Text 7"/>
+          <p:cNvSpPr/>
+          <p:nvPr/>
+        </p:nvSpPr>
+        <p:spPr>
+          <a:xfrm>
+            <a:off x="7360920" y="1828800"/>
+            <a:ext cx="3794760" cy="685800"/>
+          </a:xfrm>
+          <a:prstGeom prst="rect">
+            <a:avLst/>
+          </a:prstGeom>
+          <a:noFill/>
+          <a:ln/>
+        </p:spPr>
+        <p:txBody>
+          <a:bodyPr wrap="square" lIns="0" tIns="0" rIns="0" bIns="0" rtlCol="0" anchor="t"/>
+          <a:lstStyle/>
+          <a:p>
+            <a:pPr indent="0" marL="0">
+              <a:lnSpc>
+                <a:spcPts val="1900"/>
+              </a:lnSpc>
+              <a:buNone/>
+            </a:pPr>
+            <a:r>
+              <a:rPr lang="en-US" sz="1450" i="1" dirty="0">
+                <a:solidFill>
+                  <a:srgbClr val="24313F"/>
+                </a:solidFill>
+                <a:latin typeface="Georgia" pitchFamily="34" charset="0"/>
+                <a:ea typeface="Georgia" pitchFamily="34" charset="-122"/>
+                <a:cs typeface="Georgia" pitchFamily="34" charset="-120"/>
+              </a:rPr>
+              <a:t>Three women give their men to the war.</a:t>
+            </a:r>
+            <a:endParaRPr lang="en-US" sz="1450" dirty="0"/>
+          </a:p>
+        </p:txBody>
+      </p:sp>
+      <p:sp>
+        <p:nvSpPr>
+          <p:cNvPr id="11" name="Shape 8"/>
+          <p:cNvSpPr/>
+          <p:nvPr/>
+        </p:nvSpPr>
+        <p:spPr>
+          <a:xfrm>
+            <a:off x="7132320" y="2852928"/>
+            <a:ext cx="4206240" cy="1234440"/>
+          </a:xfrm>
+          <a:prstGeom prst="rect">
+            <a:avLst/>
+          </a:prstGeom>
+          <a:solidFill>
+            <a:srgbClr val="E8EFE7"/>
+          </a:solidFill>
+          <a:ln/>
+        </p:spPr>
+      </p:sp>
+      <p:sp>
+        <p:nvSpPr>
+          <p:cNvPr id="12" name="Text 9"/>
+          <p:cNvSpPr/>
+          <p:nvPr/>
+        </p:nvSpPr>
+        <p:spPr>
+          <a:xfrm>
+            <a:off x="7360920" y="2990088"/>
+            <a:ext cx="3749040" cy="274320"/>
+          </a:xfrm>
+          <a:prstGeom prst="rect">
+            <a:avLst/>
+          </a:prstGeom>
+          <a:noFill/>
+          <a:ln/>
+        </p:spPr>
+        <p:txBody>
+          <a:bodyPr wrap="square" lIns="0" tIns="0" rIns="0" bIns="0" rtlCol="0" anchor="ctr"/>
+          <a:lstStyle/>
+          <a:p>
+            <a:pPr indent="0" marL="0">
+              <a:buNone/>
+            </a:pPr>
+            <a:r>
+              <a:rPr lang="en-US" sz="1050" b="1" spc="150" kern="0" dirty="0">
+                <a:solidFill>
+                  <a:srgbClr val="4A6B5D"/>
+                </a:solidFill>
+                <a:latin typeface="Arial" pitchFamily="34" charset="0"/>
+                <a:ea typeface="Arial" pitchFamily="34" charset="-122"/>
+                <a:cs typeface="Arial" pitchFamily="34" charset="-120"/>
+              </a:rPr>
+              <a:t>SUSPICION</a:t>
+            </a:r>
+            <a:endParaRPr lang="en-US" sz="1050" dirty="0"/>
+          </a:p>
+        </p:txBody>
+      </p:sp>
+      <p:sp>
+        <p:nvSpPr>
+          <p:cNvPr id="13" name="Text 10"/>
+          <p:cNvSpPr/>
+          <p:nvPr/>
+        </p:nvSpPr>
+        <p:spPr>
+          <a:xfrm>
+            <a:off x="7360920" y="3310128"/>
+            <a:ext cx="3794760" cy="685800"/>
+          </a:xfrm>
+          <a:prstGeom prst="rect">
+            <a:avLst/>
+          </a:prstGeom>
+          <a:noFill/>
+          <a:ln/>
+        </p:spPr>
+        <p:txBody>
+          <a:bodyPr wrap="square" lIns="0" tIns="0" rIns="0" bIns="0" rtlCol="0" anchor="t"/>
+          <a:lstStyle/>
+          <a:p>
+            <a:pPr indent="0" marL="0">
+              <a:lnSpc>
+                <a:spcPts val="1900"/>
+              </a:lnSpc>
+              <a:buNone/>
+            </a:pPr>
+            <a:r>
+              <a:rPr lang="en-US" sz="1450" i="1" dirty="0">
+                <a:solidFill>
+                  <a:srgbClr val="24313F"/>
+                </a:solidFill>
+                <a:latin typeface="Georgia" pitchFamily="34" charset="0"/>
+                <a:ea typeface="Georgia" pitchFamily="34" charset="-122"/>
+                <a:cs typeface="Georgia" pitchFamily="34" charset="-120"/>
+              </a:rPr>
+              <a:t>Spectators cheer a parade they will not have to march in.</a:t>
+            </a:r>
+            <a:endParaRPr lang="en-US" sz="1450" dirty="0"/>
+          </a:p>
+        </p:txBody>
+      </p:sp>
+      <p:sp>
+        <p:nvSpPr>
+          <p:cNvPr id="14" name="Shape 11"/>
+          <p:cNvSpPr/>
+          <p:nvPr/>
+        </p:nvSpPr>
+        <p:spPr>
+          <a:xfrm>
+            <a:off x="7132320" y="4334256"/>
+            <a:ext cx="4206240" cy="1234440"/>
+          </a:xfrm>
+          <a:prstGeom prst="rect">
+            <a:avLst/>
+          </a:prstGeom>
+          <a:solidFill>
+            <a:srgbClr val="E8EFE7"/>
+          </a:solidFill>
+          <a:ln/>
+        </p:spPr>
+      </p:sp>
+      <p:sp>
+        <p:nvSpPr>
+          <p:cNvPr id="15" name="Text 12"/>
+          <p:cNvSpPr/>
+          <p:nvPr/>
+        </p:nvSpPr>
+        <p:spPr>
+          <a:xfrm>
+            <a:off x="7360920" y="4471416"/>
+            <a:ext cx="3749040" cy="274320"/>
+          </a:xfrm>
+          <a:prstGeom prst="rect">
+            <a:avLst/>
+          </a:prstGeom>
+          <a:noFill/>
+          <a:ln/>
+        </p:spPr>
+        <p:txBody>
+          <a:bodyPr wrap="square" lIns="0" tIns="0" rIns="0" bIns="0" rtlCol="0" anchor="ctr"/>
+          <a:lstStyle/>
+          <a:p>
+            <a:pPr indent="0" marL="0">
+              <a:buNone/>
+            </a:pPr>
+            <a:r>
+              <a:rPr lang="en-US" sz="1050" b="1" spc="150" kern="0" dirty="0">
+                <a:solidFill>
+                  <a:srgbClr val="4A6B5D"/>
+                </a:solidFill>
+                <a:latin typeface="Arial" pitchFamily="34" charset="0"/>
+                <a:ea typeface="Arial" pitchFamily="34" charset="-122"/>
+                <a:cs typeface="Arial" pitchFamily="34" charset="-120"/>
+              </a:rPr>
+              <a:t>COMEDY</a:t>
+            </a:r>
+            <a:endParaRPr lang="en-US" sz="1050" dirty="0"/>
+          </a:p>
+        </p:txBody>
+      </p:sp>
+      <p:sp>
+        <p:nvSpPr>
+          <p:cNvPr id="16" name="Text 13"/>
+          <p:cNvSpPr/>
+          <p:nvPr/>
+        </p:nvSpPr>
+        <p:spPr>
+          <a:xfrm>
+            <a:off x="7360920" y="4791456"/>
+            <a:ext cx="3794760" cy="685800"/>
+          </a:xfrm>
+          <a:prstGeom prst="rect">
+            <a:avLst/>
+          </a:prstGeom>
+          <a:noFill/>
+          <a:ln/>
+        </p:spPr>
+        <p:txBody>
+          <a:bodyPr wrap="square" lIns="0" tIns="0" rIns="0" bIns="0" rtlCol="0" anchor="t"/>
+          <a:lstStyle/>
+          <a:p>
+            <a:pPr indent="0" marL="0">
+              <a:lnSpc>
+                <a:spcPts val="1900"/>
+              </a:lnSpc>
+              <a:buNone/>
+            </a:pPr>
+            <a:r>
+              <a:rPr lang="en-US" sz="1450" i="1" dirty="0">
+                <a:solidFill>
+                  <a:srgbClr val="24313F"/>
+                </a:solidFill>
+                <a:latin typeface="Georgia" pitchFamily="34" charset="0"/>
+                <a:ea typeface="Georgia" pitchFamily="34" charset="-122"/>
+                <a:cs typeface="Georgia" pitchFamily="34" charset="-120"/>
+              </a:rPr>
+              <a:t>Front-row seats, and the hats stay on.</a:t>
+            </a:r>
+            <a:endParaRPr lang="en-US" sz="1450" dirty="0"/>
+          </a:p>
+        </p:txBody>
+      </p:sp>
+      <p:sp>
+        <p:nvSpPr>
+          <p:cNvPr id="17" name="Shape 14"/>
+          <p:cNvSpPr/>
+          <p:nvPr/>
+        </p:nvSpPr>
+        <p:spPr>
+          <a:xfrm>
+            <a:off x="822960" y="5989320"/>
+            <a:ext cx="914400" cy="0"/>
+          </a:xfrm>
+          <a:prstGeom prst="line">
+            <a:avLst/>
+          </a:prstGeom>
+          <a:noFill/>
+          <a:ln w="31750">
+            <a:solidFill>
+              <a:srgbClr val="8C3A38"/>
+            </a:solidFill>
+            <a:prstDash val="solid"/>
+          </a:ln>
+        </p:spPr>
+      </p:sp>
+      <p:sp>
+        <p:nvSpPr>
+          <p:cNvPr id="18" name="Text 15"/>
+          <p:cNvSpPr/>
+          <p:nvPr/>
+        </p:nvSpPr>
+        <p:spPr>
+          <a:xfrm>
+            <a:off x="822960" y="6108192"/>
+            <a:ext cx="10543032" cy="365760"/>
+          </a:xfrm>
+          <a:prstGeom prst="rect">
+            <a:avLst/>
+          </a:prstGeom>
+          <a:noFill/>
+          <a:ln/>
+        </p:spPr>
+        <p:txBody>
+          <a:bodyPr wrap="square" lIns="0" tIns="0" rIns="0" bIns="0" rtlCol="0" anchor="ctr"/>
+          <a:lstStyle/>
+          <a:p>
+            <a:pPr indent="0" marL="0">
+              <a:buNone/>
+            </a:pPr>
+            <a:r>
+              <a:rPr lang="en-US" sz="1300" i="1" dirty="0">
+                <a:solidFill>
+                  <a:srgbClr val="4A6B5D"/>
+                </a:solidFill>
+                <a:latin typeface="Georgia" pitchFamily="34" charset="0"/>
+                <a:ea typeface="Georgia" pitchFamily="34" charset="-122"/>
+                <a:cs typeface="Georgia" pitchFamily="34" charset="-120"/>
+              </a:rPr>
+              <a:t>Three captions, three texts. Anchorage is authorship: whoever writes the words re-makes the image.</a:t>
+            </a:r>
+            <a:endParaRPr lang="en-US" sz="1300" dirty="0"/>
+          </a:p>
+        </p:txBody>
+      </p:sp>
+      <p:sp>
+        <p:nvSpPr>
+          <p:cNvPr id="19" name="Shape 16"/>
+          <p:cNvSpPr/>
+          <p:nvPr/>
+        </p:nvSpPr>
+        <p:spPr>
+          <a:xfrm>
+            <a:off x="822960" y="6382512"/>
+            <a:ext cx="10543032" cy="0"/>
+          </a:xfrm>
+          <a:prstGeom prst="line">
+            <a:avLst/>
+          </a:prstGeom>
+          <a:noFill/>
+          <a:ln w="9525">
+            <a:solidFill>
+              <a:srgbClr val="D9D4C4"/>
+            </a:solidFill>
+            <a:prstDash val="solid"/>
+          </a:ln>
+        </p:spPr>
+      </p:sp>
+      <p:sp>
+        <p:nvSpPr>
+          <p:cNvPr id="20" name="Text 17"/>
+          <p:cNvSpPr/>
+          <p:nvPr/>
+        </p:nvSpPr>
+        <p:spPr>
+          <a:xfrm>
+            <a:off x="822960" y="6419088"/>
+            <a:ext cx="7315200" cy="274320"/>
+          </a:xfrm>
+          <a:prstGeom prst="rect">
+            <a:avLst/>
+          </a:prstGeom>
+          <a:noFill/>
+          <a:ln/>
+        </p:spPr>
+        <p:txBody>
+          <a:bodyPr wrap="square" lIns="0" tIns="0" rIns="0" bIns="0" rtlCol="0" anchor="ctr"/>
+          <a:lstStyle/>
+          <a:p>
+            <a:pPr indent="0" marL="0">
+              <a:buNone/>
+            </a:pPr>
+            <a:r>
+              <a:rPr lang="en-US" sz="900" spc="150" kern="0" dirty="0">
+                <a:solidFill>
+                  <a:srgbClr val="7A7F72"/>
+                </a:solidFill>
+                <a:latin typeface="Arial" pitchFamily="34" charset="0"/>
+                <a:ea typeface="Arial" pitchFamily="34" charset="-122"/>
+                <a:cs typeface="Arial" pitchFamily="34" charset="-120"/>
+              </a:rPr>
               <a:t>MEDIA STUDIES 9607 · SEMESTER I</a:t>
             </a:r>
             <a:endParaRPr lang="en-US" sz="900" dirty="0"/>
@@ -2811,7 +3012,7 @@
       </p:sp>
       <p:sp>
         <p:nvSpPr>
-          <p:cNvPr id="20" name="Text 18"/>
+          <p:cNvPr id="21" name="Text 18"/>
           <p:cNvSpPr/>
           <p:nvPr/>
         </p:nvSpPr>
@@ -2913,7 +3114,7 @@
                 <a:ea typeface="Arial" pitchFamily="34" charset="-122"/>
                 <a:cs typeface="Arial" pitchFamily="34" charset="-120"/>
               </a:rPr>
-              <a:t>FRIDAY · TWO THINGS LEAVE THE ROOM</a:t>
+              <a:t>MODE OF ADDRESS</a:t>
             </a:r>
             <a:endParaRPr lang="en-US" sz="1100" dirty="0"/>
           </a:p>
@@ -2952,7 +3153,7 @@
                 <a:ea typeface="Arial" pitchFamily="34" charset="-122"/>
                 <a:cs typeface="Arial" pitchFamily="34" charset="-120"/>
               </a:rPr>
-              <a:t>ONE COLLECTED, ONE COMMITTED</a:t>
+              <a:t>HOW OLD DOES THIS TEXT THINK YOU ARE?</a:t>
             </a:r>
             <a:endParaRPr lang="en-US" sz="1100" dirty="0"/>
           </a:p>
@@ -2989,24 +3190,24 @@
         </p:nvSpPr>
         <p:spPr>
           <a:xfrm>
-            <a:off x="822960" y="960120"/>
-            <a:ext cx="10543032" cy="731520"/>
-          </a:xfrm>
-          <a:prstGeom prst="rect">
-            <a:avLst/>
-          </a:prstGeom>
-          <a:noFill/>
-          <a:ln/>
-        </p:spPr>
-        <p:txBody>
-          <a:bodyPr wrap="square" lIns="0" tIns="0" rIns="0" bIns="0" rtlCol="0" anchor="ctr"/>
-          <a:lstStyle/>
-          <a:p>
-            <a:pPr indent="0" marL="0">
-              <a:buNone/>
-            </a:pPr>
-            <a:r>
-              <a:rPr lang="en-US" sz="3200" dirty="0">
+            <a:off x="822960" y="914400"/>
+            <a:ext cx="10543032" cy="548640"/>
+          </a:xfrm>
+          <a:prstGeom prst="rect">
+            <a:avLst/>
+          </a:prstGeom>
+          <a:noFill/>
+          <a:ln/>
+        </p:spPr>
+        <p:txBody>
+          <a:bodyPr wrap="square" lIns="0" tIns="0" rIns="0" bIns="0" rtlCol="0" anchor="ctr"/>
+          <a:lstStyle/>
+          <a:p>
+            <a:pPr indent="0" marL="0">
+              <a:buNone/>
+            </a:pPr>
+            <a:r>
+              <a:rPr lang="en-US" sz="3000" dirty="0">
                 <a:solidFill>
                   <a:srgbClr val="24313F"/>
                 </a:solidFill>
@@ -3014,66 +3215,29 @@
                 <a:ea typeface="Georgia" pitchFamily="34" charset="-122"/>
                 <a:cs typeface="Georgia" pitchFamily="34" charset="-120"/>
               </a:rPr>
-              <a:t>CS2, and a decision that lasts until May</a:t>
-            </a:r>
-            <a:endParaRPr lang="en-US" sz="3200" dirty="0"/>
-          </a:p>
-        </p:txBody>
-      </p:sp>
-      <p:sp>
-        <p:nvSpPr>
-          <p:cNvPr id="6" name="Text 4"/>
-          <p:cNvSpPr/>
-          <p:nvPr/>
-        </p:nvSpPr>
-        <p:spPr>
-          <a:xfrm>
-            <a:off x="822960" y="1920240"/>
-            <a:ext cx="4846320" cy="502920"/>
-          </a:xfrm>
-          <a:prstGeom prst="rect">
-            <a:avLst/>
-          </a:prstGeom>
-          <a:noFill/>
-          <a:ln/>
-        </p:spPr>
-        <p:txBody>
-          <a:bodyPr wrap="square" lIns="0" tIns="0" rIns="0" bIns="0" rtlCol="0" anchor="ctr"/>
-          <a:lstStyle/>
-          <a:p>
-            <a:pPr indent="0" marL="0">
-              <a:buNone/>
-            </a:pPr>
-            <a:r>
-              <a:rPr lang="en-US" sz="2400" dirty="0">
-                <a:solidFill>
-                  <a:srgbClr val="4A6B5D"/>
-                </a:solidFill>
-                <a:latin typeface="Georgia" pitchFamily="34" charset="0"/>
-                <a:ea typeface="Georgia" pitchFamily="34" charset="-122"/>
-                <a:cs typeface="Georgia" pitchFamily="34" charset="-120"/>
-              </a:rPr>
-              <a:t>CS2</a:t>
-            </a:r>
-            <a:endParaRPr lang="en-US" sz="2400" dirty="0"/>
-          </a:p>
-        </p:txBody>
-      </p:sp>
-      <p:sp>
-        <p:nvSpPr>
-          <p:cNvPr id="7" name="Shape 5"/>
-          <p:cNvSpPr/>
-          <p:nvPr/>
-        </p:nvSpPr>
-        <p:spPr>
-          <a:xfrm>
-            <a:off x="822960" y="2487168"/>
-            <a:ext cx="4754880" cy="0"/>
-          </a:xfrm>
-          <a:prstGeom prst="line">
-            <a:avLst/>
-          </a:prstGeom>
-          <a:noFill/>
+              <a:t>Three texts, three implied readers</a:t>
+            </a:r>
+            <a:endParaRPr lang="en-US" sz="3000" dirty="0"/>
+          </a:p>
+        </p:txBody>
+      </p:sp>
+      <p:sp>
+        <p:nvSpPr>
+          <p:cNvPr id="6" name="Shape 4"/>
+          <p:cNvSpPr/>
+          <p:nvPr/>
+        </p:nvSpPr>
+        <p:spPr>
+          <a:xfrm>
+            <a:off x="822960" y="1508760"/>
+            <a:ext cx="3246120" cy="2651760"/>
+          </a:xfrm>
+          <a:prstGeom prst="rect">
+            <a:avLst/>
+          </a:prstGeom>
+          <a:solidFill>
+            <a:srgbClr val="FAF8F1"/>
+          </a:solidFill>
           <a:ln w="9525">
             <a:solidFill>
               <a:srgbClr val="D9D4C4"/>
@@ -3082,102 +3246,128 @@
           </a:ln>
         </p:spPr>
       </p:sp>
-      <p:sp>
-        <p:nvSpPr>
-          <p:cNvPr id="8" name="Text 6"/>
-          <p:cNvSpPr/>
-          <p:nvPr/>
-        </p:nvSpPr>
-        <p:spPr>
-          <a:xfrm>
-            <a:off x="822960" y="2651760"/>
-            <a:ext cx="4846320" cy="1828800"/>
-          </a:xfrm>
-          <a:prstGeom prst="rect">
-            <a:avLst/>
-          </a:prstGeom>
-          <a:noFill/>
-          <a:ln/>
-        </p:spPr>
-        <p:txBody>
-          <a:bodyPr wrap="square" lIns="0" tIns="0" rIns="0" bIns="0" rtlCol="0" anchor="t"/>
-          <a:lstStyle/>
-          <a:p>
-            <a:pPr indent="0" marL="0">
-              <a:lnSpc>
-                <a:spcPts val="2400"/>
-              </a:lnSpc>
-              <a:buNone/>
-            </a:pPr>
-            <a:r>
-              <a:rPr lang="en-US" sz="1700" dirty="0">
-                <a:solidFill>
-                  <a:srgbClr val="24313F"/>
+      <p:pic>
+        <p:nvPicPr>
+          <p:cNvPr id="7" name="Image 0" descr="/Users/dogan/Documents/Vaults/Courses/wiki/classes/media-studies/decks/_build/img/dior-jadore.jpg">    </p:cNvPr>
+          <p:cNvPicPr>
+            <a:picLocks noChangeAspect="1"/>
+          </p:cNvPicPr>
+          <p:nvPr/>
+        </p:nvPicPr>
+        <p:blipFill>
+          <a:blip r:embed="rId1"/>
+          <a:stretch>
+            <a:fillRect/>
+          </a:stretch>
+        </p:blipFill>
+        <p:spPr>
+          <a:xfrm>
+            <a:off x="1582684" y="1600200"/>
+            <a:ext cx="1726673" cy="2468880"/>
+          </a:xfrm>
+          <a:prstGeom prst="rect">
+            <a:avLst/>
+          </a:prstGeom>
+        </p:spPr>
+      </p:pic>
+      <p:sp>
+        <p:nvSpPr>
+          <p:cNvPr id="8" name="Text 5"/>
+          <p:cNvSpPr/>
+          <p:nvPr/>
+        </p:nvSpPr>
+        <p:spPr>
+          <a:xfrm>
+            <a:off x="822960" y="4224528"/>
+            <a:ext cx="3246120" cy="365760"/>
+          </a:xfrm>
+          <a:prstGeom prst="rect">
+            <a:avLst/>
+          </a:prstGeom>
+          <a:noFill/>
+          <a:ln/>
+        </p:spPr>
+        <p:txBody>
+          <a:bodyPr wrap="square" lIns="0" tIns="0" rIns="0" bIns="0" rtlCol="0" anchor="ctr"/>
+          <a:lstStyle/>
+          <a:p>
+            <a:pPr indent="0" marL="0">
+              <a:buNone/>
+            </a:pPr>
+            <a:r>
+              <a:rPr lang="en-US" sz="1800" dirty="0">
+                <a:solidFill>
+                  <a:srgbClr val="4A6B5D"/>
                 </a:solidFill>
                 <a:latin typeface="Georgia" pitchFamily="34" charset="0"/>
                 <a:ea typeface="Georgia" pitchFamily="34" charset="-122"/>
                 <a:cs typeface="Georgia" pitchFamily="34" charset="-120"/>
               </a:rPr>
-              <a:t>An everyday media text of your own choosing, annotated with at least six accurate code labels. Peer-checked against the exemplar before it is collected.</a:t>
-            </a:r>
-            <a:endParaRPr lang="en-US" sz="1700" dirty="0"/>
-          </a:p>
-        </p:txBody>
-      </p:sp>
-      <p:sp>
-        <p:nvSpPr>
-          <p:cNvPr id="9" name="Text 7"/>
-          <p:cNvSpPr/>
-          <p:nvPr/>
-        </p:nvSpPr>
-        <p:spPr>
-          <a:xfrm>
-            <a:off x="6309360" y="1920240"/>
-            <a:ext cx="4846320" cy="502920"/>
-          </a:xfrm>
-          <a:prstGeom prst="rect">
-            <a:avLst/>
-          </a:prstGeom>
-          <a:noFill/>
-          <a:ln/>
-        </p:spPr>
-        <p:txBody>
-          <a:bodyPr wrap="square" lIns="0" tIns="0" rIns="0" bIns="0" rtlCol="0" anchor="ctr"/>
-          <a:lstStyle/>
-          <a:p>
-            <a:pPr indent="0" marL="0">
-              <a:buNone/>
-            </a:pPr>
-            <a:r>
-              <a:rPr lang="en-US" sz="2400" dirty="0">
-                <a:solidFill>
-                  <a:srgbClr val="5C7A6B"/>
+              <a:t>The luxury ad</a:t>
+            </a:r>
+            <a:endParaRPr lang="en-US" sz="1800" dirty="0"/>
+          </a:p>
+        </p:txBody>
+      </p:sp>
+      <p:sp>
+        <p:nvSpPr>
+          <p:cNvPr id="9" name="Text 6"/>
+          <p:cNvSpPr/>
+          <p:nvPr/>
+        </p:nvSpPr>
+        <p:spPr>
+          <a:xfrm>
+            <a:off x="822960" y="4617720"/>
+            <a:ext cx="3246120" cy="1051560"/>
+          </a:xfrm>
+          <a:prstGeom prst="rect">
+            <a:avLst/>
+          </a:prstGeom>
+          <a:noFill/>
+          <a:ln/>
+        </p:spPr>
+        <p:txBody>
+          <a:bodyPr wrap="square" lIns="0" tIns="0" rIns="0" bIns="0" rtlCol="0" anchor="t"/>
+          <a:lstStyle/>
+          <a:p>
+            <a:pPr indent="0" marL="0">
+              <a:lnSpc>
+                <a:spcPts val="1800"/>
+              </a:lnSpc>
+              <a:buNone/>
+            </a:pPr>
+            <a:r>
+              <a:rPr lang="en-US" sz="1350" dirty="0">
+                <a:solidFill>
+                  <a:srgbClr val="24313F"/>
                 </a:solidFill>
                 <a:latin typeface="Georgia" pitchFamily="34" charset="0"/>
                 <a:ea typeface="Georgia" pitchFamily="34" charset="-122"/>
                 <a:cs typeface="Georgia" pitchFamily="34" charset="-120"/>
               </a:rPr>
-              <a:t>Your media area</a:t>
-            </a:r>
-            <a:endParaRPr lang="en-US" sz="2400" dirty="0"/>
-          </a:p>
-        </p:txBody>
-      </p:sp>
-      <p:sp>
-        <p:nvSpPr>
-          <p:cNvPr id="10" name="Shape 8"/>
-          <p:cNvSpPr/>
-          <p:nvPr/>
-        </p:nvSpPr>
-        <p:spPr>
-          <a:xfrm>
-            <a:off x="6309360" y="2487168"/>
-            <a:ext cx="4754880" cy="0"/>
-          </a:xfrm>
-          <a:prstGeom prst="line">
-            <a:avLst/>
-          </a:prstGeom>
-          <a:noFill/>
+              <a:t>Assumes money, taste and the habit of being looked at. Speaks in gold and one word.</a:t>
+            </a:r>
+            <a:endParaRPr lang="en-US" sz="1350" dirty="0"/>
+          </a:p>
+        </p:txBody>
+      </p:sp>
+      <p:sp>
+        <p:nvSpPr>
+          <p:cNvPr id="10" name="Shape 7"/>
+          <p:cNvSpPr/>
+          <p:nvPr/>
+        </p:nvSpPr>
+        <p:spPr>
+          <a:xfrm>
+            <a:off x="4471416" y="1508760"/>
+            <a:ext cx="3246120" cy="2651760"/>
+          </a:xfrm>
+          <a:prstGeom prst="rect">
+            <a:avLst/>
+          </a:prstGeom>
+          <a:solidFill>
+            <a:srgbClr val="FAF8F1"/>
+          </a:solidFill>
           <a:ln w="9525">
             <a:solidFill>
               <a:srgbClr val="D9D4C4"/>
@@ -3186,97 +3376,98 @@
           </a:ln>
         </p:spPr>
       </p:sp>
-      <p:sp>
-        <p:nvSpPr>
-          <p:cNvPr id="11" name="Text 9"/>
-          <p:cNvSpPr/>
-          <p:nvPr/>
-        </p:nvSpPr>
-        <p:spPr>
-          <a:xfrm>
-            <a:off x="6309360" y="2651760"/>
-            <a:ext cx="4846320" cy="1828800"/>
-          </a:xfrm>
-          <a:prstGeom prst="rect">
-            <a:avLst/>
-          </a:prstGeom>
-          <a:noFill/>
-          <a:ln/>
-        </p:spPr>
-        <p:txBody>
-          <a:bodyPr wrap="square" lIns="0" tIns="0" rIns="0" bIns="0" rtlCol="0" anchor="t"/>
-          <a:lstStyle/>
-          <a:p>
-            <a:pPr indent="0" marL="0">
-              <a:lnSpc>
-                <a:spcPts val="2400"/>
-              </a:lnSpc>
-              <a:buNone/>
-            </a:pPr>
-            <a:r>
-              <a:rPr lang="en-US" sz="1700" dirty="0">
-                <a:solidFill>
-                  <a:srgbClr val="24313F"/>
+      <p:pic>
+        <p:nvPicPr>
+          <p:cNvPr id="11" name="Image 1" descr="/Users/dogan/Documents/Vaults/Courses/wiki/classes/media-studies/decks/_build/img/nyt-front.jpg">    </p:cNvPr>
+          <p:cNvPicPr>
+            <a:picLocks noChangeAspect="1"/>
+          </p:cNvPicPr>
+          <p:nvPr/>
+        </p:nvPicPr>
+        <p:blipFill>
+          <a:blip r:embed="rId2"/>
+          <a:stretch>
+            <a:fillRect/>
+          </a:stretch>
+        </p:blipFill>
+        <p:spPr>
+          <a:xfrm>
+            <a:off x="5146850" y="1600200"/>
+            <a:ext cx="1895252" cy="2468880"/>
+          </a:xfrm>
+          <a:prstGeom prst="rect">
+            <a:avLst/>
+          </a:prstGeom>
+        </p:spPr>
+      </p:pic>
+      <p:sp>
+        <p:nvSpPr>
+          <p:cNvPr id="12" name="Text 8"/>
+          <p:cNvSpPr/>
+          <p:nvPr/>
+        </p:nvSpPr>
+        <p:spPr>
+          <a:xfrm>
+            <a:off x="4471416" y="4224528"/>
+            <a:ext cx="3246120" cy="365760"/>
+          </a:xfrm>
+          <a:prstGeom prst="rect">
+            <a:avLst/>
+          </a:prstGeom>
+          <a:noFill/>
+          <a:ln/>
+        </p:spPr>
+        <p:txBody>
+          <a:bodyPr wrap="square" lIns="0" tIns="0" rIns="0" bIns="0" rtlCol="0" anchor="ctr"/>
+          <a:lstStyle/>
+          <a:p>
+            <a:pPr indent="0" marL="0">
+              <a:buNone/>
+            </a:pPr>
+            <a:r>
+              <a:rPr lang="en-US" sz="1800" dirty="0">
+                <a:solidFill>
+                  <a:srgbClr val="4A6B5D"/>
                 </a:solidFill>
                 <a:latin typeface="Georgia" pitchFamily="34" charset="0"/>
                 <a:ea typeface="Georgia" pitchFamily="34" charset="-122"/>
                 <a:cs typeface="Georgia" pitchFamily="34" charset="-120"/>
               </a:rPr>
-              <a:t>Committed on Wednesday and logged on the blog with one line of justification. It feeds the case-study document in Lesson 15 and it is not revisitable next week.</a:t>
-            </a:r>
-            <a:endParaRPr lang="en-US" sz="1700" dirty="0"/>
-          </a:p>
-        </p:txBody>
-      </p:sp>
-      <p:sp>
-        <p:nvSpPr>
-          <p:cNvPr id="12" name="Shape 10"/>
-          <p:cNvSpPr/>
-          <p:nvPr/>
-        </p:nvSpPr>
-        <p:spPr>
-          <a:xfrm>
-            <a:off x="822960" y="4663440"/>
-            <a:ext cx="10543032" cy="1005840"/>
-          </a:xfrm>
-          <a:prstGeom prst="rect">
-            <a:avLst/>
-          </a:prstGeom>
-          <a:solidFill>
-            <a:srgbClr val="E8EFE7"/>
-          </a:solidFill>
-          <a:ln/>
-        </p:spPr>
-      </p:sp>
-      <p:sp>
-        <p:nvSpPr>
-          <p:cNvPr id="13" name="Text 11"/>
-          <p:cNvSpPr/>
-          <p:nvPr/>
-        </p:nvSpPr>
-        <p:spPr>
-          <a:xfrm>
-            <a:off x="1097280" y="4754880"/>
-            <a:ext cx="9994392" cy="822960"/>
-          </a:xfrm>
-          <a:prstGeom prst="rect">
-            <a:avLst/>
-          </a:prstGeom>
-          <a:noFill/>
-          <a:ln/>
-        </p:spPr>
-        <p:txBody>
-          <a:bodyPr wrap="square" lIns="0" tIns="0" rIns="0" bIns="0" rtlCol="0" anchor="ctr"/>
+              <a:t>The broadsheet front</a:t>
+            </a:r>
+            <a:endParaRPr lang="en-US" sz="1800" dirty="0"/>
+          </a:p>
+        </p:txBody>
+      </p:sp>
+      <p:sp>
+        <p:nvSpPr>
+          <p:cNvPr id="13" name="Text 9"/>
+          <p:cNvSpPr/>
+          <p:nvPr/>
+        </p:nvSpPr>
+        <p:spPr>
+          <a:xfrm>
+            <a:off x="4471416" y="4617720"/>
+            <a:ext cx="3246120" cy="1051560"/>
+          </a:xfrm>
+          <a:prstGeom prst="rect">
+            <a:avLst/>
+          </a:prstGeom>
+          <a:noFill/>
+          <a:ln/>
+        </p:spPr>
+        <p:txBody>
+          <a:bodyPr wrap="square" lIns="0" tIns="0" rIns="0" bIns="0" rtlCol="0" anchor="t"/>
           <a:lstStyle/>
           <a:p>
             <a:pPr indent="0" marL="0">
               <a:lnSpc>
-                <a:spcPts val="2200"/>
+                <a:spcPts val="1800"/>
               </a:lnSpc>
               <a:buNone/>
             </a:pPr>
             <a:r>
-              <a:rPr lang="en-US" sz="1650" dirty="0">
+              <a:rPr lang="en-US" sz="1350" dirty="0">
                 <a:solidFill>
                   <a:srgbClr val="24313F"/>
                 </a:solidFill>
@@ -3284,27 +3475,29 @@
                 <a:ea typeface="Georgia" pitchFamily="34" charset="-122"/>
                 <a:cs typeface="Georgia" pitchFamily="34" charset="-120"/>
               </a:rPr>
-              <a:t>The road map, said plainly: the technical family is not one bullet on that checklist. It is four lessons with equipment in your hands, and every exercise you shoot in them is a dated post in your Component 1 blog.</a:t>
-            </a:r>
-            <a:endParaRPr lang="en-US" sz="1650" dirty="0"/>
-          </a:p>
-        </p:txBody>
-      </p:sp>
-      <p:sp>
-        <p:nvSpPr>
-          <p:cNvPr id="14" name="Shape 12"/>
-          <p:cNvSpPr/>
-          <p:nvPr/>
-        </p:nvSpPr>
-        <p:spPr>
-          <a:xfrm>
-            <a:off x="822960" y="6382512"/>
-            <a:ext cx="10543032" cy="0"/>
-          </a:xfrm>
-          <a:prstGeom prst="line">
-            <a:avLst/>
-          </a:prstGeom>
-          <a:noFill/>
+              <a:t>Assumes patience, prior knowledge, and trust in columns of grey text.</a:t>
+            </a:r>
+            <a:endParaRPr lang="en-US" sz="1350" dirty="0"/>
+          </a:p>
+        </p:txBody>
+      </p:sp>
+      <p:sp>
+        <p:nvSpPr>
+          <p:cNvPr id="14" name="Shape 10"/>
+          <p:cNvSpPr/>
+          <p:nvPr/>
+        </p:nvSpPr>
+        <p:spPr>
+          <a:xfrm>
+            <a:off x="8119872" y="1508760"/>
+            <a:ext cx="3246120" cy="2651760"/>
+          </a:xfrm>
+          <a:prstGeom prst="rect">
+            <a:avLst/>
+          </a:prstGeom>
+          <a:solidFill>
+            <a:srgbClr val="FAF8F1"/>
+          </a:solidFill>
           <a:ln w="9525">
             <a:solidFill>
               <a:srgbClr val="D9D4C4"/>
@@ -3313,32 +3506,160 @@
           </a:ln>
         </p:spPr>
       </p:sp>
-      <p:sp>
-        <p:nvSpPr>
-          <p:cNvPr id="15" name="Text 13"/>
-          <p:cNvSpPr/>
-          <p:nvPr/>
-        </p:nvSpPr>
-        <p:spPr>
-          <a:xfrm>
-            <a:off x="822960" y="6419088"/>
-            <a:ext cx="7315200" cy="274320"/>
-          </a:xfrm>
-          <a:prstGeom prst="rect">
-            <a:avLst/>
-          </a:prstGeom>
-          <a:noFill/>
-          <a:ln/>
-        </p:spPr>
-        <p:txBody>
-          <a:bodyPr wrap="square" lIns="0" tIns="0" rIns="0" bIns="0" rtlCol="0" anchor="ctr"/>
-          <a:lstStyle/>
-          <a:p>
-            <a:pPr indent="0" marL="0">
-              <a:buNone/>
-            </a:pPr>
-            <a:r>
-              <a:rPr lang="en-US" sz="900" spc="150" kern="0" dirty="0">
+      <p:pic>
+        <p:nvPicPr>
+          <p:cNvPr id="15" name="Image 2" descr="/Users/dogan/Documents/Vaults/Courses/wiki/classes/media-studies/decks/_build/img/app-splash.jpg">    </p:cNvPr>
+          <p:cNvPicPr>
+            <a:picLocks noChangeAspect="1"/>
+          </p:cNvPicPr>
+          <p:nvPr/>
+        </p:nvPicPr>
+        <p:blipFill>
+          <a:blip r:embed="rId3"/>
+          <a:stretch>
+            <a:fillRect/>
+          </a:stretch>
+        </p:blipFill>
+        <p:spPr>
+          <a:xfrm>
+            <a:off x="8919972" y="1600200"/>
+            <a:ext cx="1645920" cy="2468880"/>
+          </a:xfrm>
+          <a:prstGeom prst="rect">
+            <a:avLst/>
+          </a:prstGeom>
+        </p:spPr>
+      </p:pic>
+      <p:sp>
+        <p:nvSpPr>
+          <p:cNvPr id="16" name="Text 11"/>
+          <p:cNvSpPr/>
+          <p:nvPr/>
+        </p:nvSpPr>
+        <p:spPr>
+          <a:xfrm>
+            <a:off x="8119872" y="4224528"/>
+            <a:ext cx="3246120" cy="365760"/>
+          </a:xfrm>
+          <a:prstGeom prst="rect">
+            <a:avLst/>
+          </a:prstGeom>
+          <a:noFill/>
+          <a:ln/>
+        </p:spPr>
+        <p:txBody>
+          <a:bodyPr wrap="square" lIns="0" tIns="0" rIns="0" bIns="0" rtlCol="0" anchor="ctr"/>
+          <a:lstStyle/>
+          <a:p>
+            <a:pPr indent="0" marL="0">
+              <a:buNone/>
+            </a:pPr>
+            <a:r>
+              <a:rPr lang="en-US" sz="1800" dirty="0">
+                <a:solidFill>
+                  <a:srgbClr val="4A6B5D"/>
+                </a:solidFill>
+                <a:latin typeface="Georgia" pitchFamily="34" charset="0"/>
+                <a:ea typeface="Georgia" pitchFamily="34" charset="-122"/>
+                <a:cs typeface="Georgia" pitchFamily="34" charset="-120"/>
+              </a:rPr>
+              <a:t>The app splash</a:t>
+            </a:r>
+            <a:endParaRPr lang="en-US" sz="1800" dirty="0"/>
+          </a:p>
+        </p:txBody>
+      </p:sp>
+      <p:sp>
+        <p:nvSpPr>
+          <p:cNvPr id="17" name="Text 12"/>
+          <p:cNvSpPr/>
+          <p:nvPr/>
+        </p:nvSpPr>
+        <p:spPr>
+          <a:xfrm>
+            <a:off x="8119872" y="4617720"/>
+            <a:ext cx="3246120" cy="1051560"/>
+          </a:xfrm>
+          <a:prstGeom prst="rect">
+            <a:avLst/>
+          </a:prstGeom>
+          <a:noFill/>
+          <a:ln/>
+        </p:spPr>
+        <p:txBody>
+          <a:bodyPr wrap="square" lIns="0" tIns="0" rIns="0" bIns="0" rtlCol="0" anchor="t"/>
+          <a:lstStyle/>
+          <a:p>
+            <a:pPr indent="0" marL="0">
+              <a:lnSpc>
+                <a:spcPts val="1800"/>
+              </a:lnSpc>
+              <a:buNone/>
+            </a:pPr>
+            <a:r>
+              <a:rPr lang="en-US" sz="1350" dirty="0">
+                <a:solidFill>
+                  <a:srgbClr val="24313F"/>
+                </a:solidFill>
+                <a:latin typeface="Georgia" pitchFamily="34" charset="0"/>
+                <a:ea typeface="Georgia" pitchFamily="34" charset="-122"/>
+                <a:cs typeface="Georgia" pitchFamily="34" charset="-120"/>
+              </a:rPr>
+              <a:t>Assumes a thumb, an appetite for now, and no patience at all.</a:t>
+            </a:r>
+            <a:endParaRPr lang="en-US" sz="1350" dirty="0"/>
+          </a:p>
+        </p:txBody>
+      </p:sp>
+      <p:sp>
+        <p:nvSpPr>
+          <p:cNvPr id="18" name="Shape 13"/>
+          <p:cNvSpPr/>
+          <p:nvPr/>
+        </p:nvSpPr>
+        <p:spPr>
+          <a:xfrm>
+            <a:off x="822960" y="5760720"/>
+            <a:ext cx="914400" cy="0"/>
+          </a:xfrm>
+          <a:prstGeom prst="line">
+            <a:avLst/>
+          </a:prstGeom>
+          <a:noFill/>
+          <a:ln w="31750">
+            <a:solidFill>
+              <a:srgbClr val="8C3A38"/>
+            </a:solidFill>
+            <a:prstDash val="solid"/>
+          </a:ln>
+        </p:spPr>
+      </p:sp>
+      <p:sp>
+        <p:nvSpPr>
+          <p:cNvPr id="19" name="Text 14"/>
+          <p:cNvSpPr/>
+          <p:nvPr/>
+        </p:nvSpPr>
+        <p:spPr>
+          <a:xfrm>
+            <a:off x="822960" y="5897880"/>
+            <a:ext cx="10543032" cy="365760"/>
+          </a:xfrm>
+          <a:prstGeom prst="rect">
+            <a:avLst/>
+          </a:prstGeom>
+          <a:noFill/>
+          <a:ln/>
+        </p:spPr>
+        <p:txBody>
+          <a:bodyPr wrap="square" lIns="0" tIns="0" rIns="0" bIns="0" rtlCol="0" anchor="ctr"/>
+          <a:lstStyle/>
+          <a:p>
+            <a:pPr indent="0" marL="0">
+              <a:buNone/>
+            </a:pPr>
+            <a:r>
+              <a:rPr lang="en-US" sz="1200" i="1" dirty="0">
                 <a:solidFill>
                   <a:srgbClr val="7A7F72"/>
                 </a:solidFill>
@@ -3346,6 +3667,68 @@
                 <a:ea typeface="Arial" pitchFamily="34" charset="-122"/>
                 <a:cs typeface="Arial" pitchFamily="34" charset="-120"/>
               </a:rPr>
+              <a:t>Profile each implied reader: age, income, knowledge assumed, mood invited, and the pronoun the text would use for you.</a:t>
+            </a:r>
+            <a:endParaRPr lang="en-US" sz="1200" dirty="0"/>
+          </a:p>
+        </p:txBody>
+      </p:sp>
+      <p:sp>
+        <p:nvSpPr>
+          <p:cNvPr id="20" name="Shape 15"/>
+          <p:cNvSpPr/>
+          <p:nvPr/>
+        </p:nvSpPr>
+        <p:spPr>
+          <a:xfrm>
+            <a:off x="822960" y="6382512"/>
+            <a:ext cx="10543032" cy="0"/>
+          </a:xfrm>
+          <a:prstGeom prst="line">
+            <a:avLst/>
+          </a:prstGeom>
+          <a:noFill/>
+          <a:ln w="9525">
+            <a:solidFill>
+              <a:srgbClr val="D9D4C4"/>
+            </a:solidFill>
+            <a:prstDash val="solid"/>
+          </a:ln>
+        </p:spPr>
+      </p:sp>
+      <p:sp>
+        <p:nvSpPr>
+          <p:cNvPr id="21" name="Text 16"/>
+          <p:cNvSpPr/>
+          <p:nvPr/>
+        </p:nvSpPr>
+        <p:spPr>
+          <a:xfrm>
+            <a:off x="822960" y="6419088"/>
+            <a:ext cx="7315200" cy="274320"/>
+          </a:xfrm>
+          <a:prstGeom prst="rect">
+            <a:avLst/>
+          </a:prstGeom>
+          <a:noFill/>
+          <a:ln/>
+        </p:spPr>
+        <p:txBody>
+          <a:bodyPr wrap="square" lIns="0" tIns="0" rIns="0" bIns="0" rtlCol="0" anchor="ctr"/>
+          <a:lstStyle/>
+          <a:p>
+            <a:pPr indent="0" marL="0">
+              <a:buNone/>
+            </a:pPr>
+            <a:r>
+              <a:rPr lang="en-US" sz="900" spc="150" kern="0" dirty="0">
+                <a:solidFill>
+                  <a:srgbClr val="7A7F72"/>
+                </a:solidFill>
+                <a:latin typeface="Arial" pitchFamily="34" charset="0"/>
+                <a:ea typeface="Arial" pitchFamily="34" charset="-122"/>
+                <a:cs typeface="Arial" pitchFamily="34" charset="-120"/>
+              </a:rPr>
               <a:t>MEDIA STUDIES 9607 · SEMESTER I</a:t>
             </a:r>
             <a:endParaRPr lang="en-US" sz="900" dirty="0"/>
@@ -3354,7 +3737,7 @@
       </p:sp>
       <p:sp>
         <p:nvSpPr>
-          <p:cNvPr id="16" name="Text 14"/>
+          <p:cNvPr id="22" name="Text 17"/>
           <p:cNvSpPr/>
           <p:nvPr/>
         </p:nvSpPr>
@@ -3402,6 +3785,2260 @@
 <file path=ppt/slides/slide12.xml><?xml version="1.0" encoding="utf-8"?>
 <p:sld xmlns:a="http://schemas.openxmlformats.org/drawingml/2006/main" xmlns:r="http://schemas.openxmlformats.org/officeDocument/2006/relationships" xmlns:p="http://schemas.openxmlformats.org/presentationml/2006/main">
   <p:cSld name="Slide 12">
+    <p:bg>
+      <p:bgPr>
+        <a:solidFill>
+          <a:srgbClr val="FAF8F1"/>
+        </a:solidFill>
+      </p:bgPr>
+    </p:bg>
+    <p:spTree>
+      <p:nvGrpSpPr>
+        <p:cNvPr id="1" name=""/>
+        <p:cNvGrpSpPr/>
+        <p:nvPr/>
+      </p:nvGrpSpPr>
+      <p:grpSpPr>
+        <a:xfrm>
+          <a:off x="0" y="0"/>
+          <a:ext cx="0" cy="0"/>
+          <a:chOff x="0" y="0"/>
+          <a:chExt cx="0" cy="0"/>
+        </a:xfrm>
+      </p:grpSpPr>
+      <p:sp>
+        <p:nvSpPr>
+          <p:cNvPr id="2" name="Text 0"/>
+          <p:cNvSpPr/>
+          <p:nvPr/>
+        </p:nvSpPr>
+        <p:spPr>
+          <a:xfrm>
+            <a:off x="822960" y="457200"/>
+            <a:ext cx="6400800" cy="274320"/>
+          </a:xfrm>
+          <a:prstGeom prst="rect">
+            <a:avLst/>
+          </a:prstGeom>
+          <a:noFill/>
+          <a:ln/>
+        </p:spPr>
+        <p:txBody>
+          <a:bodyPr wrap="square" lIns="0" tIns="0" rIns="0" bIns="0" rtlCol="0" anchor="ctr"/>
+          <a:lstStyle/>
+          <a:p>
+            <a:pPr algn="l" indent="0" marL="0">
+              <a:buNone/>
+            </a:pPr>
+            <a:r>
+              <a:rPr lang="en-US" sz="1100" b="1" spc="250" kern="0" dirty="0">
+                <a:solidFill>
+                  <a:srgbClr val="4A6B5D"/>
+                </a:solidFill>
+                <a:latin typeface="Arial" pitchFamily="34" charset="0"/>
+                <a:ea typeface="Arial" pitchFamily="34" charset="-122"/>
+                <a:cs typeface="Arial" pitchFamily="34" charset="-120"/>
+              </a:rPr>
+              <a:t>THE TWO-YEAR CHECKLIST</a:t>
+            </a:r>
+            <a:endParaRPr lang="en-US" sz="1100" dirty="0"/>
+          </a:p>
+        </p:txBody>
+      </p:sp>
+      <p:sp>
+        <p:nvSpPr>
+          <p:cNvPr id="3" name="Text 1"/>
+          <p:cNvSpPr/>
+          <p:nvPr/>
+        </p:nvSpPr>
+        <p:spPr>
+          <a:xfrm>
+            <a:off x="6793992" y="457200"/>
+            <a:ext cx="4572000" cy="274320"/>
+          </a:xfrm>
+          <a:prstGeom prst="rect">
+            <a:avLst/>
+          </a:prstGeom>
+          <a:noFill/>
+          <a:ln/>
+        </p:spPr>
+        <p:txBody>
+          <a:bodyPr wrap="square" lIns="0" tIns="0" rIns="0" bIns="0" rtlCol="0" anchor="ctr"/>
+          <a:lstStyle/>
+          <a:p>
+            <a:pPr algn="r" indent="0" marL="0">
+              <a:buNone/>
+            </a:pPr>
+            <a:r>
+              <a:rPr lang="en-US" sz="1100" b="1" spc="250" kern="0" dirty="0">
+                <a:solidFill>
+                  <a:srgbClr val="7A7F72"/>
+                </a:solidFill>
+                <a:latin typeface="Arial" pitchFamily="34" charset="0"/>
+                <a:ea typeface="Arial" pitchFamily="34" charset="-122"/>
+                <a:cs typeface="Arial" pitchFamily="34" charset="-120"/>
+              </a:rPr>
+              <a:t>RUN ALL FOUR ON EVERY EXTRACT</a:t>
+            </a:r>
+            <a:endParaRPr lang="en-US" sz="1100" dirty="0"/>
+          </a:p>
+        </p:txBody>
+      </p:sp>
+      <p:sp>
+        <p:nvSpPr>
+          <p:cNvPr id="4" name="Shape 2"/>
+          <p:cNvSpPr/>
+          <p:nvPr/>
+        </p:nvSpPr>
+        <p:spPr>
+          <a:xfrm>
+            <a:off x="822960" y="786384"/>
+            <a:ext cx="10543032" cy="0"/>
+          </a:xfrm>
+          <a:prstGeom prst="line">
+            <a:avLst/>
+          </a:prstGeom>
+          <a:noFill/>
+          <a:ln w="9525">
+            <a:solidFill>
+              <a:srgbClr val="D9D4C4"/>
+            </a:solidFill>
+            <a:prstDash val="solid"/>
+          </a:ln>
+        </p:spPr>
+      </p:sp>
+      <p:sp>
+        <p:nvSpPr>
+          <p:cNvPr id="5" name="Text 3"/>
+          <p:cNvSpPr/>
+          <p:nvPr/>
+        </p:nvSpPr>
+        <p:spPr>
+          <a:xfrm>
+            <a:off x="822960" y="914400"/>
+            <a:ext cx="10543032" cy="548640"/>
+          </a:xfrm>
+          <a:prstGeom prst="rect">
+            <a:avLst/>
+          </a:prstGeom>
+          <a:noFill/>
+          <a:ln/>
+        </p:spPr>
+        <p:txBody>
+          <a:bodyPr wrap="square" lIns="0" tIns="0" rIns="0" bIns="0" rtlCol="0" anchor="ctr"/>
+          <a:lstStyle/>
+          <a:p>
+            <a:pPr indent="0" marL="0">
+              <a:buNone/>
+            </a:pPr>
+            <a:r>
+              <a:rPr lang="en-US" sz="3000" dirty="0">
+                <a:solidFill>
+                  <a:srgbClr val="24313F"/>
+                </a:solidFill>
+                <a:latin typeface="Georgia" pitchFamily="34" charset="0"/>
+                <a:ea typeface="Georgia" pitchFamily="34" charset="-122"/>
+                <a:cs typeface="Georgia" pitchFamily="34" charset="-120"/>
+              </a:rPr>
+              <a:t>Four code families, one dense still</a:t>
+            </a:r>
+            <a:endParaRPr lang="en-US" sz="3000" dirty="0"/>
+          </a:p>
+        </p:txBody>
+      </p:sp>
+      <p:sp>
+        <p:nvSpPr>
+          <p:cNvPr id="6" name="Shape 4"/>
+          <p:cNvSpPr/>
+          <p:nvPr/>
+        </p:nvSpPr>
+        <p:spPr>
+          <a:xfrm>
+            <a:off x="822960" y="1554480"/>
+            <a:ext cx="6492240" cy="3931920"/>
+          </a:xfrm>
+          <a:prstGeom prst="rect">
+            <a:avLst/>
+          </a:prstGeom>
+          <a:solidFill>
+            <a:srgbClr val="FAF8F1"/>
+          </a:solidFill>
+          <a:ln w="9525">
+            <a:solidFill>
+              <a:srgbClr val="D9D4C4"/>
+            </a:solidFill>
+            <a:prstDash val="solid"/>
+          </a:ln>
+        </p:spPr>
+      </p:sp>
+      <p:pic>
+        <p:nvPicPr>
+          <p:cNvPr id="7" name="Image 0" descr="/Users/dogan/Documents/Vaults/Courses/wiki/classes/media-studies/decks/_build/img/adolescence-interview.jpg">    </p:cNvPr>
+          <p:cNvPicPr>
+            <a:picLocks noChangeAspect="1"/>
+          </p:cNvPicPr>
+          <p:nvPr/>
+        </p:nvPicPr>
+        <p:blipFill>
+          <a:blip r:embed="rId1"/>
+          <a:stretch>
+            <a:fillRect/>
+          </a:stretch>
+        </p:blipFill>
+        <p:spPr>
+          <a:xfrm>
+            <a:off x="950976" y="1952535"/>
+            <a:ext cx="6236208" cy="3135809"/>
+          </a:xfrm>
+          <a:prstGeom prst="rect">
+            <a:avLst/>
+          </a:prstGeom>
+        </p:spPr>
+      </p:pic>
+      <p:sp>
+        <p:nvSpPr>
+          <p:cNvPr id="8" name="Text 5"/>
+          <p:cNvSpPr/>
+          <p:nvPr/>
+        </p:nvSpPr>
+        <p:spPr>
+          <a:xfrm>
+            <a:off x="822960" y="5532120"/>
+            <a:ext cx="6492240" cy="274320"/>
+          </a:xfrm>
+          <a:prstGeom prst="rect">
+            <a:avLst/>
+          </a:prstGeom>
+          <a:noFill/>
+          <a:ln/>
+        </p:spPr>
+        <p:txBody>
+          <a:bodyPr wrap="square" lIns="0" tIns="0" rIns="0" bIns="0" rtlCol="0" anchor="ctr"/>
+          <a:lstStyle/>
+          <a:p>
+            <a:pPr algn="ctr" indent="0" marL="0">
+              <a:buNone/>
+            </a:pPr>
+            <a:r>
+              <a:rPr lang="en-US" sz="950" dirty="0">
+                <a:solidFill>
+                  <a:srgbClr val="7A7F72"/>
+                </a:solidFill>
+                <a:latin typeface="Arial" pitchFamily="34" charset="0"/>
+                <a:ea typeface="Arial" pitchFamily="34" charset="-122"/>
+                <a:cs typeface="Arial" pitchFamily="34" charset="-120"/>
+              </a:rPr>
+              <a:t>Adolescence (Netflix, 2025): the interview room</a:t>
+            </a:r>
+            <a:endParaRPr lang="en-US" sz="950" dirty="0"/>
+          </a:p>
+        </p:txBody>
+      </p:sp>
+      <p:sp>
+        <p:nvSpPr>
+          <p:cNvPr id="9" name="Text 6"/>
+          <p:cNvSpPr/>
+          <p:nvPr/>
+        </p:nvSpPr>
+        <p:spPr>
+          <a:xfrm>
+            <a:off x="7726680" y="1600200"/>
+            <a:ext cx="548640" cy="457200"/>
+          </a:xfrm>
+          <a:prstGeom prst="rect">
+            <a:avLst/>
+          </a:prstGeom>
+          <a:noFill/>
+          <a:ln/>
+        </p:spPr>
+        <p:txBody>
+          <a:bodyPr wrap="square" lIns="0" tIns="0" rIns="0" bIns="0" rtlCol="0" anchor="ctr"/>
+          <a:lstStyle/>
+          <a:p>
+            <a:pPr indent="0" marL="0">
+              <a:buNone/>
+            </a:pPr>
+            <a:r>
+              <a:rPr lang="en-US" sz="2000" dirty="0">
+                <a:solidFill>
+                  <a:srgbClr val="A3C1AD"/>
+                </a:solidFill>
+                <a:latin typeface="Georgia" pitchFamily="34" charset="0"/>
+                <a:ea typeface="Georgia" pitchFamily="34" charset="-122"/>
+                <a:cs typeface="Georgia" pitchFamily="34" charset="-120"/>
+              </a:rPr>
+              <a:t>01</a:t>
+            </a:r>
+            <a:endParaRPr lang="en-US" sz="2000" dirty="0"/>
+          </a:p>
+        </p:txBody>
+      </p:sp>
+      <p:sp>
+        <p:nvSpPr>
+          <p:cNvPr id="10" name="Text 7"/>
+          <p:cNvSpPr/>
+          <p:nvPr/>
+        </p:nvSpPr>
+        <p:spPr>
+          <a:xfrm>
+            <a:off x="8321040" y="1600200"/>
+            <a:ext cx="3017520" cy="365760"/>
+          </a:xfrm>
+          <a:prstGeom prst="rect">
+            <a:avLst/>
+          </a:prstGeom>
+          <a:noFill/>
+          <a:ln/>
+        </p:spPr>
+        <p:txBody>
+          <a:bodyPr wrap="square" lIns="0" tIns="0" rIns="0" bIns="0" rtlCol="0" anchor="ctr"/>
+          <a:lstStyle/>
+          <a:p>
+            <a:pPr indent="0" marL="0">
+              <a:buNone/>
+            </a:pPr>
+            <a:r>
+              <a:rPr lang="en-US" sz="1700" dirty="0">
+                <a:solidFill>
+                  <a:srgbClr val="4A6B5D"/>
+                </a:solidFill>
+                <a:latin typeface="Georgia" pitchFamily="34" charset="0"/>
+                <a:ea typeface="Georgia" pitchFamily="34" charset="-122"/>
+                <a:cs typeface="Georgia" pitchFamily="34" charset="-120"/>
+              </a:rPr>
+              <a:t>Technical</a:t>
+            </a:r>
+            <a:endParaRPr lang="en-US" sz="1700" dirty="0"/>
+          </a:p>
+        </p:txBody>
+      </p:sp>
+      <p:sp>
+        <p:nvSpPr>
+          <p:cNvPr id="11" name="Text 8"/>
+          <p:cNvSpPr/>
+          <p:nvPr/>
+        </p:nvSpPr>
+        <p:spPr>
+          <a:xfrm>
+            <a:off x="8321040" y="1984248"/>
+            <a:ext cx="3063240" cy="548640"/>
+          </a:xfrm>
+          <a:prstGeom prst="rect">
+            <a:avLst/>
+          </a:prstGeom>
+          <a:noFill/>
+          <a:ln/>
+        </p:spPr>
+        <p:txBody>
+          <a:bodyPr wrap="square" lIns="0" tIns="0" rIns="0" bIns="0" rtlCol="0" anchor="t"/>
+          <a:lstStyle/>
+          <a:p>
+            <a:pPr indent="0" marL="0">
+              <a:lnSpc>
+                <a:spcPts val="1600"/>
+              </a:lnSpc>
+              <a:buNone/>
+            </a:pPr>
+            <a:r>
+              <a:rPr lang="en-US" sz="1250" dirty="0">
+                <a:solidFill>
+                  <a:srgbClr val="24313F"/>
+                </a:solidFill>
+                <a:latin typeface="Georgia" pitchFamily="34" charset="0"/>
+                <a:ea typeface="Georgia" pitchFamily="34" charset="-122"/>
+                <a:cs typeface="Georgia" pitchFamily="34" charset="-120"/>
+              </a:rPr>
+              <a:t>wide, static, eye level; cold institutional light</a:t>
+            </a:r>
+            <a:endParaRPr lang="en-US" sz="1250" dirty="0"/>
+          </a:p>
+        </p:txBody>
+      </p:sp>
+      <p:sp>
+        <p:nvSpPr>
+          <p:cNvPr id="12" name="Text 9"/>
+          <p:cNvSpPr/>
+          <p:nvPr/>
+        </p:nvSpPr>
+        <p:spPr>
+          <a:xfrm>
+            <a:off x="7726680" y="2624328"/>
+            <a:ext cx="548640" cy="457200"/>
+          </a:xfrm>
+          <a:prstGeom prst="rect">
+            <a:avLst/>
+          </a:prstGeom>
+          <a:noFill/>
+          <a:ln/>
+        </p:spPr>
+        <p:txBody>
+          <a:bodyPr wrap="square" lIns="0" tIns="0" rIns="0" bIns="0" rtlCol="0" anchor="ctr"/>
+          <a:lstStyle/>
+          <a:p>
+            <a:pPr indent="0" marL="0">
+              <a:buNone/>
+            </a:pPr>
+            <a:r>
+              <a:rPr lang="en-US" sz="2000" dirty="0">
+                <a:solidFill>
+                  <a:srgbClr val="A3C1AD"/>
+                </a:solidFill>
+                <a:latin typeface="Georgia" pitchFamily="34" charset="0"/>
+                <a:ea typeface="Georgia" pitchFamily="34" charset="-122"/>
+                <a:cs typeface="Georgia" pitchFamily="34" charset="-120"/>
+              </a:rPr>
+              <a:t>02</a:t>
+            </a:r>
+            <a:endParaRPr lang="en-US" sz="2000" dirty="0"/>
+          </a:p>
+        </p:txBody>
+      </p:sp>
+      <p:sp>
+        <p:nvSpPr>
+          <p:cNvPr id="13" name="Text 10"/>
+          <p:cNvSpPr/>
+          <p:nvPr/>
+        </p:nvSpPr>
+        <p:spPr>
+          <a:xfrm>
+            <a:off x="8321040" y="2624328"/>
+            <a:ext cx="3017520" cy="365760"/>
+          </a:xfrm>
+          <a:prstGeom prst="rect">
+            <a:avLst/>
+          </a:prstGeom>
+          <a:noFill/>
+          <a:ln/>
+        </p:spPr>
+        <p:txBody>
+          <a:bodyPr wrap="square" lIns="0" tIns="0" rIns="0" bIns="0" rtlCol="0" anchor="ctr"/>
+          <a:lstStyle/>
+          <a:p>
+            <a:pPr indent="0" marL="0">
+              <a:buNone/>
+            </a:pPr>
+            <a:r>
+              <a:rPr lang="en-US" sz="1700" dirty="0">
+                <a:solidFill>
+                  <a:srgbClr val="4A6B5D"/>
+                </a:solidFill>
+                <a:latin typeface="Georgia" pitchFamily="34" charset="0"/>
+                <a:ea typeface="Georgia" pitchFamily="34" charset="-122"/>
+                <a:cs typeface="Georgia" pitchFamily="34" charset="-120"/>
+              </a:rPr>
+              <a:t>Symbolic</a:t>
+            </a:r>
+            <a:endParaRPr lang="en-US" sz="1700" dirty="0"/>
+          </a:p>
+        </p:txBody>
+      </p:sp>
+      <p:sp>
+        <p:nvSpPr>
+          <p:cNvPr id="14" name="Text 11"/>
+          <p:cNvSpPr/>
+          <p:nvPr/>
+        </p:nvSpPr>
+        <p:spPr>
+          <a:xfrm>
+            <a:off x="8321040" y="3008376"/>
+            <a:ext cx="3063240" cy="548640"/>
+          </a:xfrm>
+          <a:prstGeom prst="rect">
+            <a:avLst/>
+          </a:prstGeom>
+          <a:noFill/>
+          <a:ln/>
+        </p:spPr>
+        <p:txBody>
+          <a:bodyPr wrap="square" lIns="0" tIns="0" rIns="0" bIns="0" rtlCol="0" anchor="t"/>
+          <a:lstStyle/>
+          <a:p>
+            <a:pPr indent="0" marL="0">
+              <a:lnSpc>
+                <a:spcPts val="1600"/>
+              </a:lnSpc>
+              <a:buNone/>
+            </a:pPr>
+            <a:r>
+              <a:rPr lang="en-US" sz="1250" dirty="0">
+                <a:solidFill>
+                  <a:srgbClr val="24313F"/>
+                </a:solidFill>
+                <a:latin typeface="Georgia" pitchFamily="34" charset="0"/>
+                <a:ea typeface="Georgia" pitchFamily="34" charset="-122"/>
+                <a:cs typeface="Georgia" pitchFamily="34" charset="-120"/>
+              </a:rPr>
+              <a:t>the table between them; the sweatshirt; the bare walls</a:t>
+            </a:r>
+            <a:endParaRPr lang="en-US" sz="1250" dirty="0"/>
+          </a:p>
+        </p:txBody>
+      </p:sp>
+      <p:sp>
+        <p:nvSpPr>
+          <p:cNvPr id="15" name="Text 12"/>
+          <p:cNvSpPr/>
+          <p:nvPr/>
+        </p:nvSpPr>
+        <p:spPr>
+          <a:xfrm>
+            <a:off x="7726680" y="3648456"/>
+            <a:ext cx="548640" cy="457200"/>
+          </a:xfrm>
+          <a:prstGeom prst="rect">
+            <a:avLst/>
+          </a:prstGeom>
+          <a:noFill/>
+          <a:ln/>
+        </p:spPr>
+        <p:txBody>
+          <a:bodyPr wrap="square" lIns="0" tIns="0" rIns="0" bIns="0" rtlCol="0" anchor="ctr"/>
+          <a:lstStyle/>
+          <a:p>
+            <a:pPr indent="0" marL="0">
+              <a:buNone/>
+            </a:pPr>
+            <a:r>
+              <a:rPr lang="en-US" sz="2000" dirty="0">
+                <a:solidFill>
+                  <a:srgbClr val="A3C1AD"/>
+                </a:solidFill>
+                <a:latin typeface="Georgia" pitchFamily="34" charset="0"/>
+                <a:ea typeface="Georgia" pitchFamily="34" charset="-122"/>
+                <a:cs typeface="Georgia" pitchFamily="34" charset="-120"/>
+              </a:rPr>
+              <a:t>03</a:t>
+            </a:r>
+            <a:endParaRPr lang="en-US" sz="2000" dirty="0"/>
+          </a:p>
+        </p:txBody>
+      </p:sp>
+      <p:sp>
+        <p:nvSpPr>
+          <p:cNvPr id="16" name="Text 13"/>
+          <p:cNvSpPr/>
+          <p:nvPr/>
+        </p:nvSpPr>
+        <p:spPr>
+          <a:xfrm>
+            <a:off x="8321040" y="3648456"/>
+            <a:ext cx="3017520" cy="365760"/>
+          </a:xfrm>
+          <a:prstGeom prst="rect">
+            <a:avLst/>
+          </a:prstGeom>
+          <a:noFill/>
+          <a:ln/>
+        </p:spPr>
+        <p:txBody>
+          <a:bodyPr wrap="square" lIns="0" tIns="0" rIns="0" bIns="0" rtlCol="0" anchor="ctr"/>
+          <a:lstStyle/>
+          <a:p>
+            <a:pPr indent="0" marL="0">
+              <a:buNone/>
+            </a:pPr>
+            <a:r>
+              <a:rPr lang="en-US" sz="1700" dirty="0">
+                <a:solidFill>
+                  <a:srgbClr val="4A6B5D"/>
+                </a:solidFill>
+                <a:latin typeface="Georgia" pitchFamily="34" charset="0"/>
+                <a:ea typeface="Georgia" pitchFamily="34" charset="-122"/>
+                <a:cs typeface="Georgia" pitchFamily="34" charset="-120"/>
+              </a:rPr>
+              <a:t>Written</a:t>
+            </a:r>
+            <a:endParaRPr lang="en-US" sz="1700" dirty="0"/>
+          </a:p>
+        </p:txBody>
+      </p:sp>
+      <p:sp>
+        <p:nvSpPr>
+          <p:cNvPr id="17" name="Text 14"/>
+          <p:cNvSpPr/>
+          <p:nvPr/>
+        </p:nvSpPr>
+        <p:spPr>
+          <a:xfrm>
+            <a:off x="8321040" y="4032504"/>
+            <a:ext cx="3063240" cy="548640"/>
+          </a:xfrm>
+          <a:prstGeom prst="rect">
+            <a:avLst/>
+          </a:prstGeom>
+          <a:noFill/>
+          <a:ln/>
+        </p:spPr>
+        <p:txBody>
+          <a:bodyPr wrap="square" lIns="0" tIns="0" rIns="0" bIns="0" rtlCol="0" anchor="t"/>
+          <a:lstStyle/>
+          <a:p>
+            <a:pPr indent="0" marL="0">
+              <a:lnSpc>
+                <a:spcPts val="1600"/>
+              </a:lnSpc>
+              <a:buNone/>
+            </a:pPr>
+            <a:r>
+              <a:rPr lang="en-US" sz="1250" dirty="0">
+                <a:solidFill>
+                  <a:srgbClr val="24313F"/>
+                </a:solidFill>
+                <a:latin typeface="Georgia" pitchFamily="34" charset="0"/>
+                <a:ea typeface="Georgia" pitchFamily="34" charset="-122"/>
+                <a:cs typeface="Georgia" pitchFamily="34" charset="-120"/>
+              </a:rPr>
+              <a:t>the notice on the wall; every form on the table</a:t>
+            </a:r>
+            <a:endParaRPr lang="en-US" sz="1250" dirty="0"/>
+          </a:p>
+        </p:txBody>
+      </p:sp>
+      <p:sp>
+        <p:nvSpPr>
+          <p:cNvPr id="18" name="Text 15"/>
+          <p:cNvSpPr/>
+          <p:nvPr/>
+        </p:nvSpPr>
+        <p:spPr>
+          <a:xfrm>
+            <a:off x="7726680" y="4672584"/>
+            <a:ext cx="548640" cy="457200"/>
+          </a:xfrm>
+          <a:prstGeom prst="rect">
+            <a:avLst/>
+          </a:prstGeom>
+          <a:noFill/>
+          <a:ln/>
+        </p:spPr>
+        <p:txBody>
+          <a:bodyPr wrap="square" lIns="0" tIns="0" rIns="0" bIns="0" rtlCol="0" anchor="ctr"/>
+          <a:lstStyle/>
+          <a:p>
+            <a:pPr indent="0" marL="0">
+              <a:buNone/>
+            </a:pPr>
+            <a:r>
+              <a:rPr lang="en-US" sz="2000" dirty="0">
+                <a:solidFill>
+                  <a:srgbClr val="A3C1AD"/>
+                </a:solidFill>
+                <a:latin typeface="Georgia" pitchFamily="34" charset="0"/>
+                <a:ea typeface="Georgia" pitchFamily="34" charset="-122"/>
+                <a:cs typeface="Georgia" pitchFamily="34" charset="-120"/>
+              </a:rPr>
+              <a:t>04</a:t>
+            </a:r>
+            <a:endParaRPr lang="en-US" sz="2000" dirty="0"/>
+          </a:p>
+        </p:txBody>
+      </p:sp>
+      <p:sp>
+        <p:nvSpPr>
+          <p:cNvPr id="19" name="Text 16"/>
+          <p:cNvSpPr/>
+          <p:nvPr/>
+        </p:nvSpPr>
+        <p:spPr>
+          <a:xfrm>
+            <a:off x="8321040" y="4672584"/>
+            <a:ext cx="3017520" cy="365760"/>
+          </a:xfrm>
+          <a:prstGeom prst="rect">
+            <a:avLst/>
+          </a:prstGeom>
+          <a:noFill/>
+          <a:ln/>
+        </p:spPr>
+        <p:txBody>
+          <a:bodyPr wrap="square" lIns="0" tIns="0" rIns="0" bIns="0" rtlCol="0" anchor="ctr"/>
+          <a:lstStyle/>
+          <a:p>
+            <a:pPr indent="0" marL="0">
+              <a:buNone/>
+            </a:pPr>
+            <a:r>
+              <a:rPr lang="en-US" sz="1700" dirty="0">
+                <a:solidFill>
+                  <a:srgbClr val="4A6B5D"/>
+                </a:solidFill>
+                <a:latin typeface="Georgia" pitchFamily="34" charset="0"/>
+                <a:ea typeface="Georgia" pitchFamily="34" charset="-122"/>
+                <a:cs typeface="Georgia" pitchFamily="34" charset="-120"/>
+              </a:rPr>
+              <a:t>Audio</a:t>
+            </a:r>
+            <a:endParaRPr lang="en-US" sz="1700" dirty="0"/>
+          </a:p>
+        </p:txBody>
+      </p:sp>
+      <p:sp>
+        <p:nvSpPr>
+          <p:cNvPr id="20" name="Text 17"/>
+          <p:cNvSpPr/>
+          <p:nvPr/>
+        </p:nvSpPr>
+        <p:spPr>
+          <a:xfrm>
+            <a:off x="8321040" y="5056632"/>
+            <a:ext cx="3063240" cy="548640"/>
+          </a:xfrm>
+          <a:prstGeom prst="rect">
+            <a:avLst/>
+          </a:prstGeom>
+          <a:noFill/>
+          <a:ln/>
+        </p:spPr>
+        <p:txBody>
+          <a:bodyPr wrap="square" lIns="0" tIns="0" rIns="0" bIns="0" rtlCol="0" anchor="t"/>
+          <a:lstStyle/>
+          <a:p>
+            <a:pPr indent="0" marL="0">
+              <a:lnSpc>
+                <a:spcPts val="1600"/>
+              </a:lnSpc>
+              <a:buNone/>
+            </a:pPr>
+            <a:r>
+              <a:rPr lang="en-US" sz="1250" dirty="0">
+                <a:solidFill>
+                  <a:srgbClr val="24313F"/>
+                </a:solidFill>
+                <a:latin typeface="Georgia" pitchFamily="34" charset="0"/>
+                <a:ea typeface="Georgia" pitchFamily="34" charset="-122"/>
+                <a:cs typeface="Georgia" pitchFamily="34" charset="-120"/>
+              </a:rPr>
+              <a:t>what the room would sound like: hum, chairs, silence</a:t>
+            </a:r>
+            <a:endParaRPr lang="en-US" sz="1250" dirty="0"/>
+          </a:p>
+        </p:txBody>
+      </p:sp>
+      <p:sp>
+        <p:nvSpPr>
+          <p:cNvPr id="21" name="Shape 18"/>
+          <p:cNvSpPr/>
+          <p:nvPr/>
+        </p:nvSpPr>
+        <p:spPr>
+          <a:xfrm>
+            <a:off x="822960" y="6382512"/>
+            <a:ext cx="10543032" cy="0"/>
+          </a:xfrm>
+          <a:prstGeom prst="line">
+            <a:avLst/>
+          </a:prstGeom>
+          <a:noFill/>
+          <a:ln w="9525">
+            <a:solidFill>
+              <a:srgbClr val="D9D4C4"/>
+            </a:solidFill>
+            <a:prstDash val="solid"/>
+          </a:ln>
+        </p:spPr>
+      </p:sp>
+      <p:sp>
+        <p:nvSpPr>
+          <p:cNvPr id="22" name="Text 19"/>
+          <p:cNvSpPr/>
+          <p:nvPr/>
+        </p:nvSpPr>
+        <p:spPr>
+          <a:xfrm>
+            <a:off x="822960" y="6419088"/>
+            <a:ext cx="7315200" cy="274320"/>
+          </a:xfrm>
+          <a:prstGeom prst="rect">
+            <a:avLst/>
+          </a:prstGeom>
+          <a:noFill/>
+          <a:ln/>
+        </p:spPr>
+        <p:txBody>
+          <a:bodyPr wrap="square" lIns="0" tIns="0" rIns="0" bIns="0" rtlCol="0" anchor="ctr"/>
+          <a:lstStyle/>
+          <a:p>
+            <a:pPr indent="0" marL="0">
+              <a:buNone/>
+            </a:pPr>
+            <a:r>
+              <a:rPr lang="en-US" sz="900" spc="150" kern="0" dirty="0">
+                <a:solidFill>
+                  <a:srgbClr val="7A7F72"/>
+                </a:solidFill>
+                <a:latin typeface="Arial" pitchFamily="34" charset="0"/>
+                <a:ea typeface="Arial" pitchFamily="34" charset="-122"/>
+                <a:cs typeface="Arial" pitchFamily="34" charset="-120"/>
+              </a:rPr>
+              <a:t>MEDIA STUDIES 9607 · SEMESTER I</a:t>
+            </a:r>
+            <a:endParaRPr lang="en-US" sz="900" dirty="0"/>
+          </a:p>
+        </p:txBody>
+      </p:sp>
+      <p:sp>
+        <p:nvSpPr>
+          <p:cNvPr id="23" name="Text 20"/>
+          <p:cNvSpPr/>
+          <p:nvPr/>
+        </p:nvSpPr>
+        <p:spPr>
+          <a:xfrm>
+            <a:off x="10268712" y="6355080"/>
+            <a:ext cx="1097280" cy="365760"/>
+          </a:xfrm>
+          <a:prstGeom prst="rect">
+            <a:avLst/>
+          </a:prstGeom>
+          <a:noFill/>
+          <a:ln/>
+        </p:spPr>
+        <p:txBody>
+          <a:bodyPr wrap="square" lIns="0" tIns="0" rIns="0" bIns="0" rtlCol="0" anchor="ctr"/>
+          <a:lstStyle/>
+          <a:p>
+            <a:pPr algn="r" indent="0" marL="0">
+              <a:buNone/>
+            </a:pPr>
+            <a:r>
+              <a:rPr lang="en-US" sz="1600" dirty="0">
+                <a:solidFill>
+                  <a:srgbClr val="A3C1AD"/>
+                </a:solidFill>
+                <a:latin typeface="Georgia" pitchFamily="34" charset="0"/>
+                <a:ea typeface="Georgia" pitchFamily="34" charset="-122"/>
+                <a:cs typeface="Georgia" pitchFamily="34" charset="-120"/>
+              </a:rPr>
+              <a:t>06</a:t>
+            </a:r>
+            <a:endParaRPr lang="en-US" sz="1600" dirty="0"/>
+          </a:p>
+        </p:txBody>
+      </p:sp>
+    </p:spTree>
+  </p:cSld>
+  <p:clrMapOvr>
+    <a:masterClrMapping/>
+  </p:clrMapOvr>
+</p:sld>
+</file>
+
+<file path=ppt/slides/slide13.xml><?xml version="1.0" encoding="utf-8"?>
+<p:sld xmlns:a="http://schemas.openxmlformats.org/drawingml/2006/main" xmlns:r="http://schemas.openxmlformats.org/officeDocument/2006/relationships" xmlns:p="http://schemas.openxmlformats.org/presentationml/2006/main">
+  <p:cSld name="Slide 13">
+    <p:bg>
+      <p:bgPr>
+        <a:solidFill>
+          <a:srgbClr val="FAF8F1"/>
+        </a:solidFill>
+      </p:bgPr>
+    </p:bg>
+    <p:spTree>
+      <p:nvGrpSpPr>
+        <p:cNvPr id="1" name=""/>
+        <p:cNvGrpSpPr/>
+        <p:nvPr/>
+      </p:nvGrpSpPr>
+      <p:grpSpPr>
+        <a:xfrm>
+          <a:off x="0" y="0"/>
+          <a:ext cx="0" cy="0"/>
+          <a:chOff x="0" y="0"/>
+          <a:chExt cx="0" cy="0"/>
+        </a:xfrm>
+      </p:grpSpPr>
+      <p:sp>
+        <p:nvSpPr>
+          <p:cNvPr id="2" name="Text 0"/>
+          <p:cNvSpPr/>
+          <p:nvPr/>
+        </p:nvSpPr>
+        <p:spPr>
+          <a:xfrm>
+            <a:off x="822960" y="457200"/>
+            <a:ext cx="6400800" cy="274320"/>
+          </a:xfrm>
+          <a:prstGeom prst="rect">
+            <a:avLst/>
+          </a:prstGeom>
+          <a:noFill/>
+          <a:ln/>
+        </p:spPr>
+        <p:txBody>
+          <a:bodyPr wrap="square" lIns="0" tIns="0" rIns="0" bIns="0" rtlCol="0" anchor="ctr"/>
+          <a:lstStyle/>
+          <a:p>
+            <a:pPr algn="l" indent="0" marL="0">
+              <a:buNone/>
+            </a:pPr>
+            <a:r>
+              <a:rPr lang="en-US" sz="1100" b="1" spc="250" kern="0" dirty="0">
+                <a:solidFill>
+                  <a:srgbClr val="4A6B5D"/>
+                </a:solidFill>
+                <a:latin typeface="Arial" pitchFamily="34" charset="0"/>
+                <a:ea typeface="Arial" pitchFamily="34" charset="-122"/>
+                <a:cs typeface="Arial" pitchFamily="34" charset="-120"/>
+              </a:rPr>
+              <a:t>THE CS2 EXEMPLAR</a:t>
+            </a:r>
+            <a:endParaRPr lang="en-US" sz="1100" dirty="0"/>
+          </a:p>
+        </p:txBody>
+      </p:sp>
+      <p:sp>
+        <p:nvSpPr>
+          <p:cNvPr id="3" name="Text 1"/>
+          <p:cNvSpPr/>
+          <p:nvPr/>
+        </p:nvSpPr>
+        <p:spPr>
+          <a:xfrm>
+            <a:off x="6793992" y="457200"/>
+            <a:ext cx="4572000" cy="274320"/>
+          </a:xfrm>
+          <a:prstGeom prst="rect">
+            <a:avLst/>
+          </a:prstGeom>
+          <a:noFill/>
+          <a:ln/>
+        </p:spPr>
+        <p:txBody>
+          <a:bodyPr wrap="square" lIns="0" tIns="0" rIns="0" bIns="0" rtlCol="0" anchor="ctr"/>
+          <a:lstStyle/>
+          <a:p>
+            <a:pPr algn="r" indent="0" marL="0">
+              <a:buNone/>
+            </a:pPr>
+            <a:r>
+              <a:rPr lang="en-US" sz="1100" b="1" spc="250" kern="0" dirty="0">
+                <a:solidFill>
+                  <a:srgbClr val="7A7F72"/>
+                </a:solidFill>
+                <a:latin typeface="Arial" pitchFamily="34" charset="0"/>
+                <a:ea typeface="Arial" pitchFamily="34" charset="-122"/>
+                <a:cs typeface="Arial" pitchFamily="34" charset="-120"/>
+              </a:rPr>
+              <a:t>SIX LABELS, ONE AD</a:t>
+            </a:r>
+            <a:endParaRPr lang="en-US" sz="1100" dirty="0"/>
+          </a:p>
+        </p:txBody>
+      </p:sp>
+      <p:sp>
+        <p:nvSpPr>
+          <p:cNvPr id="4" name="Shape 2"/>
+          <p:cNvSpPr/>
+          <p:nvPr/>
+        </p:nvSpPr>
+        <p:spPr>
+          <a:xfrm>
+            <a:off x="822960" y="786384"/>
+            <a:ext cx="10543032" cy="0"/>
+          </a:xfrm>
+          <a:prstGeom prst="line">
+            <a:avLst/>
+          </a:prstGeom>
+          <a:noFill/>
+          <a:ln w="9525">
+            <a:solidFill>
+              <a:srgbClr val="D9D4C4"/>
+            </a:solidFill>
+            <a:prstDash val="solid"/>
+          </a:ln>
+        </p:spPr>
+      </p:sp>
+      <p:sp>
+        <p:nvSpPr>
+          <p:cNvPr id="5" name="Shape 3"/>
+          <p:cNvSpPr/>
+          <p:nvPr/>
+        </p:nvSpPr>
+        <p:spPr>
+          <a:xfrm>
+            <a:off x="822960" y="1097280"/>
+            <a:ext cx="4023360" cy="4846320"/>
+          </a:xfrm>
+          <a:prstGeom prst="rect">
+            <a:avLst/>
+          </a:prstGeom>
+          <a:solidFill>
+            <a:srgbClr val="FAF8F1"/>
+          </a:solidFill>
+          <a:ln w="9525">
+            <a:solidFill>
+              <a:srgbClr val="D9D4C4"/>
+            </a:solidFill>
+            <a:prstDash val="solid"/>
+          </a:ln>
+        </p:spPr>
+      </p:sp>
+      <p:pic>
+        <p:nvPicPr>
+          <p:cNvPr id="6" name="Image 0" descr="/Users/dogan/Documents/Vaults/Courses/wiki/classes/media-studies/decks/_build/img/dior-sauvage.jpg">    </p:cNvPr>
+          <p:cNvPicPr>
+            <a:picLocks noChangeAspect="1"/>
+          </p:cNvPicPr>
+          <p:nvPr/>
+        </p:nvPicPr>
+        <p:blipFill>
+          <a:blip r:embed="rId1"/>
+          <a:stretch>
+            <a:fillRect/>
+          </a:stretch>
+        </p:blipFill>
+        <p:spPr>
+          <a:xfrm>
+            <a:off x="1173378" y="1225296"/>
+            <a:ext cx="3322523" cy="4590288"/>
+          </a:xfrm>
+          <a:prstGeom prst="rect">
+            <a:avLst/>
+          </a:prstGeom>
+        </p:spPr>
+      </p:pic>
+      <p:sp>
+        <p:nvSpPr>
+          <p:cNvPr id="7" name="Text 4"/>
+          <p:cNvSpPr/>
+          <p:nvPr/>
+        </p:nvSpPr>
+        <p:spPr>
+          <a:xfrm>
+            <a:off x="822960" y="5989320"/>
+            <a:ext cx="4023360" cy="274320"/>
+          </a:xfrm>
+          <a:prstGeom prst="rect">
+            <a:avLst/>
+          </a:prstGeom>
+          <a:noFill/>
+          <a:ln/>
+        </p:spPr>
+        <p:txBody>
+          <a:bodyPr wrap="square" lIns="0" tIns="0" rIns="0" bIns="0" rtlCol="0" anchor="ctr"/>
+          <a:lstStyle/>
+          <a:p>
+            <a:pPr algn="ctr" indent="0" marL="0">
+              <a:buNone/>
+            </a:pPr>
+            <a:r>
+              <a:rPr lang="en-US" sz="950" dirty="0">
+                <a:solidFill>
+                  <a:srgbClr val="7A7F72"/>
+                </a:solidFill>
+                <a:latin typeface="Arial" pitchFamily="34" charset="0"/>
+                <a:ea typeface="Arial" pitchFamily="34" charset="-122"/>
+                <a:cs typeface="Arial" pitchFamily="34" charset="-120"/>
+              </a:rPr>
+              <a:t>Dior, Sauvage print campaign</a:t>
+            </a:r>
+            <a:endParaRPr lang="en-US" sz="950" dirty="0"/>
+          </a:p>
+        </p:txBody>
+      </p:sp>
+      <p:sp>
+        <p:nvSpPr>
+          <p:cNvPr id="8" name="Text 5"/>
+          <p:cNvSpPr/>
+          <p:nvPr/>
+        </p:nvSpPr>
+        <p:spPr>
+          <a:xfrm>
+            <a:off x="4937760" y="1325880"/>
+            <a:ext cx="1371600" cy="365760"/>
+          </a:xfrm>
+          <a:prstGeom prst="rect">
+            <a:avLst/>
+          </a:prstGeom>
+          <a:noFill/>
+          <a:ln/>
+        </p:spPr>
+        <p:txBody>
+          <a:bodyPr wrap="square" lIns="0" tIns="0" rIns="0" bIns="0" rtlCol="0" anchor="ctr"/>
+          <a:lstStyle/>
+          <a:p>
+            <a:pPr indent="0" marL="0">
+              <a:buNone/>
+            </a:pPr>
+            <a:r>
+              <a:rPr lang="en-US" sz="1000" b="1" spc="100" kern="0" dirty="0">
+                <a:solidFill>
+                  <a:srgbClr val="4A6B5D"/>
+                </a:solidFill>
+                <a:latin typeface="Arial" pitchFamily="34" charset="0"/>
+                <a:ea typeface="Arial" pitchFamily="34" charset="-122"/>
+                <a:cs typeface="Arial" pitchFamily="34" charset="-120"/>
+              </a:rPr>
+              <a:t>WRITTEN</a:t>
+            </a:r>
+            <a:endParaRPr lang="en-US" sz="1000" dirty="0"/>
+          </a:p>
+        </p:txBody>
+      </p:sp>
+      <p:sp>
+        <p:nvSpPr>
+          <p:cNvPr id="9" name="Text 6"/>
+          <p:cNvSpPr/>
+          <p:nvPr/>
+        </p:nvSpPr>
+        <p:spPr>
+          <a:xfrm>
+            <a:off x="6355080" y="1325880"/>
+            <a:ext cx="5029200" cy="685800"/>
+          </a:xfrm>
+          <a:prstGeom prst="rect">
+            <a:avLst/>
+          </a:prstGeom>
+          <a:noFill/>
+          <a:ln/>
+        </p:spPr>
+        <p:txBody>
+          <a:bodyPr wrap="square" lIns="0" tIns="0" rIns="0" bIns="0" rtlCol="0" anchor="t"/>
+          <a:lstStyle/>
+          <a:p>
+            <a:pPr indent="0" marL="0">
+              <a:lnSpc>
+                <a:spcPts val="1700"/>
+              </a:lnSpc>
+              <a:buNone/>
+            </a:pPr>
+            <a:r>
+              <a:rPr lang="en-US" sz="1350" dirty="0">
+                <a:solidFill>
+                  <a:srgbClr val="24313F"/>
+                </a:solidFill>
+                <a:latin typeface="Georgia" pitchFamily="34" charset="0"/>
+                <a:ea typeface="Georgia" pitchFamily="34" charset="-122"/>
+                <a:cs typeface="Georgia" pitchFamily="34" charset="-120"/>
+              </a:rPr>
+              <a:t>SAUVAGE; WILD AT HEART; DIOR: three registers of one claim</a:t>
+            </a:r>
+            <a:endParaRPr lang="en-US" sz="1350" dirty="0"/>
+          </a:p>
+        </p:txBody>
+      </p:sp>
+      <p:sp>
+        <p:nvSpPr>
+          <p:cNvPr id="10" name="Text 7"/>
+          <p:cNvSpPr/>
+          <p:nvPr/>
+        </p:nvSpPr>
+        <p:spPr>
+          <a:xfrm>
+            <a:off x="4937760" y="2084832"/>
+            <a:ext cx="1371600" cy="365760"/>
+          </a:xfrm>
+          <a:prstGeom prst="rect">
+            <a:avLst/>
+          </a:prstGeom>
+          <a:noFill/>
+          <a:ln/>
+        </p:spPr>
+        <p:txBody>
+          <a:bodyPr wrap="square" lIns="0" tIns="0" rIns="0" bIns="0" rtlCol="0" anchor="ctr"/>
+          <a:lstStyle/>
+          <a:p>
+            <a:pPr indent="0" marL="0">
+              <a:buNone/>
+            </a:pPr>
+            <a:r>
+              <a:rPr lang="en-US" sz="1000" b="1" spc="100" kern="0" dirty="0">
+                <a:solidFill>
+                  <a:srgbClr val="4A6B5D"/>
+                </a:solidFill>
+                <a:latin typeface="Arial" pitchFamily="34" charset="0"/>
+                <a:ea typeface="Arial" pitchFamily="34" charset="-122"/>
+                <a:cs typeface="Arial" pitchFamily="34" charset="-120"/>
+              </a:rPr>
+              <a:t>SYMBOLIC</a:t>
+            </a:r>
+            <a:endParaRPr lang="en-US" sz="1000" dirty="0"/>
+          </a:p>
+        </p:txBody>
+      </p:sp>
+      <p:sp>
+        <p:nvSpPr>
+          <p:cNvPr id="11" name="Text 8"/>
+          <p:cNvSpPr/>
+          <p:nvPr/>
+        </p:nvSpPr>
+        <p:spPr>
+          <a:xfrm>
+            <a:off x="6355080" y="2084832"/>
+            <a:ext cx="5029200" cy="685800"/>
+          </a:xfrm>
+          <a:prstGeom prst="rect">
+            <a:avLst/>
+          </a:prstGeom>
+          <a:noFill/>
+          <a:ln/>
+        </p:spPr>
+        <p:txBody>
+          <a:bodyPr wrap="square" lIns="0" tIns="0" rIns="0" bIns="0" rtlCol="0" anchor="t"/>
+          <a:lstStyle/>
+          <a:p>
+            <a:pPr indent="0" marL="0">
+              <a:lnSpc>
+                <a:spcPts val="1700"/>
+              </a:lnSpc>
+              <a:buNone/>
+            </a:pPr>
+            <a:r>
+              <a:rPr lang="en-US" sz="1350" dirty="0">
+                <a:solidFill>
+                  <a:srgbClr val="24313F"/>
+                </a:solidFill>
+                <a:latin typeface="Georgia" pitchFamily="34" charset="0"/>
+                <a:ea typeface="Georgia" pitchFamily="34" charset="-122"/>
+                <a:cs typeface="Georgia" pitchFamily="34" charset="-120"/>
+              </a:rPr>
+              <a:t>firelight, open shirt, tattoos, desert dusk: wildness worn as costume</a:t>
+            </a:r>
+            <a:endParaRPr lang="en-US" sz="1350" dirty="0"/>
+          </a:p>
+        </p:txBody>
+      </p:sp>
+      <p:sp>
+        <p:nvSpPr>
+          <p:cNvPr id="12" name="Text 9"/>
+          <p:cNvSpPr/>
+          <p:nvPr/>
+        </p:nvSpPr>
+        <p:spPr>
+          <a:xfrm>
+            <a:off x="4937760" y="2843784"/>
+            <a:ext cx="1371600" cy="365760"/>
+          </a:xfrm>
+          <a:prstGeom prst="rect">
+            <a:avLst/>
+          </a:prstGeom>
+          <a:noFill/>
+          <a:ln/>
+        </p:spPr>
+        <p:txBody>
+          <a:bodyPr wrap="square" lIns="0" tIns="0" rIns="0" bIns="0" rtlCol="0" anchor="ctr"/>
+          <a:lstStyle/>
+          <a:p>
+            <a:pPr indent="0" marL="0">
+              <a:buNone/>
+            </a:pPr>
+            <a:r>
+              <a:rPr lang="en-US" sz="1000" b="1" spc="100" kern="0" dirty="0">
+                <a:solidFill>
+                  <a:srgbClr val="4A6B5D"/>
+                </a:solidFill>
+                <a:latin typeface="Arial" pitchFamily="34" charset="0"/>
+                <a:ea typeface="Arial" pitchFamily="34" charset="-122"/>
+                <a:cs typeface="Arial" pitchFamily="34" charset="-120"/>
+              </a:rPr>
+              <a:t>SYMBOLIC</a:t>
+            </a:r>
+            <a:endParaRPr lang="en-US" sz="1000" dirty="0"/>
+          </a:p>
+        </p:txBody>
+      </p:sp>
+      <p:sp>
+        <p:nvSpPr>
+          <p:cNvPr id="13" name="Text 10"/>
+          <p:cNvSpPr/>
+          <p:nvPr/>
+        </p:nvSpPr>
+        <p:spPr>
+          <a:xfrm>
+            <a:off x="6355080" y="2843784"/>
+            <a:ext cx="5029200" cy="685800"/>
+          </a:xfrm>
+          <a:prstGeom prst="rect">
+            <a:avLst/>
+          </a:prstGeom>
+          <a:noFill/>
+          <a:ln/>
+        </p:spPr>
+        <p:txBody>
+          <a:bodyPr wrap="square" lIns="0" tIns="0" rIns="0" bIns="0" rtlCol="0" anchor="t"/>
+          <a:lstStyle/>
+          <a:p>
+            <a:pPr indent="0" marL="0">
+              <a:lnSpc>
+                <a:spcPts val="1700"/>
+              </a:lnSpc>
+              <a:buNone/>
+            </a:pPr>
+            <a:r>
+              <a:rPr lang="en-US" sz="1350" dirty="0">
+                <a:solidFill>
+                  <a:srgbClr val="24313F"/>
+                </a:solidFill>
+                <a:latin typeface="Georgia" pitchFamily="34" charset="0"/>
+                <a:ea typeface="Georgia" pitchFamily="34" charset="-122"/>
+                <a:cs typeface="Georgia" pitchFamily="34" charset="-120"/>
+              </a:rPr>
+              <a:t>the bottle sharp and steady in the chaos: the product as the calm center</a:t>
+            </a:r>
+            <a:endParaRPr lang="en-US" sz="1350" dirty="0"/>
+          </a:p>
+        </p:txBody>
+      </p:sp>
+      <p:sp>
+        <p:nvSpPr>
+          <p:cNvPr id="14" name="Text 11"/>
+          <p:cNvSpPr/>
+          <p:nvPr/>
+        </p:nvSpPr>
+        <p:spPr>
+          <a:xfrm>
+            <a:off x="4937760" y="3602736"/>
+            <a:ext cx="1371600" cy="365760"/>
+          </a:xfrm>
+          <a:prstGeom prst="rect">
+            <a:avLst/>
+          </a:prstGeom>
+          <a:noFill/>
+          <a:ln/>
+        </p:spPr>
+        <p:txBody>
+          <a:bodyPr wrap="square" lIns="0" tIns="0" rIns="0" bIns="0" rtlCol="0" anchor="ctr"/>
+          <a:lstStyle/>
+          <a:p>
+            <a:pPr indent="0" marL="0">
+              <a:buNone/>
+            </a:pPr>
+            <a:r>
+              <a:rPr lang="en-US" sz="1000" b="1" spc="100" kern="0" dirty="0">
+                <a:solidFill>
+                  <a:srgbClr val="4A6B5D"/>
+                </a:solidFill>
+                <a:latin typeface="Arial" pitchFamily="34" charset="0"/>
+                <a:ea typeface="Arial" pitchFamily="34" charset="-122"/>
+                <a:cs typeface="Arial" pitchFamily="34" charset="-120"/>
+              </a:rPr>
+              <a:t>TECHNICAL</a:t>
+            </a:r>
+            <a:endParaRPr lang="en-US" sz="1000" dirty="0"/>
+          </a:p>
+        </p:txBody>
+      </p:sp>
+      <p:sp>
+        <p:nvSpPr>
+          <p:cNvPr id="15" name="Text 12"/>
+          <p:cNvSpPr/>
+          <p:nvPr/>
+        </p:nvSpPr>
+        <p:spPr>
+          <a:xfrm>
+            <a:off x="6355080" y="3602736"/>
+            <a:ext cx="5029200" cy="685800"/>
+          </a:xfrm>
+          <a:prstGeom prst="rect">
+            <a:avLst/>
+          </a:prstGeom>
+          <a:noFill/>
+          <a:ln/>
+        </p:spPr>
+        <p:txBody>
+          <a:bodyPr wrap="square" lIns="0" tIns="0" rIns="0" bIns="0" rtlCol="0" anchor="t"/>
+          <a:lstStyle/>
+          <a:p>
+            <a:pPr indent="0" marL="0">
+              <a:lnSpc>
+                <a:spcPts val="1700"/>
+              </a:lnSpc>
+              <a:buNone/>
+            </a:pPr>
+            <a:r>
+              <a:rPr lang="en-US" sz="1350" dirty="0">
+                <a:solidFill>
+                  <a:srgbClr val="24313F"/>
+                </a:solidFill>
+                <a:latin typeface="Georgia" pitchFamily="34" charset="0"/>
+                <a:ea typeface="Georgia" pitchFamily="34" charset="-122"/>
+                <a:cs typeface="Georgia" pitchFamily="34" charset="-120"/>
+              </a:rPr>
+              <a:t>low-key, warm against cool; shallow focus pulls the face forward</a:t>
+            </a:r>
+            <a:endParaRPr lang="en-US" sz="1350" dirty="0"/>
+          </a:p>
+        </p:txBody>
+      </p:sp>
+      <p:sp>
+        <p:nvSpPr>
+          <p:cNvPr id="16" name="Text 13"/>
+          <p:cNvSpPr/>
+          <p:nvPr/>
+        </p:nvSpPr>
+        <p:spPr>
+          <a:xfrm>
+            <a:off x="4937760" y="4361688"/>
+            <a:ext cx="1371600" cy="365760"/>
+          </a:xfrm>
+          <a:prstGeom prst="rect">
+            <a:avLst/>
+          </a:prstGeom>
+          <a:noFill/>
+          <a:ln/>
+        </p:spPr>
+        <p:txBody>
+          <a:bodyPr wrap="square" lIns="0" tIns="0" rIns="0" bIns="0" rtlCol="0" anchor="ctr"/>
+          <a:lstStyle/>
+          <a:p>
+            <a:pPr indent="0" marL="0">
+              <a:buNone/>
+            </a:pPr>
+            <a:r>
+              <a:rPr lang="en-US" sz="1000" b="1" spc="100" kern="0" dirty="0">
+                <a:solidFill>
+                  <a:srgbClr val="4A6B5D"/>
+                </a:solidFill>
+                <a:latin typeface="Arial" pitchFamily="34" charset="0"/>
+                <a:ea typeface="Arial" pitchFamily="34" charset="-122"/>
+                <a:cs typeface="Arial" pitchFamily="34" charset="-120"/>
+              </a:rPr>
+              <a:t>TECHNICAL</a:t>
+            </a:r>
+            <a:endParaRPr lang="en-US" sz="1000" dirty="0"/>
+          </a:p>
+        </p:txBody>
+      </p:sp>
+      <p:sp>
+        <p:nvSpPr>
+          <p:cNvPr id="17" name="Text 14"/>
+          <p:cNvSpPr/>
+          <p:nvPr/>
+        </p:nvSpPr>
+        <p:spPr>
+          <a:xfrm>
+            <a:off x="6355080" y="4361688"/>
+            <a:ext cx="5029200" cy="685800"/>
+          </a:xfrm>
+          <a:prstGeom prst="rect">
+            <a:avLst/>
+          </a:prstGeom>
+          <a:noFill/>
+          <a:ln/>
+        </p:spPr>
+        <p:txBody>
+          <a:bodyPr wrap="square" lIns="0" tIns="0" rIns="0" bIns="0" rtlCol="0" anchor="t"/>
+          <a:lstStyle/>
+          <a:p>
+            <a:pPr indent="0" marL="0">
+              <a:lnSpc>
+                <a:spcPts val="1700"/>
+              </a:lnSpc>
+              <a:buNone/>
+            </a:pPr>
+            <a:r>
+              <a:rPr lang="en-US" sz="1350" dirty="0">
+                <a:solidFill>
+                  <a:srgbClr val="24313F"/>
+                </a:solidFill>
+                <a:latin typeface="Georgia" pitchFamily="34" charset="0"/>
+                <a:ea typeface="Georgia" pitchFamily="34" charset="-122"/>
+                <a:cs typeface="Georgia" pitchFamily="34" charset="-120"/>
+              </a:rPr>
+              <a:t>eye-level direct address: he looks at you looking</a:t>
+            </a:r>
+            <a:endParaRPr lang="en-US" sz="1350" dirty="0"/>
+          </a:p>
+        </p:txBody>
+      </p:sp>
+      <p:sp>
+        <p:nvSpPr>
+          <p:cNvPr id="18" name="Text 15"/>
+          <p:cNvSpPr/>
+          <p:nvPr/>
+        </p:nvSpPr>
+        <p:spPr>
+          <a:xfrm>
+            <a:off x="4937760" y="5120640"/>
+            <a:ext cx="1371600" cy="365760"/>
+          </a:xfrm>
+          <a:prstGeom prst="rect">
+            <a:avLst/>
+          </a:prstGeom>
+          <a:noFill/>
+          <a:ln/>
+        </p:spPr>
+        <p:txBody>
+          <a:bodyPr wrap="square" lIns="0" tIns="0" rIns="0" bIns="0" rtlCol="0" anchor="ctr"/>
+          <a:lstStyle/>
+          <a:p>
+            <a:pPr indent="0" marL="0">
+              <a:buNone/>
+            </a:pPr>
+            <a:r>
+              <a:rPr lang="en-US" sz="1000" b="1" spc="100" kern="0" dirty="0">
+                <a:solidFill>
+                  <a:srgbClr val="4A6B5D"/>
+                </a:solidFill>
+                <a:latin typeface="Arial" pitchFamily="34" charset="0"/>
+                <a:ea typeface="Arial" pitchFamily="34" charset="-122"/>
+                <a:cs typeface="Arial" pitchFamily="34" charset="-120"/>
+              </a:rPr>
+              <a:t>AUDIO</a:t>
+            </a:r>
+            <a:endParaRPr lang="en-US" sz="1000" dirty="0"/>
+          </a:p>
+        </p:txBody>
+      </p:sp>
+      <p:sp>
+        <p:nvSpPr>
+          <p:cNvPr id="19" name="Text 16"/>
+          <p:cNvSpPr/>
+          <p:nvPr/>
+        </p:nvSpPr>
+        <p:spPr>
+          <a:xfrm>
+            <a:off x="6355080" y="5120640"/>
+            <a:ext cx="5029200" cy="685800"/>
+          </a:xfrm>
+          <a:prstGeom prst="rect">
+            <a:avLst/>
+          </a:prstGeom>
+          <a:noFill/>
+          <a:ln/>
+        </p:spPr>
+        <p:txBody>
+          <a:bodyPr wrap="square" lIns="0" tIns="0" rIns="0" bIns="0" rtlCol="0" anchor="t"/>
+          <a:lstStyle/>
+          <a:p>
+            <a:pPr indent="0" marL="0">
+              <a:lnSpc>
+                <a:spcPts val="1700"/>
+              </a:lnSpc>
+              <a:buNone/>
+            </a:pPr>
+            <a:r>
+              <a:rPr lang="en-US" sz="1350" dirty="0">
+                <a:solidFill>
+                  <a:srgbClr val="24313F"/>
+                </a:solidFill>
+                <a:latin typeface="Georgia" pitchFamily="34" charset="0"/>
+                <a:ea typeface="Georgia" pitchFamily="34" charset="-122"/>
+                <a:cs typeface="Georgia" pitchFamily="34" charset="-120"/>
+              </a:rPr>
+              <a:t>absent by medium, and saying so is a label too</a:t>
+            </a:r>
+            <a:endParaRPr lang="en-US" sz="1350" dirty="0"/>
+          </a:p>
+        </p:txBody>
+      </p:sp>
+      <p:sp>
+        <p:nvSpPr>
+          <p:cNvPr id="20" name="Shape 17"/>
+          <p:cNvSpPr/>
+          <p:nvPr/>
+        </p:nvSpPr>
+        <p:spPr>
+          <a:xfrm>
+            <a:off x="4937760" y="5943600"/>
+            <a:ext cx="914400" cy="0"/>
+          </a:xfrm>
+          <a:prstGeom prst="line">
+            <a:avLst/>
+          </a:prstGeom>
+          <a:noFill/>
+          <a:ln w="31750">
+            <a:solidFill>
+              <a:srgbClr val="8C3A38"/>
+            </a:solidFill>
+            <a:prstDash val="solid"/>
+          </a:ln>
+        </p:spPr>
+      </p:sp>
+      <p:sp>
+        <p:nvSpPr>
+          <p:cNvPr id="21" name="Text 18"/>
+          <p:cNvSpPr/>
+          <p:nvPr/>
+        </p:nvSpPr>
+        <p:spPr>
+          <a:xfrm>
+            <a:off x="4937760" y="6062472"/>
+            <a:ext cx="6400800" cy="365760"/>
+          </a:xfrm>
+          <a:prstGeom prst="rect">
+            <a:avLst/>
+          </a:prstGeom>
+          <a:noFill/>
+          <a:ln/>
+        </p:spPr>
+        <p:txBody>
+          <a:bodyPr wrap="square" lIns="0" tIns="0" rIns="0" bIns="0" rtlCol="0" anchor="ctr"/>
+          <a:lstStyle/>
+          <a:p>
+            <a:pPr indent="0" marL="0">
+              <a:buNone/>
+            </a:pPr>
+            <a:r>
+              <a:rPr lang="en-US" sz="1250" i="1" dirty="0">
+                <a:solidFill>
+                  <a:srgbClr val="4A6B5D"/>
+                </a:solidFill>
+                <a:latin typeface="Georgia" pitchFamily="34" charset="0"/>
+                <a:ea typeface="Georgia" pitchFamily="34" charset="-122"/>
+                <a:cs typeface="Georgia" pitchFamily="34" charset="-120"/>
+              </a:rPr>
+              <a:t>Six accurate labels on an everyday text: that is the whole of CS2. Yours, on a text of your own choosing.</a:t>
+            </a:r>
+            <a:endParaRPr lang="en-US" sz="1250" dirty="0"/>
+          </a:p>
+        </p:txBody>
+      </p:sp>
+      <p:sp>
+        <p:nvSpPr>
+          <p:cNvPr id="22" name="Shape 19"/>
+          <p:cNvSpPr/>
+          <p:nvPr/>
+        </p:nvSpPr>
+        <p:spPr>
+          <a:xfrm>
+            <a:off x="822960" y="6382512"/>
+            <a:ext cx="10543032" cy="0"/>
+          </a:xfrm>
+          <a:prstGeom prst="line">
+            <a:avLst/>
+          </a:prstGeom>
+          <a:noFill/>
+          <a:ln w="9525">
+            <a:solidFill>
+              <a:srgbClr val="D9D4C4"/>
+            </a:solidFill>
+            <a:prstDash val="solid"/>
+          </a:ln>
+        </p:spPr>
+      </p:sp>
+      <p:sp>
+        <p:nvSpPr>
+          <p:cNvPr id="23" name="Text 20"/>
+          <p:cNvSpPr/>
+          <p:nvPr/>
+        </p:nvSpPr>
+        <p:spPr>
+          <a:xfrm>
+            <a:off x="822960" y="6419088"/>
+            <a:ext cx="7315200" cy="274320"/>
+          </a:xfrm>
+          <a:prstGeom prst="rect">
+            <a:avLst/>
+          </a:prstGeom>
+          <a:noFill/>
+          <a:ln/>
+        </p:spPr>
+        <p:txBody>
+          <a:bodyPr wrap="square" lIns="0" tIns="0" rIns="0" bIns="0" rtlCol="0" anchor="ctr"/>
+          <a:lstStyle/>
+          <a:p>
+            <a:pPr indent="0" marL="0">
+              <a:buNone/>
+            </a:pPr>
+            <a:r>
+              <a:rPr lang="en-US" sz="900" spc="150" kern="0" dirty="0">
+                <a:solidFill>
+                  <a:srgbClr val="7A7F72"/>
+                </a:solidFill>
+                <a:latin typeface="Arial" pitchFamily="34" charset="0"/>
+                <a:ea typeface="Arial" pitchFamily="34" charset="-122"/>
+                <a:cs typeface="Arial" pitchFamily="34" charset="-120"/>
+              </a:rPr>
+              <a:t>MEDIA STUDIES 9607 · SEMESTER I</a:t>
+            </a:r>
+            <a:endParaRPr lang="en-US" sz="900" dirty="0"/>
+          </a:p>
+        </p:txBody>
+      </p:sp>
+      <p:sp>
+        <p:nvSpPr>
+          <p:cNvPr id="24" name="Text 21"/>
+          <p:cNvSpPr/>
+          <p:nvPr/>
+        </p:nvSpPr>
+        <p:spPr>
+          <a:xfrm>
+            <a:off x="10268712" y="6355080"/>
+            <a:ext cx="1097280" cy="365760"/>
+          </a:xfrm>
+          <a:prstGeom prst="rect">
+            <a:avLst/>
+          </a:prstGeom>
+          <a:noFill/>
+          <a:ln/>
+        </p:spPr>
+        <p:txBody>
+          <a:bodyPr wrap="square" lIns="0" tIns="0" rIns="0" bIns="0" rtlCol="0" anchor="ctr"/>
+          <a:lstStyle/>
+          <a:p>
+            <a:pPr algn="r" indent="0" marL="0">
+              <a:buNone/>
+            </a:pPr>
+            <a:r>
+              <a:rPr lang="en-US" sz="1600" dirty="0">
+                <a:solidFill>
+                  <a:srgbClr val="A3C1AD"/>
+                </a:solidFill>
+                <a:latin typeface="Georgia" pitchFamily="34" charset="0"/>
+                <a:ea typeface="Georgia" pitchFamily="34" charset="-122"/>
+                <a:cs typeface="Georgia" pitchFamily="34" charset="-120"/>
+              </a:rPr>
+              <a:t>07</a:t>
+            </a:r>
+            <a:endParaRPr lang="en-US" sz="1600" dirty="0"/>
+          </a:p>
+        </p:txBody>
+      </p:sp>
+    </p:spTree>
+  </p:cSld>
+  <p:clrMapOvr>
+    <a:masterClrMapping/>
+  </p:clrMapOvr>
+</p:sld>
+</file>
+
+<file path=ppt/slides/slide14.xml><?xml version="1.0" encoding="utf-8"?>
+<p:sld xmlns:a="http://schemas.openxmlformats.org/drawingml/2006/main" xmlns:r="http://schemas.openxmlformats.org/officeDocument/2006/relationships" xmlns:p="http://schemas.openxmlformats.org/presentationml/2006/main">
+  <p:cSld name="Slide 14">
+    <p:bg>
+      <p:bgPr>
+        <a:solidFill>
+          <a:srgbClr val="FAF8F1"/>
+        </a:solidFill>
+      </p:bgPr>
+    </p:bg>
+    <p:spTree>
+      <p:nvGrpSpPr>
+        <p:cNvPr id="1" name=""/>
+        <p:cNvGrpSpPr/>
+        <p:nvPr/>
+      </p:nvGrpSpPr>
+      <p:grpSpPr>
+        <a:xfrm>
+          <a:off x="0" y="0"/>
+          <a:ext cx="0" cy="0"/>
+          <a:chOff x="0" y="0"/>
+          <a:chExt cx="0" cy="0"/>
+        </a:xfrm>
+      </p:grpSpPr>
+      <p:sp>
+        <p:nvSpPr>
+          <p:cNvPr id="2" name="Text 0"/>
+          <p:cNvSpPr/>
+          <p:nvPr/>
+        </p:nvSpPr>
+        <p:spPr>
+          <a:xfrm>
+            <a:off x="822960" y="457200"/>
+            <a:ext cx="6400800" cy="274320"/>
+          </a:xfrm>
+          <a:prstGeom prst="rect">
+            <a:avLst/>
+          </a:prstGeom>
+          <a:noFill/>
+          <a:ln/>
+        </p:spPr>
+        <p:txBody>
+          <a:bodyPr wrap="square" lIns="0" tIns="0" rIns="0" bIns="0" rtlCol="0" anchor="ctr"/>
+          <a:lstStyle/>
+          <a:p>
+            <a:pPr algn="l" indent="0" marL="0">
+              <a:buNone/>
+            </a:pPr>
+            <a:r>
+              <a:rPr lang="en-US" sz="1100" b="1" spc="250" kern="0" dirty="0">
+                <a:solidFill>
+                  <a:srgbClr val="4A6B5D"/>
+                </a:solidFill>
+                <a:latin typeface="Arial" pitchFamily="34" charset="0"/>
+                <a:ea typeface="Arial" pitchFamily="34" charset="-122"/>
+                <a:cs typeface="Arial" pitchFamily="34" charset="-120"/>
+              </a:rPr>
+              <a:t>FRIDAY · TWO THINGS LEAVE THE ROOM</a:t>
+            </a:r>
+            <a:endParaRPr lang="en-US" sz="1100" dirty="0"/>
+          </a:p>
+        </p:txBody>
+      </p:sp>
+      <p:sp>
+        <p:nvSpPr>
+          <p:cNvPr id="3" name="Text 1"/>
+          <p:cNvSpPr/>
+          <p:nvPr/>
+        </p:nvSpPr>
+        <p:spPr>
+          <a:xfrm>
+            <a:off x="6793992" y="457200"/>
+            <a:ext cx="4572000" cy="274320"/>
+          </a:xfrm>
+          <a:prstGeom prst="rect">
+            <a:avLst/>
+          </a:prstGeom>
+          <a:noFill/>
+          <a:ln/>
+        </p:spPr>
+        <p:txBody>
+          <a:bodyPr wrap="square" lIns="0" tIns="0" rIns="0" bIns="0" rtlCol="0" anchor="ctr"/>
+          <a:lstStyle/>
+          <a:p>
+            <a:pPr algn="r" indent="0" marL="0">
+              <a:buNone/>
+            </a:pPr>
+            <a:r>
+              <a:rPr lang="en-US" sz="1100" b="1" spc="250" kern="0" dirty="0">
+                <a:solidFill>
+                  <a:srgbClr val="7A7F72"/>
+                </a:solidFill>
+                <a:latin typeface="Arial" pitchFamily="34" charset="0"/>
+                <a:ea typeface="Arial" pitchFamily="34" charset="-122"/>
+                <a:cs typeface="Arial" pitchFamily="34" charset="-120"/>
+              </a:rPr>
+              <a:t>ONE COLLECTED, ONE COMMITTED</a:t>
+            </a:r>
+            <a:endParaRPr lang="en-US" sz="1100" dirty="0"/>
+          </a:p>
+        </p:txBody>
+      </p:sp>
+      <p:sp>
+        <p:nvSpPr>
+          <p:cNvPr id="4" name="Shape 2"/>
+          <p:cNvSpPr/>
+          <p:nvPr/>
+        </p:nvSpPr>
+        <p:spPr>
+          <a:xfrm>
+            <a:off x="822960" y="786384"/>
+            <a:ext cx="10543032" cy="0"/>
+          </a:xfrm>
+          <a:prstGeom prst="line">
+            <a:avLst/>
+          </a:prstGeom>
+          <a:noFill/>
+          <a:ln w="9525">
+            <a:solidFill>
+              <a:srgbClr val="D9D4C4"/>
+            </a:solidFill>
+            <a:prstDash val="solid"/>
+          </a:ln>
+        </p:spPr>
+      </p:sp>
+      <p:sp>
+        <p:nvSpPr>
+          <p:cNvPr id="5" name="Text 3"/>
+          <p:cNvSpPr/>
+          <p:nvPr/>
+        </p:nvSpPr>
+        <p:spPr>
+          <a:xfrm>
+            <a:off x="822960" y="960120"/>
+            <a:ext cx="10543032" cy="731520"/>
+          </a:xfrm>
+          <a:prstGeom prst="rect">
+            <a:avLst/>
+          </a:prstGeom>
+          <a:noFill/>
+          <a:ln/>
+        </p:spPr>
+        <p:txBody>
+          <a:bodyPr wrap="square" lIns="0" tIns="0" rIns="0" bIns="0" rtlCol="0" anchor="ctr"/>
+          <a:lstStyle/>
+          <a:p>
+            <a:pPr indent="0" marL="0">
+              <a:buNone/>
+            </a:pPr>
+            <a:r>
+              <a:rPr lang="en-US" sz="3200" dirty="0">
+                <a:solidFill>
+                  <a:srgbClr val="24313F"/>
+                </a:solidFill>
+                <a:latin typeface="Georgia" pitchFamily="34" charset="0"/>
+                <a:ea typeface="Georgia" pitchFamily="34" charset="-122"/>
+                <a:cs typeface="Georgia" pitchFamily="34" charset="-120"/>
+              </a:rPr>
+              <a:t>CS2, and a decision that lasts until May</a:t>
+            </a:r>
+            <a:endParaRPr lang="en-US" sz="3200" dirty="0"/>
+          </a:p>
+        </p:txBody>
+      </p:sp>
+      <p:sp>
+        <p:nvSpPr>
+          <p:cNvPr id="6" name="Text 4"/>
+          <p:cNvSpPr/>
+          <p:nvPr/>
+        </p:nvSpPr>
+        <p:spPr>
+          <a:xfrm>
+            <a:off x="822960" y="1920240"/>
+            <a:ext cx="4846320" cy="502920"/>
+          </a:xfrm>
+          <a:prstGeom prst="rect">
+            <a:avLst/>
+          </a:prstGeom>
+          <a:noFill/>
+          <a:ln/>
+        </p:spPr>
+        <p:txBody>
+          <a:bodyPr wrap="square" lIns="0" tIns="0" rIns="0" bIns="0" rtlCol="0" anchor="ctr"/>
+          <a:lstStyle/>
+          <a:p>
+            <a:pPr indent="0" marL="0">
+              <a:buNone/>
+            </a:pPr>
+            <a:r>
+              <a:rPr lang="en-US" sz="2400" dirty="0">
+                <a:solidFill>
+                  <a:srgbClr val="4A6B5D"/>
+                </a:solidFill>
+                <a:latin typeface="Georgia" pitchFamily="34" charset="0"/>
+                <a:ea typeface="Georgia" pitchFamily="34" charset="-122"/>
+                <a:cs typeface="Georgia" pitchFamily="34" charset="-120"/>
+              </a:rPr>
+              <a:t>CS2</a:t>
+            </a:r>
+            <a:endParaRPr lang="en-US" sz="2400" dirty="0"/>
+          </a:p>
+        </p:txBody>
+      </p:sp>
+      <p:sp>
+        <p:nvSpPr>
+          <p:cNvPr id="7" name="Shape 5"/>
+          <p:cNvSpPr/>
+          <p:nvPr/>
+        </p:nvSpPr>
+        <p:spPr>
+          <a:xfrm>
+            <a:off x="822960" y="2487168"/>
+            <a:ext cx="4754880" cy="0"/>
+          </a:xfrm>
+          <a:prstGeom prst="line">
+            <a:avLst/>
+          </a:prstGeom>
+          <a:noFill/>
+          <a:ln w="9525">
+            <a:solidFill>
+              <a:srgbClr val="D9D4C4"/>
+            </a:solidFill>
+            <a:prstDash val="solid"/>
+          </a:ln>
+        </p:spPr>
+      </p:sp>
+      <p:sp>
+        <p:nvSpPr>
+          <p:cNvPr id="8" name="Text 6"/>
+          <p:cNvSpPr/>
+          <p:nvPr/>
+        </p:nvSpPr>
+        <p:spPr>
+          <a:xfrm>
+            <a:off x="822960" y="2651760"/>
+            <a:ext cx="4846320" cy="1828800"/>
+          </a:xfrm>
+          <a:prstGeom prst="rect">
+            <a:avLst/>
+          </a:prstGeom>
+          <a:noFill/>
+          <a:ln/>
+        </p:spPr>
+        <p:txBody>
+          <a:bodyPr wrap="square" lIns="0" tIns="0" rIns="0" bIns="0" rtlCol="0" anchor="t"/>
+          <a:lstStyle/>
+          <a:p>
+            <a:pPr indent="0" marL="0">
+              <a:lnSpc>
+                <a:spcPts val="2400"/>
+              </a:lnSpc>
+              <a:buNone/>
+            </a:pPr>
+            <a:r>
+              <a:rPr lang="en-US" sz="1700" dirty="0">
+                <a:solidFill>
+                  <a:srgbClr val="24313F"/>
+                </a:solidFill>
+                <a:latin typeface="Georgia" pitchFamily="34" charset="0"/>
+                <a:ea typeface="Georgia" pitchFamily="34" charset="-122"/>
+                <a:cs typeface="Georgia" pitchFamily="34" charset="-120"/>
+              </a:rPr>
+              <a:t>An everyday media text of your own choosing, annotated with at least six accurate code labels. Peer-checked against the exemplar before it is collected.</a:t>
+            </a:r>
+            <a:endParaRPr lang="en-US" sz="1700" dirty="0"/>
+          </a:p>
+        </p:txBody>
+      </p:sp>
+      <p:sp>
+        <p:nvSpPr>
+          <p:cNvPr id="9" name="Text 7"/>
+          <p:cNvSpPr/>
+          <p:nvPr/>
+        </p:nvSpPr>
+        <p:spPr>
+          <a:xfrm>
+            <a:off x="6309360" y="1920240"/>
+            <a:ext cx="4846320" cy="502920"/>
+          </a:xfrm>
+          <a:prstGeom prst="rect">
+            <a:avLst/>
+          </a:prstGeom>
+          <a:noFill/>
+          <a:ln/>
+        </p:spPr>
+        <p:txBody>
+          <a:bodyPr wrap="square" lIns="0" tIns="0" rIns="0" bIns="0" rtlCol="0" anchor="ctr"/>
+          <a:lstStyle/>
+          <a:p>
+            <a:pPr indent="0" marL="0">
+              <a:buNone/>
+            </a:pPr>
+            <a:r>
+              <a:rPr lang="en-US" sz="2400" dirty="0">
+                <a:solidFill>
+                  <a:srgbClr val="5C7A6B"/>
+                </a:solidFill>
+                <a:latin typeface="Georgia" pitchFamily="34" charset="0"/>
+                <a:ea typeface="Georgia" pitchFamily="34" charset="-122"/>
+                <a:cs typeface="Georgia" pitchFamily="34" charset="-120"/>
+              </a:rPr>
+              <a:t>Your media area</a:t>
+            </a:r>
+            <a:endParaRPr lang="en-US" sz="2400" dirty="0"/>
+          </a:p>
+        </p:txBody>
+      </p:sp>
+      <p:sp>
+        <p:nvSpPr>
+          <p:cNvPr id="10" name="Shape 8"/>
+          <p:cNvSpPr/>
+          <p:nvPr/>
+        </p:nvSpPr>
+        <p:spPr>
+          <a:xfrm>
+            <a:off x="6309360" y="2487168"/>
+            <a:ext cx="4754880" cy="0"/>
+          </a:xfrm>
+          <a:prstGeom prst="line">
+            <a:avLst/>
+          </a:prstGeom>
+          <a:noFill/>
+          <a:ln w="9525">
+            <a:solidFill>
+              <a:srgbClr val="D9D4C4"/>
+            </a:solidFill>
+            <a:prstDash val="solid"/>
+          </a:ln>
+        </p:spPr>
+      </p:sp>
+      <p:sp>
+        <p:nvSpPr>
+          <p:cNvPr id="11" name="Text 9"/>
+          <p:cNvSpPr/>
+          <p:nvPr/>
+        </p:nvSpPr>
+        <p:spPr>
+          <a:xfrm>
+            <a:off x="6309360" y="2651760"/>
+            <a:ext cx="4846320" cy="1828800"/>
+          </a:xfrm>
+          <a:prstGeom prst="rect">
+            <a:avLst/>
+          </a:prstGeom>
+          <a:noFill/>
+          <a:ln/>
+        </p:spPr>
+        <p:txBody>
+          <a:bodyPr wrap="square" lIns="0" tIns="0" rIns="0" bIns="0" rtlCol="0" anchor="t"/>
+          <a:lstStyle/>
+          <a:p>
+            <a:pPr indent="0" marL="0">
+              <a:lnSpc>
+                <a:spcPts val="2400"/>
+              </a:lnSpc>
+              <a:buNone/>
+            </a:pPr>
+            <a:r>
+              <a:rPr lang="en-US" sz="1700" dirty="0">
+                <a:solidFill>
+                  <a:srgbClr val="24313F"/>
+                </a:solidFill>
+                <a:latin typeface="Georgia" pitchFamily="34" charset="0"/>
+                <a:ea typeface="Georgia" pitchFamily="34" charset="-122"/>
+                <a:cs typeface="Georgia" pitchFamily="34" charset="-120"/>
+              </a:rPr>
+              <a:t>Committed on Wednesday and logged on the blog with one line of justification. It feeds the case-study document in Lesson 15 and it is not revisitable next week.</a:t>
+            </a:r>
+            <a:endParaRPr lang="en-US" sz="1700" dirty="0"/>
+          </a:p>
+        </p:txBody>
+      </p:sp>
+      <p:sp>
+        <p:nvSpPr>
+          <p:cNvPr id="12" name="Shape 10"/>
+          <p:cNvSpPr/>
+          <p:nvPr/>
+        </p:nvSpPr>
+        <p:spPr>
+          <a:xfrm>
+            <a:off x="822960" y="4663440"/>
+            <a:ext cx="10543032" cy="1005840"/>
+          </a:xfrm>
+          <a:prstGeom prst="rect">
+            <a:avLst/>
+          </a:prstGeom>
+          <a:solidFill>
+            <a:srgbClr val="E8EFE7"/>
+          </a:solidFill>
+          <a:ln/>
+        </p:spPr>
+      </p:sp>
+      <p:sp>
+        <p:nvSpPr>
+          <p:cNvPr id="13" name="Text 11"/>
+          <p:cNvSpPr/>
+          <p:nvPr/>
+        </p:nvSpPr>
+        <p:spPr>
+          <a:xfrm>
+            <a:off x="1097280" y="4754880"/>
+            <a:ext cx="9994392" cy="822960"/>
+          </a:xfrm>
+          <a:prstGeom prst="rect">
+            <a:avLst/>
+          </a:prstGeom>
+          <a:noFill/>
+          <a:ln/>
+        </p:spPr>
+        <p:txBody>
+          <a:bodyPr wrap="square" lIns="0" tIns="0" rIns="0" bIns="0" rtlCol="0" anchor="ctr"/>
+          <a:lstStyle/>
+          <a:p>
+            <a:pPr indent="0" marL="0">
+              <a:lnSpc>
+                <a:spcPts val="2200"/>
+              </a:lnSpc>
+              <a:buNone/>
+            </a:pPr>
+            <a:r>
+              <a:rPr lang="en-US" sz="1650" dirty="0">
+                <a:solidFill>
+                  <a:srgbClr val="24313F"/>
+                </a:solidFill>
+                <a:latin typeface="Georgia" pitchFamily="34" charset="0"/>
+                <a:ea typeface="Georgia" pitchFamily="34" charset="-122"/>
+                <a:cs typeface="Georgia" pitchFamily="34" charset="-120"/>
+              </a:rPr>
+              <a:t>The road map, said plainly: the technical family is not one bullet on that checklist. It is four lessons with equipment in your hands, and every exercise you shoot in them is a dated post in your Component 1 blog.</a:t>
+            </a:r>
+            <a:endParaRPr lang="en-US" sz="1650" dirty="0"/>
+          </a:p>
+        </p:txBody>
+      </p:sp>
+      <p:sp>
+        <p:nvSpPr>
+          <p:cNvPr id="14" name="Shape 12"/>
+          <p:cNvSpPr/>
+          <p:nvPr/>
+        </p:nvSpPr>
+        <p:spPr>
+          <a:xfrm>
+            <a:off x="822960" y="6382512"/>
+            <a:ext cx="10543032" cy="0"/>
+          </a:xfrm>
+          <a:prstGeom prst="line">
+            <a:avLst/>
+          </a:prstGeom>
+          <a:noFill/>
+          <a:ln w="9525">
+            <a:solidFill>
+              <a:srgbClr val="D9D4C4"/>
+            </a:solidFill>
+            <a:prstDash val="solid"/>
+          </a:ln>
+        </p:spPr>
+      </p:sp>
+      <p:sp>
+        <p:nvSpPr>
+          <p:cNvPr id="15" name="Text 13"/>
+          <p:cNvSpPr/>
+          <p:nvPr/>
+        </p:nvSpPr>
+        <p:spPr>
+          <a:xfrm>
+            <a:off x="822960" y="6419088"/>
+            <a:ext cx="7315200" cy="274320"/>
+          </a:xfrm>
+          <a:prstGeom prst="rect">
+            <a:avLst/>
+          </a:prstGeom>
+          <a:noFill/>
+          <a:ln/>
+        </p:spPr>
+        <p:txBody>
+          <a:bodyPr wrap="square" lIns="0" tIns="0" rIns="0" bIns="0" rtlCol="0" anchor="ctr"/>
+          <a:lstStyle/>
+          <a:p>
+            <a:pPr indent="0" marL="0">
+              <a:buNone/>
+            </a:pPr>
+            <a:r>
+              <a:rPr lang="en-US" sz="900" spc="150" kern="0" dirty="0">
+                <a:solidFill>
+                  <a:srgbClr val="7A7F72"/>
+                </a:solidFill>
+                <a:latin typeface="Arial" pitchFamily="34" charset="0"/>
+                <a:ea typeface="Arial" pitchFamily="34" charset="-122"/>
+                <a:cs typeface="Arial" pitchFamily="34" charset="-120"/>
+              </a:rPr>
+              <a:t>MEDIA STUDIES 9607 · SEMESTER I</a:t>
+            </a:r>
+            <a:endParaRPr lang="en-US" sz="900" dirty="0"/>
+          </a:p>
+        </p:txBody>
+      </p:sp>
+      <p:sp>
+        <p:nvSpPr>
+          <p:cNvPr id="16" name="Text 14"/>
+          <p:cNvSpPr/>
+          <p:nvPr/>
+        </p:nvSpPr>
+        <p:spPr>
+          <a:xfrm>
+            <a:off x="10268712" y="6355080"/>
+            <a:ext cx="1097280" cy="365760"/>
+          </a:xfrm>
+          <a:prstGeom prst="rect">
+            <a:avLst/>
+          </a:prstGeom>
+          <a:noFill/>
+          <a:ln/>
+        </p:spPr>
+        <p:txBody>
+          <a:bodyPr wrap="square" lIns="0" tIns="0" rIns="0" bIns="0" rtlCol="0" anchor="ctr"/>
+          <a:lstStyle/>
+          <a:p>
+            <a:pPr algn="r" indent="0" marL="0">
+              <a:buNone/>
+            </a:pPr>
+            <a:r>
+              <a:rPr lang="en-US" sz="1600" dirty="0">
+                <a:solidFill>
+                  <a:srgbClr val="A3C1AD"/>
+                </a:solidFill>
+                <a:latin typeface="Georgia" pitchFamily="34" charset="0"/>
+                <a:ea typeface="Georgia" pitchFamily="34" charset="-122"/>
+                <a:cs typeface="Georgia" pitchFamily="34" charset="-120"/>
+              </a:rPr>
+              <a:t>08</a:t>
+            </a:r>
+            <a:endParaRPr lang="en-US" sz="1600" dirty="0"/>
+          </a:p>
+        </p:txBody>
+      </p:sp>
+    </p:spTree>
+  </p:cSld>
+  <p:clrMapOvr>
+    <a:masterClrMapping/>
+  </p:clrMapOvr>
+</p:sld>
+</file>
+
+<file path=ppt/slides/slide15.xml><?xml version="1.0" encoding="utf-8"?>
+<p:sld xmlns:a="http://schemas.openxmlformats.org/drawingml/2006/main" xmlns:r="http://schemas.openxmlformats.org/officeDocument/2006/relationships" xmlns:p="http://schemas.openxmlformats.org/presentationml/2006/main">
+  <p:cSld name="Slide 15">
     <p:bg>
       <p:bgPr>
         <a:solidFill>
@@ -3664,7 +6301,7 @@
                 <a:ea typeface="Georgia" pitchFamily="34" charset="-122"/>
                 <a:cs typeface="Georgia" pitchFamily="34" charset="-120"/>
               </a:rPr>
-              <a:t>06</a:t>
+              <a:t>09</a:t>
             </a:r>
             <a:endParaRPr lang="en-US" sz="1600" dirty="0"/>
           </a:p>
@@ -6033,24 +8670,24 @@
         </p:nvSpPr>
         <p:spPr>
           <a:xfrm>
-            <a:off x="822960" y="1005840"/>
-            <a:ext cx="10543032" cy="731520"/>
-          </a:xfrm>
-          <a:prstGeom prst="rect">
-            <a:avLst/>
-          </a:prstGeom>
-          <a:noFill/>
-          <a:ln/>
-        </p:spPr>
-        <p:txBody>
-          <a:bodyPr wrap="square" lIns="0" tIns="0" rIns="0" bIns="0" rtlCol="0" anchor="ctr"/>
-          <a:lstStyle/>
-          <a:p>
-            <a:pPr indent="0" marL="0">
-              <a:buNone/>
-            </a:pPr>
-            <a:r>
-              <a:rPr lang="en-US" sz="3800" dirty="0">
+            <a:off x="822960" y="914400"/>
+            <a:ext cx="10543032" cy="548640"/>
+          </a:xfrm>
+          <a:prstGeom prst="rect">
+            <a:avLst/>
+          </a:prstGeom>
+          <a:noFill/>
+          <a:ln/>
+        </p:spPr>
+        <p:txBody>
+          <a:bodyPr wrap="square" lIns="0" tIns="0" rIns="0" bIns="0" rtlCol="0" anchor="ctr"/>
+          <a:lstStyle/>
+          <a:p>
+            <a:pPr indent="0" marL="0">
+              <a:buNone/>
+            </a:pPr>
+            <a:r>
+              <a:rPr lang="en-US" sz="3200" dirty="0">
                 <a:solidFill>
                   <a:srgbClr val="24313F"/>
                 </a:solidFill>
@@ -6060,64 +8697,27 @@
               </a:rPr>
               <a:t>Icon, index, symbol</a:t>
             </a:r>
-            <a:endParaRPr lang="en-US" sz="3800" dirty="0"/>
-          </a:p>
-        </p:txBody>
-      </p:sp>
-      <p:sp>
-        <p:nvSpPr>
-          <p:cNvPr id="6" name="Text 4"/>
-          <p:cNvSpPr/>
-          <p:nvPr/>
-        </p:nvSpPr>
-        <p:spPr>
-          <a:xfrm>
-            <a:off x="822960" y="2011680"/>
-            <a:ext cx="3246120" cy="548640"/>
-          </a:xfrm>
-          <a:prstGeom prst="rect">
-            <a:avLst/>
-          </a:prstGeom>
-          <a:noFill/>
-          <a:ln/>
-        </p:spPr>
-        <p:txBody>
-          <a:bodyPr wrap="square" lIns="0" tIns="0" rIns="0" bIns="0" rtlCol="0" anchor="ctr"/>
-          <a:lstStyle/>
-          <a:p>
-            <a:pPr indent="0" marL="0">
-              <a:buNone/>
-            </a:pPr>
-            <a:r>
-              <a:rPr lang="en-US" sz="2800" dirty="0">
-                <a:solidFill>
-                  <a:srgbClr val="A3C1AD"/>
-                </a:solidFill>
-                <a:latin typeface="Georgia" pitchFamily="34" charset="0"/>
-                <a:ea typeface="Georgia" pitchFamily="34" charset="-122"/>
-                <a:cs typeface="Georgia" pitchFamily="34" charset="-120"/>
-              </a:rPr>
-              <a:t>Icon</a:t>
-            </a:r>
-            <a:endParaRPr lang="en-US" sz="2800" dirty="0"/>
-          </a:p>
-        </p:txBody>
-      </p:sp>
-      <p:sp>
-        <p:nvSpPr>
-          <p:cNvPr id="7" name="Shape 5"/>
-          <p:cNvSpPr/>
-          <p:nvPr/>
-        </p:nvSpPr>
-        <p:spPr>
-          <a:xfrm>
-            <a:off x="822960" y="2606040"/>
-            <a:ext cx="3246120" cy="0"/>
-          </a:xfrm>
-          <a:prstGeom prst="line">
-            <a:avLst/>
-          </a:prstGeom>
-          <a:noFill/>
+            <a:endParaRPr lang="en-US" sz="3200" dirty="0"/>
+          </a:p>
+        </p:txBody>
+      </p:sp>
+      <p:sp>
+        <p:nvSpPr>
+          <p:cNvPr id="6" name="Shape 4"/>
+          <p:cNvSpPr/>
+          <p:nvPr/>
+        </p:nvSpPr>
+        <p:spPr>
+          <a:xfrm>
+            <a:off x="822960" y="1554480"/>
+            <a:ext cx="3246120" cy="2103120"/>
+          </a:xfrm>
+          <a:prstGeom prst="rect">
+            <a:avLst/>
+          </a:prstGeom>
+          <a:solidFill>
+            <a:srgbClr val="FAF8F1"/>
+          </a:solidFill>
           <a:ln w="9525">
             <a:solidFill>
               <a:srgbClr val="D9D4C4"/>
@@ -6126,135 +8726,78 @@
           </a:ln>
         </p:spPr>
       </p:sp>
-      <p:sp>
-        <p:nvSpPr>
-          <p:cNvPr id="8" name="Text 6"/>
-          <p:cNvSpPr/>
-          <p:nvPr/>
-        </p:nvSpPr>
-        <p:spPr>
-          <a:xfrm>
-            <a:off x="822960" y="2724912"/>
-            <a:ext cx="3246120" cy="365760"/>
-          </a:xfrm>
-          <a:prstGeom prst="rect">
-            <a:avLst/>
-          </a:prstGeom>
-          <a:noFill/>
-          <a:ln/>
-        </p:spPr>
-        <p:txBody>
-          <a:bodyPr wrap="square" lIns="0" tIns="0" rIns="0" bIns="0" rtlCol="0" anchor="ctr"/>
-          <a:lstStyle/>
-          <a:p>
-            <a:pPr indent="0" marL="0">
-              <a:buNone/>
-            </a:pPr>
-            <a:r>
-              <a:rPr lang="en-US" sz="1300" b="1" spc="100" kern="0" dirty="0">
-                <a:solidFill>
-                  <a:srgbClr val="4A6B5D"/>
-                </a:solidFill>
-                <a:latin typeface="Arial" pitchFamily="34" charset="0"/>
-                <a:ea typeface="Arial" pitchFamily="34" charset="-122"/>
-                <a:cs typeface="Arial" pitchFamily="34" charset="-120"/>
-              </a:rPr>
-              <a:t>Means by resembling.</a:t>
-            </a:r>
-            <a:endParaRPr lang="en-US" sz="1300" dirty="0"/>
-          </a:p>
-        </p:txBody>
-      </p:sp>
-      <p:sp>
-        <p:nvSpPr>
-          <p:cNvPr id="9" name="Text 7"/>
-          <p:cNvSpPr/>
-          <p:nvPr/>
-        </p:nvSpPr>
-        <p:spPr>
-          <a:xfrm>
-            <a:off x="822960" y="3200400"/>
-            <a:ext cx="3246120" cy="2194560"/>
-          </a:xfrm>
-          <a:prstGeom prst="rect">
-            <a:avLst/>
-          </a:prstGeom>
-          <a:noFill/>
-          <a:ln/>
-        </p:spPr>
-        <p:txBody>
-          <a:bodyPr wrap="square" lIns="0" tIns="0" rIns="0" bIns="0" rtlCol="0" anchor="t"/>
-          <a:lstStyle/>
-          <a:p>
-            <a:pPr indent="0" marL="0">
-              <a:lnSpc>
-                <a:spcPts val="2200"/>
-              </a:lnSpc>
-              <a:buNone/>
-            </a:pPr>
-            <a:r>
-              <a:rPr lang="en-US" sz="1600" dirty="0">
-                <a:solidFill>
-                  <a:srgbClr val="24313F"/>
+      <p:pic>
+        <p:nvPicPr>
+          <p:cNvPr id="7" name="Image 0" descr="/Users/dogan/Documents/Vaults/Courses/wiki/classes/media-studies/decks/_build/img/twemoji-grin.jpg">    </p:cNvPr>
+          <p:cNvPicPr>
+            <a:picLocks noChangeAspect="1"/>
+          </p:cNvPicPr>
+          <p:nvPr/>
+        </p:nvPicPr>
+        <p:blipFill>
+          <a:blip r:embed="rId1"/>
+          <a:stretch>
+            <a:fillRect/>
+          </a:stretch>
+        </p:blipFill>
+        <p:spPr>
+          <a:xfrm>
+            <a:off x="1504188" y="1664208"/>
+            <a:ext cx="1883664" cy="1883664"/>
+          </a:xfrm>
+          <a:prstGeom prst="rect">
+            <a:avLst/>
+          </a:prstGeom>
+        </p:spPr>
+      </p:pic>
+      <p:sp>
+        <p:nvSpPr>
+          <p:cNvPr id="8" name="Text 5"/>
+          <p:cNvSpPr/>
+          <p:nvPr/>
+        </p:nvSpPr>
+        <p:spPr>
+          <a:xfrm>
+            <a:off x="822960" y="3749040"/>
+            <a:ext cx="3246120" cy="457200"/>
+          </a:xfrm>
+          <a:prstGeom prst="rect">
+            <a:avLst/>
+          </a:prstGeom>
+          <a:noFill/>
+          <a:ln/>
+        </p:spPr>
+        <p:txBody>
+          <a:bodyPr wrap="square" lIns="0" tIns="0" rIns="0" bIns="0" rtlCol="0" anchor="ctr"/>
+          <a:lstStyle/>
+          <a:p>
+            <a:pPr indent="0" marL="0">
+              <a:buNone/>
+            </a:pPr>
+            <a:r>
+              <a:rPr lang="en-US" sz="2400" dirty="0">
+                <a:solidFill>
+                  <a:srgbClr val="A3C1AD"/>
                 </a:solidFill>
                 <a:latin typeface="Georgia" pitchFamily="34" charset="0"/>
                 <a:ea typeface="Georgia" pitchFamily="34" charset="-122"/>
                 <a:cs typeface="Georgia" pitchFamily="34" charset="-120"/>
               </a:rPr>
-              <a:t>A portrait, a map, an emoji face. It looks like the thing it stands for.</a:t>
-            </a:r>
-            <a:endParaRPr lang="en-US" sz="1600" dirty="0"/>
-          </a:p>
-        </p:txBody>
-      </p:sp>
-      <p:sp>
-        <p:nvSpPr>
-          <p:cNvPr id="10" name="Text 8"/>
-          <p:cNvSpPr/>
-          <p:nvPr/>
-        </p:nvSpPr>
-        <p:spPr>
-          <a:xfrm>
-            <a:off x="4471416" y="2011680"/>
-            <a:ext cx="3246120" cy="548640"/>
-          </a:xfrm>
-          <a:prstGeom prst="rect">
-            <a:avLst/>
-          </a:prstGeom>
-          <a:noFill/>
-          <a:ln/>
-        </p:spPr>
-        <p:txBody>
-          <a:bodyPr wrap="square" lIns="0" tIns="0" rIns="0" bIns="0" rtlCol="0" anchor="ctr"/>
-          <a:lstStyle/>
-          <a:p>
-            <a:pPr indent="0" marL="0">
-              <a:buNone/>
-            </a:pPr>
-            <a:r>
-              <a:rPr lang="en-US" sz="2800" dirty="0">
-                <a:solidFill>
-                  <a:srgbClr val="A3C1AD"/>
-                </a:solidFill>
-                <a:latin typeface="Georgia" pitchFamily="34" charset="0"/>
-                <a:ea typeface="Georgia" pitchFamily="34" charset="-122"/>
-                <a:cs typeface="Georgia" pitchFamily="34" charset="-120"/>
-              </a:rPr>
-              <a:t>Index</a:t>
-            </a:r>
-            <a:endParaRPr lang="en-US" sz="2800" dirty="0"/>
-          </a:p>
-        </p:txBody>
-      </p:sp>
-      <p:sp>
-        <p:nvSpPr>
-          <p:cNvPr id="11" name="Shape 9"/>
-          <p:cNvSpPr/>
-          <p:nvPr/>
-        </p:nvSpPr>
-        <p:spPr>
-          <a:xfrm>
-            <a:off x="4471416" y="2606040"/>
+              <a:t>Icon</a:t>
+            </a:r>
+            <a:endParaRPr lang="en-US" sz="2400" dirty="0"/>
+          </a:p>
+        </p:txBody>
+      </p:sp>
+      <p:sp>
+        <p:nvSpPr>
+          <p:cNvPr id="9" name="Shape 6"/>
+          <p:cNvSpPr/>
+          <p:nvPr/>
+        </p:nvSpPr>
+        <p:spPr>
+          <a:xfrm>
+            <a:off x="822960" y="4224528"/>
             <a:ext cx="3246120" cy="0"/>
           </a:xfrm>
           <a:prstGeom prst="line">
@@ -6271,30 +8814,30 @@
       </p:sp>
       <p:sp>
         <p:nvSpPr>
-          <p:cNvPr id="12" name="Text 10"/>
-          <p:cNvSpPr/>
-          <p:nvPr/>
-        </p:nvSpPr>
-        <p:spPr>
-          <a:xfrm>
-            <a:off x="4471416" y="2724912"/>
-            <a:ext cx="3246120" cy="365760"/>
-          </a:xfrm>
-          <a:prstGeom prst="rect">
-            <a:avLst/>
-          </a:prstGeom>
-          <a:noFill/>
-          <a:ln/>
-        </p:spPr>
-        <p:txBody>
-          <a:bodyPr wrap="square" lIns="0" tIns="0" rIns="0" bIns="0" rtlCol="0" anchor="ctr"/>
-          <a:lstStyle/>
-          <a:p>
-            <a:pPr indent="0" marL="0">
-              <a:buNone/>
-            </a:pPr>
-            <a:r>
-              <a:rPr lang="en-US" sz="1300" b="1" spc="100" kern="0" dirty="0">
+          <p:cNvPr id="10" name="Text 7"/>
+          <p:cNvSpPr/>
+          <p:nvPr/>
+        </p:nvSpPr>
+        <p:spPr>
+          <a:xfrm>
+            <a:off x="822960" y="4315968"/>
+            <a:ext cx="3246120" cy="320040"/>
+          </a:xfrm>
+          <a:prstGeom prst="rect">
+            <a:avLst/>
+          </a:prstGeom>
+          <a:noFill/>
+          <a:ln/>
+        </p:spPr>
+        <p:txBody>
+          <a:bodyPr wrap="square" lIns="0" tIns="0" rIns="0" bIns="0" rtlCol="0" anchor="ctr"/>
+          <a:lstStyle/>
+          <a:p>
+            <a:pPr indent="0" marL="0">
+              <a:buNone/>
+            </a:pPr>
+            <a:r>
+              <a:rPr lang="en-US" sz="1200" b="1" spc="100" kern="0" dirty="0">
                 <a:solidFill>
                   <a:srgbClr val="4A6B5D"/>
                 </a:solidFill>
@@ -6302,22 +8845,22 @@
                 <a:ea typeface="Arial" pitchFamily="34" charset="-122"/>
                 <a:cs typeface="Arial" pitchFamily="34" charset="-120"/>
               </a:rPr>
-              <a:t>Means by physical trace.</a:t>
-            </a:r>
-            <a:endParaRPr lang="en-US" sz="1300" dirty="0"/>
-          </a:p>
-        </p:txBody>
-      </p:sp>
-      <p:sp>
-        <p:nvSpPr>
-          <p:cNvPr id="13" name="Text 11"/>
-          <p:cNvSpPr/>
-          <p:nvPr/>
-        </p:nvSpPr>
-        <p:spPr>
-          <a:xfrm>
-            <a:off x="4471416" y="3200400"/>
-            <a:ext cx="3246120" cy="2194560"/>
+              <a:t>Means by resembling.</a:t>
+            </a:r>
+            <a:endParaRPr lang="en-US" sz="1200" dirty="0"/>
+          </a:p>
+        </p:txBody>
+      </p:sp>
+      <p:sp>
+        <p:nvSpPr>
+          <p:cNvPr id="11" name="Text 8"/>
+          <p:cNvSpPr/>
+          <p:nvPr/>
+        </p:nvSpPr>
+        <p:spPr>
+          <a:xfrm>
+            <a:off x="822960" y="4663440"/>
+            <a:ext cx="3246120" cy="914400"/>
           </a:xfrm>
           <a:prstGeom prst="rect">
             <a:avLst/>
@@ -6331,12 +8874,12 @@
           <a:p>
             <a:pPr indent="0" marL="0">
               <a:lnSpc>
-                <a:spcPts val="2200"/>
+                <a:spcPts val="1900"/>
               </a:lnSpc>
               <a:buNone/>
             </a:pPr>
             <a:r>
-              <a:rPr lang="en-US" sz="1600" dirty="0">
+              <a:rPr lang="en-US" sz="1400" dirty="0">
                 <a:solidFill>
                   <a:srgbClr val="24313F"/>
                 </a:solidFill>
@@ -6344,66 +8887,29 @@
                 <a:ea typeface="Georgia" pitchFamily="34" charset="-122"/>
                 <a:cs typeface="Georgia" pitchFamily="34" charset="-120"/>
               </a:rPr>
-              <a:t>Smoke, a footprint, a photograph. The thing was really there and left a mark.</a:t>
-            </a:r>
-            <a:endParaRPr lang="en-US" sz="1600" dirty="0"/>
-          </a:p>
-        </p:txBody>
-      </p:sp>
-      <p:sp>
-        <p:nvSpPr>
-          <p:cNvPr id="14" name="Text 12"/>
-          <p:cNvSpPr/>
-          <p:nvPr/>
-        </p:nvSpPr>
-        <p:spPr>
-          <a:xfrm>
-            <a:off x="8119872" y="2011680"/>
-            <a:ext cx="3246120" cy="548640"/>
-          </a:xfrm>
-          <a:prstGeom prst="rect">
-            <a:avLst/>
-          </a:prstGeom>
-          <a:noFill/>
-          <a:ln/>
-        </p:spPr>
-        <p:txBody>
-          <a:bodyPr wrap="square" lIns="0" tIns="0" rIns="0" bIns="0" rtlCol="0" anchor="ctr"/>
-          <a:lstStyle/>
-          <a:p>
-            <a:pPr indent="0" marL="0">
-              <a:buNone/>
-            </a:pPr>
-            <a:r>
-              <a:rPr lang="en-US" sz="2800" dirty="0">
-                <a:solidFill>
-                  <a:srgbClr val="A3C1AD"/>
-                </a:solidFill>
-                <a:latin typeface="Georgia" pitchFamily="34" charset="0"/>
-                <a:ea typeface="Georgia" pitchFamily="34" charset="-122"/>
-                <a:cs typeface="Georgia" pitchFamily="34" charset="-120"/>
-              </a:rPr>
-              <a:t>Symbol</a:t>
-            </a:r>
-            <a:endParaRPr lang="en-US" sz="2800" dirty="0"/>
-          </a:p>
-        </p:txBody>
-      </p:sp>
-      <p:sp>
-        <p:nvSpPr>
-          <p:cNvPr id="15" name="Shape 13"/>
-          <p:cNvSpPr/>
-          <p:nvPr/>
-        </p:nvSpPr>
-        <p:spPr>
-          <a:xfrm>
-            <a:off x="8119872" y="2606040"/>
-            <a:ext cx="3246120" cy="0"/>
-          </a:xfrm>
-          <a:prstGeom prst="line">
-            <a:avLst/>
-          </a:prstGeom>
-          <a:noFill/>
+              <a:t>An emoji face looks like the thing it stands for.</a:t>
+            </a:r>
+            <a:endParaRPr lang="en-US" sz="1400" dirty="0"/>
+          </a:p>
+        </p:txBody>
+      </p:sp>
+      <p:sp>
+        <p:nvSpPr>
+          <p:cNvPr id="12" name="Shape 9"/>
+          <p:cNvSpPr/>
+          <p:nvPr/>
+        </p:nvSpPr>
+        <p:spPr>
+          <a:xfrm>
+            <a:off x="4471416" y="1554480"/>
+            <a:ext cx="3246120" cy="2103120"/>
+          </a:xfrm>
+          <a:prstGeom prst="rect">
+            <a:avLst/>
+          </a:prstGeom>
+          <a:solidFill>
+            <a:srgbClr val="FAF8F1"/>
+          </a:solidFill>
           <a:ln w="9525">
             <a:solidFill>
               <a:srgbClr val="D9D4C4"/>
@@ -6412,32 +8918,118 @@
           </a:ln>
         </p:spPr>
       </p:sp>
-      <p:sp>
-        <p:nvSpPr>
-          <p:cNvPr id="16" name="Text 14"/>
-          <p:cNvSpPr/>
-          <p:nvPr/>
-        </p:nvSpPr>
-        <p:spPr>
-          <a:xfrm>
-            <a:off x="8119872" y="2724912"/>
-            <a:ext cx="3246120" cy="365760"/>
-          </a:xfrm>
-          <a:prstGeom prst="rect">
-            <a:avLst/>
-          </a:prstGeom>
-          <a:noFill/>
-          <a:ln/>
-        </p:spPr>
-        <p:txBody>
-          <a:bodyPr wrap="square" lIns="0" tIns="0" rIns="0" bIns="0" rtlCol="0" anchor="ctr"/>
-          <a:lstStyle/>
-          <a:p>
-            <a:pPr indent="0" marL="0">
-              <a:buNone/>
-            </a:pPr>
-            <a:r>
-              <a:rPr lang="en-US" sz="1300" b="1" spc="100" kern="0" dirty="0">
+      <p:pic>
+        <p:nvPicPr>
+          <p:cNvPr id="13" name="Image 1" descr="/Users/dogan/Documents/Vaults/Courses/wiki/classes/media-studies/decks/_build/img/xray-plate.jpg">    </p:cNvPr>
+          <p:cNvPicPr>
+            <a:picLocks noChangeAspect="1"/>
+          </p:cNvPicPr>
+          <p:nvPr/>
+        </p:nvPicPr>
+        <p:blipFill>
+          <a:blip r:embed="rId2"/>
+          <a:stretch>
+            <a:fillRect/>
+          </a:stretch>
+        </p:blipFill>
+        <p:spPr>
+          <a:xfrm>
+            <a:off x="5397991" y="1664208"/>
+            <a:ext cx="1392970" cy="1883664"/>
+          </a:xfrm>
+          <a:prstGeom prst="rect">
+            <a:avLst/>
+          </a:prstGeom>
+        </p:spPr>
+      </p:pic>
+      <p:sp>
+        <p:nvSpPr>
+          <p:cNvPr id="14" name="Text 10"/>
+          <p:cNvSpPr/>
+          <p:nvPr/>
+        </p:nvSpPr>
+        <p:spPr>
+          <a:xfrm>
+            <a:off x="4471416" y="3749040"/>
+            <a:ext cx="3246120" cy="457200"/>
+          </a:xfrm>
+          <a:prstGeom prst="rect">
+            <a:avLst/>
+          </a:prstGeom>
+          <a:noFill/>
+          <a:ln/>
+        </p:spPr>
+        <p:txBody>
+          <a:bodyPr wrap="square" lIns="0" tIns="0" rIns="0" bIns="0" rtlCol="0" anchor="ctr"/>
+          <a:lstStyle/>
+          <a:p>
+            <a:pPr indent="0" marL="0">
+              <a:buNone/>
+            </a:pPr>
+            <a:r>
+              <a:rPr lang="en-US" sz="2400" dirty="0">
+                <a:solidFill>
+                  <a:srgbClr val="A3C1AD"/>
+                </a:solidFill>
+                <a:latin typeface="Georgia" pitchFamily="34" charset="0"/>
+                <a:ea typeface="Georgia" pitchFamily="34" charset="-122"/>
+                <a:cs typeface="Georgia" pitchFamily="34" charset="-120"/>
+              </a:rPr>
+              <a:t>Index</a:t>
+            </a:r>
+            <a:endParaRPr lang="en-US" sz="2400" dirty="0"/>
+          </a:p>
+        </p:txBody>
+      </p:sp>
+      <p:sp>
+        <p:nvSpPr>
+          <p:cNvPr id="15" name="Shape 11"/>
+          <p:cNvSpPr/>
+          <p:nvPr/>
+        </p:nvSpPr>
+        <p:spPr>
+          <a:xfrm>
+            <a:off x="4471416" y="4224528"/>
+            <a:ext cx="3246120" cy="0"/>
+          </a:xfrm>
+          <a:prstGeom prst="line">
+            <a:avLst/>
+          </a:prstGeom>
+          <a:noFill/>
+          <a:ln w="9525">
+            <a:solidFill>
+              <a:srgbClr val="D9D4C4"/>
+            </a:solidFill>
+            <a:prstDash val="solid"/>
+          </a:ln>
+        </p:spPr>
+      </p:sp>
+      <p:sp>
+        <p:nvSpPr>
+          <p:cNvPr id="16" name="Text 12"/>
+          <p:cNvSpPr/>
+          <p:nvPr/>
+        </p:nvSpPr>
+        <p:spPr>
+          <a:xfrm>
+            <a:off x="4471416" y="4315968"/>
+            <a:ext cx="3246120" cy="320040"/>
+          </a:xfrm>
+          <a:prstGeom prst="rect">
+            <a:avLst/>
+          </a:prstGeom>
+          <a:noFill/>
+          <a:ln/>
+        </p:spPr>
+        <p:txBody>
+          <a:bodyPr wrap="square" lIns="0" tIns="0" rIns="0" bIns="0" rtlCol="0" anchor="ctr"/>
+          <a:lstStyle/>
+          <a:p>
+            <a:pPr indent="0" marL="0">
+              <a:buNone/>
+            </a:pPr>
+            <a:r>
+              <a:rPr lang="en-US" sz="1200" b="1" spc="100" kern="0" dirty="0">
                 <a:solidFill>
                   <a:srgbClr val="4A6B5D"/>
                 </a:solidFill>
@@ -6445,22 +9037,22 @@
                 <a:ea typeface="Arial" pitchFamily="34" charset="-122"/>
                 <a:cs typeface="Arial" pitchFamily="34" charset="-120"/>
               </a:rPr>
-              <a:t>Means by convention alone.</a:t>
-            </a:r>
-            <a:endParaRPr lang="en-US" sz="1300" dirty="0"/>
-          </a:p>
-        </p:txBody>
-      </p:sp>
-      <p:sp>
-        <p:nvSpPr>
-          <p:cNvPr id="17" name="Text 15"/>
-          <p:cNvSpPr/>
-          <p:nvPr/>
-        </p:nvSpPr>
-        <p:spPr>
-          <a:xfrm>
-            <a:off x="8119872" y="3200400"/>
-            <a:ext cx="3246120" cy="2194560"/>
+              <a:t>Means by physical trace.</a:t>
+            </a:r>
+            <a:endParaRPr lang="en-US" sz="1200" dirty="0"/>
+          </a:p>
+        </p:txBody>
+      </p:sp>
+      <p:sp>
+        <p:nvSpPr>
+          <p:cNvPr id="17" name="Text 13"/>
+          <p:cNvSpPr/>
+          <p:nvPr/>
+        </p:nvSpPr>
+        <p:spPr>
+          <a:xfrm>
+            <a:off x="4471416" y="4663440"/>
+            <a:ext cx="3246120" cy="914400"/>
           </a:xfrm>
           <a:prstGeom prst="rect">
             <a:avLst/>
@@ -6474,12 +9066,12 @@
           <a:p>
             <a:pPr indent="0" marL="0">
               <a:lnSpc>
-                <a:spcPts val="2200"/>
+                <a:spcPts val="1900"/>
               </a:lnSpc>
               <a:buNone/>
             </a:pPr>
             <a:r>
-              <a:rPr lang="en-US" sz="1600" dirty="0">
+              <a:rPr lang="en-US" sz="1400" dirty="0">
                 <a:solidFill>
                   <a:srgbClr val="24313F"/>
                 </a:solidFill>
@@ -6487,21 +9079,213 @@
                 <a:ea typeface="Georgia" pitchFamily="34" charset="-122"/>
                 <a:cs typeface="Georgia" pitchFamily="34" charset="-120"/>
               </a:rPr>
-              <a:t>A flag, a word, a sacred deer. Only agreement makes it mean; nothing natural links them.</a:t>
-            </a:r>
-            <a:endParaRPr lang="en-US" sz="1600" dirty="0"/>
-          </a:p>
-        </p:txBody>
-      </p:sp>
-      <p:sp>
-        <p:nvSpPr>
-          <p:cNvPr id="18" name="Shape 16"/>
-          <p:cNvSpPr/>
-          <p:nvPr/>
-        </p:nvSpPr>
-        <p:spPr>
-          <a:xfrm>
-            <a:off x="822960" y="5486400"/>
+              <a:t>The rays passed through a real body and left this mark.</a:t>
+            </a:r>
+            <a:endParaRPr lang="en-US" sz="1400" dirty="0"/>
+          </a:p>
+        </p:txBody>
+      </p:sp>
+      <p:sp>
+        <p:nvSpPr>
+          <p:cNvPr id="18" name="Shape 14"/>
+          <p:cNvSpPr/>
+          <p:nvPr/>
+        </p:nvSpPr>
+        <p:spPr>
+          <a:xfrm>
+            <a:off x="8119872" y="1554480"/>
+            <a:ext cx="3246120" cy="2103120"/>
+          </a:xfrm>
+          <a:prstGeom prst="rect">
+            <a:avLst/>
+          </a:prstGeom>
+          <a:solidFill>
+            <a:srgbClr val="FAF8F1"/>
+          </a:solidFill>
+          <a:ln w="9525">
+            <a:solidFill>
+              <a:srgbClr val="D9D4C4"/>
+            </a:solidFill>
+            <a:prstDash val="solid"/>
+          </a:ln>
+        </p:spPr>
+      </p:sp>
+      <p:pic>
+        <p:nvPicPr>
+          <p:cNvPr id="19" name="Image 2" descr="/Users/dogan/Documents/Vaults/Courses/wiki/classes/media-studies/decks/_build/img/uk-flag.jpg">    </p:cNvPr>
+          <p:cNvPicPr>
+            <a:picLocks noChangeAspect="1"/>
+          </p:cNvPicPr>
+          <p:nvPr/>
+        </p:nvPicPr>
+        <p:blipFill>
+          <a:blip r:embed="rId3"/>
+          <a:stretch>
+            <a:fillRect/>
+          </a:stretch>
+        </p:blipFill>
+        <p:spPr>
+          <a:xfrm>
+            <a:off x="8229600" y="1698041"/>
+            <a:ext cx="3026664" cy="1815998"/>
+          </a:xfrm>
+          <a:prstGeom prst="rect">
+            <a:avLst/>
+          </a:prstGeom>
+        </p:spPr>
+      </p:pic>
+      <p:sp>
+        <p:nvSpPr>
+          <p:cNvPr id="20" name="Text 15"/>
+          <p:cNvSpPr/>
+          <p:nvPr/>
+        </p:nvSpPr>
+        <p:spPr>
+          <a:xfrm>
+            <a:off x="8119872" y="3749040"/>
+            <a:ext cx="3246120" cy="457200"/>
+          </a:xfrm>
+          <a:prstGeom prst="rect">
+            <a:avLst/>
+          </a:prstGeom>
+          <a:noFill/>
+          <a:ln/>
+        </p:spPr>
+        <p:txBody>
+          <a:bodyPr wrap="square" lIns="0" tIns="0" rIns="0" bIns="0" rtlCol="0" anchor="ctr"/>
+          <a:lstStyle/>
+          <a:p>
+            <a:pPr indent="0" marL="0">
+              <a:buNone/>
+            </a:pPr>
+            <a:r>
+              <a:rPr lang="en-US" sz="2400" dirty="0">
+                <a:solidFill>
+                  <a:srgbClr val="A3C1AD"/>
+                </a:solidFill>
+                <a:latin typeface="Georgia" pitchFamily="34" charset="0"/>
+                <a:ea typeface="Georgia" pitchFamily="34" charset="-122"/>
+                <a:cs typeface="Georgia" pitchFamily="34" charset="-120"/>
+              </a:rPr>
+              <a:t>Symbol</a:t>
+            </a:r>
+            <a:endParaRPr lang="en-US" sz="2400" dirty="0"/>
+          </a:p>
+        </p:txBody>
+      </p:sp>
+      <p:sp>
+        <p:nvSpPr>
+          <p:cNvPr id="21" name="Shape 16"/>
+          <p:cNvSpPr/>
+          <p:nvPr/>
+        </p:nvSpPr>
+        <p:spPr>
+          <a:xfrm>
+            <a:off x="8119872" y="4224528"/>
+            <a:ext cx="3246120" cy="0"/>
+          </a:xfrm>
+          <a:prstGeom prst="line">
+            <a:avLst/>
+          </a:prstGeom>
+          <a:noFill/>
+          <a:ln w="9525">
+            <a:solidFill>
+              <a:srgbClr val="D9D4C4"/>
+            </a:solidFill>
+            <a:prstDash val="solid"/>
+          </a:ln>
+        </p:spPr>
+      </p:sp>
+      <p:sp>
+        <p:nvSpPr>
+          <p:cNvPr id="22" name="Text 17"/>
+          <p:cNvSpPr/>
+          <p:nvPr/>
+        </p:nvSpPr>
+        <p:spPr>
+          <a:xfrm>
+            <a:off x="8119872" y="4315968"/>
+            <a:ext cx="3246120" cy="320040"/>
+          </a:xfrm>
+          <a:prstGeom prst="rect">
+            <a:avLst/>
+          </a:prstGeom>
+          <a:noFill/>
+          <a:ln/>
+        </p:spPr>
+        <p:txBody>
+          <a:bodyPr wrap="square" lIns="0" tIns="0" rIns="0" bIns="0" rtlCol="0" anchor="ctr"/>
+          <a:lstStyle/>
+          <a:p>
+            <a:pPr indent="0" marL="0">
+              <a:buNone/>
+            </a:pPr>
+            <a:r>
+              <a:rPr lang="en-US" sz="1200" b="1" spc="100" kern="0" dirty="0">
+                <a:solidFill>
+                  <a:srgbClr val="4A6B5D"/>
+                </a:solidFill>
+                <a:latin typeface="Arial" pitchFamily="34" charset="0"/>
+                <a:ea typeface="Arial" pitchFamily="34" charset="-122"/>
+                <a:cs typeface="Arial" pitchFamily="34" charset="-120"/>
+              </a:rPr>
+              <a:t>Means by convention alone.</a:t>
+            </a:r>
+            <a:endParaRPr lang="en-US" sz="1200" dirty="0"/>
+          </a:p>
+        </p:txBody>
+      </p:sp>
+      <p:sp>
+        <p:nvSpPr>
+          <p:cNvPr id="23" name="Text 18"/>
+          <p:cNvSpPr/>
+          <p:nvPr/>
+        </p:nvSpPr>
+        <p:spPr>
+          <a:xfrm>
+            <a:off x="8119872" y="4663440"/>
+            <a:ext cx="3246120" cy="914400"/>
+          </a:xfrm>
+          <a:prstGeom prst="rect">
+            <a:avLst/>
+          </a:prstGeom>
+          <a:noFill/>
+          <a:ln/>
+        </p:spPr>
+        <p:txBody>
+          <a:bodyPr wrap="square" lIns="0" tIns="0" rIns="0" bIns="0" rtlCol="0" anchor="t"/>
+          <a:lstStyle/>
+          <a:p>
+            <a:pPr indent="0" marL="0">
+              <a:lnSpc>
+                <a:spcPts val="1900"/>
+              </a:lnSpc>
+              <a:buNone/>
+            </a:pPr>
+            <a:r>
+              <a:rPr lang="en-US" sz="1400" dirty="0">
+                <a:solidFill>
+                  <a:srgbClr val="24313F"/>
+                </a:solidFill>
+                <a:latin typeface="Georgia" pitchFamily="34" charset="0"/>
+                <a:ea typeface="Georgia" pitchFamily="34" charset="-122"/>
+                <a:cs typeface="Georgia" pitchFamily="34" charset="-120"/>
+              </a:rPr>
+              <a:t>Only agreement makes a flag mean a nation.</a:t>
+            </a:r>
+            <a:endParaRPr lang="en-US" sz="1400" dirty="0"/>
+          </a:p>
+        </p:txBody>
+      </p:sp>
+      <p:sp>
+        <p:nvSpPr>
+          <p:cNvPr id="24" name="Shape 19"/>
+          <p:cNvSpPr/>
+          <p:nvPr/>
+        </p:nvSpPr>
+        <p:spPr>
+          <a:xfrm>
+            <a:off x="822960" y="5715000"/>
             <a:ext cx="914400" cy="0"/>
           </a:xfrm>
           <a:prstGeom prst="line">
@@ -6518,13 +9302,13 @@
       </p:sp>
       <p:sp>
         <p:nvSpPr>
-          <p:cNvPr id="19" name="Text 17"/>
-          <p:cNvSpPr/>
-          <p:nvPr/>
-        </p:nvSpPr>
-        <p:spPr>
-          <a:xfrm>
-            <a:off x="822960" y="5669280"/>
+          <p:cNvPr id="25" name="Text 20"/>
+          <p:cNvSpPr/>
+          <p:nvPr/>
+        </p:nvSpPr>
+        <p:spPr>
+          <a:xfrm>
+            <a:off x="822960" y="5870448"/>
             <a:ext cx="10058400" cy="457200"/>
           </a:xfrm>
           <a:prstGeom prst="rect">
@@ -6557,7 +9341,7 @@
       </p:sp>
       <p:sp>
         <p:nvSpPr>
-          <p:cNvPr id="20" name="Shape 18"/>
+          <p:cNvPr id="26" name="Shape 21"/>
           <p:cNvSpPr/>
           <p:nvPr/>
         </p:nvSpPr>
@@ -6580,7 +9364,7 @@
       </p:sp>
       <p:sp>
         <p:nvSpPr>
-          <p:cNvPr id="21" name="Text 19"/>
+          <p:cNvPr id="27" name="Text 22"/>
           <p:cNvSpPr/>
           <p:nvPr/>
         </p:nvSpPr>
@@ -6619,7 +9403,7 @@
       </p:sp>
       <p:sp>
         <p:nvSpPr>
-          <p:cNvPr id="22" name="Text 20"/>
+          <p:cNvPr id="28" name="Text 23"/>
           <p:cNvSpPr/>
           <p:nvPr/>
         </p:nvSpPr>

--- a/content/decks/media-studies/media-studies-s1-lesson-02-semiotics-signs-and-codes.pptx
+++ b/content/decks/media-studies/media-studies-s1-lesson-02-semiotics-signs-and-codes.pptx
@@ -2356,7 +2356,7 @@
                 <a:ea typeface="Arial" pitchFamily="34" charset="-122"/>
                 <a:cs typeface="Arial" pitchFamily="34" charset="-120"/>
               </a:rPr>
-              <a:t>Four days  ·  Monday 7 to Friday 11 September  ·  the foundation, then four lessons with equipment in hand</a:t>
+              <a:t>Four days  ·  Monday 7 to Friday 11 September  ·  the theory base for the four technical lessons</a:t>
             </a:r>
             <a:endParaRPr lang="en-US" sz="1300" dirty="0"/>
           </a:p>
@@ -2678,7 +2678,7 @@
                 <a:ea typeface="Georgia" pitchFamily="34" charset="-122"/>
                 <a:cs typeface="Georgia" pitchFamily="34" charset="-120"/>
               </a:rPr>
-              <a:t>Three women give their men to the war.</a:t>
+              <a:t>Three women say goodbye to the men they love.</a:t>
             </a:r>
             <a:endParaRPr lang="en-US" sz="1450" dirty="0"/>
           </a:p>
@@ -2779,7 +2779,7 @@
                 <a:ea typeface="Georgia" pitchFamily="34" charset="-122"/>
                 <a:cs typeface="Georgia" pitchFamily="34" charset="-120"/>
               </a:rPr>
-              <a:t>Spectators cheer a parade they will not have to march in.</a:t>
+              <a:t>The crowd cheers for a war that others will fight.</a:t>
             </a:r>
             <a:endParaRPr lang="en-US" sz="1450" dirty="0"/>
           </a:p>
@@ -2880,7 +2880,7 @@
                 <a:ea typeface="Georgia" pitchFamily="34" charset="-122"/>
                 <a:cs typeface="Georgia" pitchFamily="34" charset="-120"/>
               </a:rPr>
-              <a:t>Front-row seats, and the hats stay on.</a:t>
+              <a:t>The best show in town, and the seats are free.</a:t>
             </a:r>
             <a:endParaRPr lang="en-US" sz="1450" dirty="0"/>
           </a:p>
@@ -2918,33 +2918,53 @@
         <p:spPr>
           <a:xfrm>
             <a:off x="822960" y="6108192"/>
-            <a:ext cx="10543032" cy="365760"/>
-          </a:xfrm>
-          <a:prstGeom prst="rect">
-            <a:avLst/>
-          </a:prstGeom>
-          <a:noFill/>
-          <a:ln/>
-        </p:spPr>
-        <p:txBody>
-          <a:bodyPr wrap="square" lIns="0" tIns="0" rIns="0" bIns="0" rtlCol="0" anchor="ctr"/>
-          <a:lstStyle/>
-          <a:p>
-            <a:pPr indent="0" marL="0">
-              <a:buNone/>
-            </a:pPr>
-            <a:r>
-              <a:rPr lang="en-US" sz="1300" i="1" dirty="0">
+            <a:ext cx="10543032" cy="274320"/>
+          </a:xfrm>
+          <a:prstGeom prst="rect">
+            <a:avLst/>
+          </a:prstGeom>
+          <a:noFill/>
+          <a:ln/>
+        </p:spPr>
+        <p:txBody>
+          <a:bodyPr wrap="square" lIns="0" tIns="0" rIns="0" bIns="0" rtlCol="0" anchor="t"/>
+          <a:lstStyle/>
+          <a:p>
+            <a:pPr indent="0" marL="0">
+              <a:lnSpc>
+                <a:spcPts val="1700"/>
+              </a:lnSpc>
+              <a:buNone/>
+            </a:pPr>
+            <a:r>
+              <a:rPr lang="en-US" sz="1100" b="1" spc="100" kern="0" dirty="0">
                 <a:solidFill>
                   <a:srgbClr val="4A6B5D"/>
+                </a:solidFill>
+                <a:latin typeface="Arial" pitchFamily="34" charset="0"/>
+                <a:ea typeface="Arial" pitchFamily="34" charset="-122"/>
+                <a:cs typeface="Arial" pitchFamily="34" charset="-120"/>
+              </a:rPr>
+              <a:t>KEY POINT   </a:t>
+            </a:r>
+            <a:pPr indent="0" marL="0">
+              <a:lnSpc>
+                <a:spcPts val="1700"/>
+              </a:lnSpc>
+              <a:buNone/>
+            </a:pPr>
+            <a:r>
+              <a:rPr lang="en-US" sz="1300" dirty="0">
+                <a:solidFill>
+                  <a:srgbClr val="24313F"/>
                 </a:solidFill>
                 <a:latin typeface="Georgia" pitchFamily="34" charset="0"/>
                 <a:ea typeface="Georgia" pitchFamily="34" charset="-122"/>
                 <a:cs typeface="Georgia" pitchFamily="34" charset="-120"/>
               </a:rPr>
-              <a:t>Three captions, three texts. Anchorage is authorship: whoever writes the words re-makes the image.</a:t>
-            </a:r>
-            <a:endParaRPr lang="en-US" sz="1300" dirty="0"/>
+              <a:t>Same image, three captions, three different texts. Whoever writes the caption controls the meaning.</a:t>
+            </a:r>
+            <a:endParaRPr lang="en-US" sz="1100" dirty="0"/>
           </a:p>
         </p:txBody>
       </p:sp>
@@ -3345,7 +3365,7 @@
                 <a:ea typeface="Georgia" pitchFamily="34" charset="-122"/>
                 <a:cs typeface="Georgia" pitchFamily="34" charset="-120"/>
               </a:rPr>
-              <a:t>Assumes money, taste and the habit of being looked at. Speaks in gold and one word.</a:t>
+              <a:t>It expects money and taste. One word, gold light, no explanation needed.</a:t>
             </a:r>
             <a:endParaRPr lang="en-US" sz="1350" dirty="0"/>
           </a:p>
@@ -3475,7 +3495,7 @@
                 <a:ea typeface="Georgia" pitchFamily="34" charset="-122"/>
                 <a:cs typeface="Georgia" pitchFamily="34" charset="-120"/>
               </a:rPr>
-              <a:t>Assumes patience, prior knowledge, and trust in columns of grey text.</a:t>
+              <a:t>It expects patience, prior knowledge, and trust in long columns of text.</a:t>
             </a:r>
             <a:endParaRPr lang="en-US" sz="1350" dirty="0"/>
           </a:p>
@@ -3605,7 +3625,7 @@
                 <a:ea typeface="Georgia" pitchFamily="34" charset="-122"/>
                 <a:cs typeface="Georgia" pitchFamily="34" charset="-120"/>
               </a:rPr>
-              <a:t>Assumes a thumb, an appetite for now, and no patience at all.</a:t>
+              <a:t>It expects a thumb, a short attention span, and no patience at all.</a:t>
             </a:r>
             <a:endParaRPr lang="en-US" sz="1350" dirty="0"/>
           </a:p>
@@ -3642,34 +3662,91 @@
         </p:nvSpPr>
         <p:spPr>
           <a:xfrm>
-            <a:off x="822960" y="5897880"/>
-            <a:ext cx="10543032" cy="365760"/>
-          </a:xfrm>
-          <a:prstGeom prst="rect">
-            <a:avLst/>
-          </a:prstGeom>
-          <a:noFill/>
-          <a:ln/>
-        </p:spPr>
-        <p:txBody>
-          <a:bodyPr wrap="square" lIns="0" tIns="0" rIns="0" bIns="0" rtlCol="0" anchor="ctr"/>
-          <a:lstStyle/>
-          <a:p>
-            <a:pPr indent="0" marL="0">
-              <a:buNone/>
-            </a:pPr>
-            <a:r>
-              <a:rPr lang="en-US" sz="1200" i="1" dirty="0">
-                <a:solidFill>
-                  <a:srgbClr val="7A7F72"/>
+            <a:off x="822960" y="5870448"/>
+            <a:ext cx="10543032" cy="457200"/>
+          </a:xfrm>
+          <a:prstGeom prst="rect">
+            <a:avLst/>
+          </a:prstGeom>
+          <a:noFill/>
+          <a:ln/>
+        </p:spPr>
+        <p:txBody>
+          <a:bodyPr wrap="square" lIns="0" tIns="0" rIns="0" bIns="0" rtlCol="0" anchor="t"/>
+          <a:lstStyle/>
+          <a:p>
+            <a:pPr indent="0" marL="0">
+              <a:lnSpc>
+                <a:spcPts val="1600"/>
+              </a:lnSpc>
+              <a:buNone/>
+            </a:pPr>
+            <a:r>
+              <a:rPr lang="en-US" sz="1000" b="1" spc="100" kern="0" dirty="0">
+                <a:solidFill>
+                  <a:srgbClr val="4A6B5D"/>
                 </a:solidFill>
                 <a:latin typeface="Arial" pitchFamily="34" charset="0"/>
                 <a:ea typeface="Arial" pitchFamily="34" charset="-122"/>
                 <a:cs typeface="Arial" pitchFamily="34" charset="-120"/>
               </a:rPr>
-              <a:t>Profile each implied reader: age, income, knowledge assumed, mood invited, and the pronoun the text would use for you.</a:t>
-            </a:r>
-            <a:endParaRPr lang="en-US" sz="1200" dirty="0"/>
+              <a:t>TERM   </a:t>
+            </a:r>
+            <a:pPr indent="0" marL="0">
+              <a:lnSpc>
+                <a:spcPts val="1600"/>
+              </a:lnSpc>
+              <a:buNone/>
+            </a:pPr>
+            <a:r>
+              <a:rPr lang="en-US" sz="1200" dirty="0">
+                <a:solidFill>
+                  <a:srgbClr val="24313F"/>
+                </a:solidFill>
+                <a:latin typeface="Georgia" pitchFamily="34" charset="0"/>
+                <a:ea typeface="Georgia" pitchFamily="34" charset="-122"/>
+                <a:cs typeface="Georgia" pitchFamily="34" charset="-120"/>
+              </a:rPr>
+              <a:t>Implied reader: the reader a text expects and speaks to.</a:t>
+            </a:r>
+            <a:endParaRPr lang="en-US" sz="1000" dirty="0"/>
+          </a:p>
+          <a:p>
+            <a:pPr indent="0" marL="0">
+              <a:lnSpc>
+                <a:spcPts val="1600"/>
+              </a:lnSpc>
+              <a:buNone/>
+            </a:pPr>
+            <a:r>
+              <a:rPr lang="en-US" sz="1000" b="1" spc="100" kern="0" dirty="0">
+                <a:solidFill>
+                  <a:srgbClr val="4A6B5D"/>
+                </a:solidFill>
+                <a:latin typeface="Arial" pitchFamily="34" charset="0"/>
+                <a:ea typeface="Arial" pitchFamily="34" charset="-122"/>
+                <a:cs typeface="Arial" pitchFamily="34" charset="-120"/>
+              </a:rPr>
+              <a:t>TASK   </a:t>
+            </a:r>
+            <a:pPr indent="0" marL="0">
+              <a:lnSpc>
+                <a:spcPts val="1600"/>
+              </a:lnSpc>
+              <a:buNone/>
+            </a:pPr>
+            <a:r>
+              <a:rPr lang="en-US" sz="1200" dirty="0">
+                <a:solidFill>
+                  <a:srgbClr val="24313F"/>
+                </a:solidFill>
+                <a:latin typeface="Georgia" pitchFamily="34" charset="0"/>
+                <a:ea typeface="Georgia" pitchFamily="34" charset="-122"/>
+                <a:cs typeface="Georgia" pitchFamily="34" charset="-120"/>
+              </a:rPr>
+              <a:t>Profile each one: age, income, knowledge, mood, and how the text would address you.</a:t>
+            </a:r>
+            <a:endParaRPr lang="en-US" sz="1000" dirty="0"/>
           </a:p>
         </p:txBody>
       </p:sp>
@@ -4148,7 +4225,7 @@
                 <a:ea typeface="Georgia" pitchFamily="34" charset="-122"/>
                 <a:cs typeface="Georgia" pitchFamily="34" charset="-120"/>
               </a:rPr>
-              <a:t>wide, static, eye level; cold institutional light</a:t>
+              <a:t>wide, static, eye level, cold institutional light</a:t>
             </a:r>
             <a:endParaRPr lang="en-US" sz="1250" dirty="0"/>
           </a:p>
@@ -4268,7 +4345,7 @@
                 <a:ea typeface="Georgia" pitchFamily="34" charset="-122"/>
                 <a:cs typeface="Georgia" pitchFamily="34" charset="-120"/>
               </a:rPr>
-              <a:t>the table between them; the sweatshirt; the bare walls</a:t>
+              <a:t>the table between them, the sweatshirt, the bare walls</a:t>
             </a:r>
             <a:endParaRPr lang="en-US" sz="1250" dirty="0"/>
           </a:p>
@@ -4388,7 +4465,7 @@
                 <a:ea typeface="Georgia" pitchFamily="34" charset="-122"/>
                 <a:cs typeface="Georgia" pitchFamily="34" charset="-120"/>
               </a:rPr>
-              <a:t>the notice on the wall; every form on the table</a:t>
+              <a:t>the notice on the wall, the forms on the table</a:t>
             </a:r>
             <a:endParaRPr lang="en-US" sz="1250" dirty="0"/>
           </a:p>
@@ -4911,7 +4988,7 @@
                 <a:ea typeface="Georgia" pitchFamily="34" charset="-122"/>
                 <a:cs typeface="Georgia" pitchFamily="34" charset="-120"/>
               </a:rPr>
-              <a:t>SAUVAGE; WILD AT HEART; DIOR: three registers of one claim</a:t>
+              <a:t>SAUVAGE, WILD AT HEART, DIOR: three ways to say one thing</a:t>
             </a:r>
             <a:endParaRPr lang="en-US" sz="1350" dirty="0"/>
           </a:p>
@@ -4992,7 +5069,7 @@
                 <a:ea typeface="Georgia" pitchFamily="34" charset="-122"/>
                 <a:cs typeface="Georgia" pitchFamily="34" charset="-120"/>
               </a:rPr>
-              <a:t>firelight, open shirt, tattoos, desert dusk: wildness worn as costume</a:t>
+              <a:t>firelight, open shirt, tattoos, desert: wildness as a costume</a:t>
             </a:r>
             <a:endParaRPr lang="en-US" sz="1350" dirty="0"/>
           </a:p>
@@ -5073,7 +5150,7 @@
                 <a:ea typeface="Georgia" pitchFamily="34" charset="-122"/>
                 <a:cs typeface="Georgia" pitchFamily="34" charset="-120"/>
               </a:rPr>
-              <a:t>the bottle sharp and steady in the chaos: the product as the calm center</a:t>
+              <a:t>the bottle stays sharp and steady: the product is the calm center</a:t>
             </a:r>
             <a:endParaRPr lang="en-US" sz="1350" dirty="0"/>
           </a:p>
@@ -5154,7 +5231,7 @@
                 <a:ea typeface="Georgia" pitchFamily="34" charset="-122"/>
                 <a:cs typeface="Georgia" pitchFamily="34" charset="-120"/>
               </a:rPr>
-              <a:t>low-key, warm against cool; shallow focus pulls the face forward</a:t>
+              <a:t>low-key lighting, warm against cool, shallow focus on the face</a:t>
             </a:r>
             <a:endParaRPr lang="en-US" sz="1350" dirty="0"/>
           </a:p>
@@ -5235,7 +5312,7 @@
                 <a:ea typeface="Georgia" pitchFamily="34" charset="-122"/>
                 <a:cs typeface="Georgia" pitchFamily="34" charset="-120"/>
               </a:rPr>
-              <a:t>eye-level direct address: he looks at you looking</a:t>
+              <a:t>eye level, direct address: he looks straight at you</a:t>
             </a:r>
             <a:endParaRPr lang="en-US" sz="1350" dirty="0"/>
           </a:p>
@@ -5316,7 +5393,7 @@
                 <a:ea typeface="Georgia" pitchFamily="34" charset="-122"/>
                 <a:cs typeface="Georgia" pitchFamily="34" charset="-120"/>
               </a:rPr>
-              <a:t>absent by medium, and saying so is a label too</a:t>
+              <a:t>a print ad has no sound: writing that down is also a label</a:t>
             </a:r>
             <a:endParaRPr lang="en-US" sz="1350" dirty="0"/>
           </a:p>
@@ -5354,33 +5431,53 @@
         <p:spPr>
           <a:xfrm>
             <a:off x="4937760" y="6062472"/>
-            <a:ext cx="6400800" cy="365760"/>
-          </a:xfrm>
-          <a:prstGeom prst="rect">
-            <a:avLst/>
-          </a:prstGeom>
-          <a:noFill/>
-          <a:ln/>
-        </p:spPr>
-        <p:txBody>
-          <a:bodyPr wrap="square" lIns="0" tIns="0" rIns="0" bIns="0" rtlCol="0" anchor="ctr"/>
-          <a:lstStyle/>
-          <a:p>
-            <a:pPr indent="0" marL="0">
-              <a:buNone/>
-            </a:pPr>
-            <a:r>
-              <a:rPr lang="en-US" sz="1250" i="1" dirty="0">
+            <a:ext cx="6400800" cy="274320"/>
+          </a:xfrm>
+          <a:prstGeom prst="rect">
+            <a:avLst/>
+          </a:prstGeom>
+          <a:noFill/>
+          <a:ln/>
+        </p:spPr>
+        <p:txBody>
+          <a:bodyPr wrap="square" lIns="0" tIns="0" rIns="0" bIns="0" rtlCol="0" anchor="t"/>
+          <a:lstStyle/>
+          <a:p>
+            <a:pPr indent="0" marL="0">
+              <a:lnSpc>
+                <a:spcPts val="1600"/>
+              </a:lnSpc>
+              <a:buNone/>
+            </a:pPr>
+            <a:r>
+              <a:rPr lang="en-US" sz="1050" b="1" spc="100" kern="0" dirty="0">
                 <a:solidFill>
                   <a:srgbClr val="4A6B5D"/>
+                </a:solidFill>
+                <a:latin typeface="Arial" pitchFamily="34" charset="0"/>
+                <a:ea typeface="Arial" pitchFamily="34" charset="-122"/>
+                <a:cs typeface="Arial" pitchFamily="34" charset="-120"/>
+              </a:rPr>
+              <a:t>CS2   </a:t>
+            </a:r>
+            <a:pPr indent="0" marL="0">
+              <a:lnSpc>
+                <a:spcPts val="1600"/>
+              </a:lnSpc>
+              <a:buNone/>
+            </a:pPr>
+            <a:r>
+              <a:rPr lang="en-US" sz="1250" dirty="0">
+                <a:solidFill>
+                  <a:srgbClr val="24313F"/>
                 </a:solidFill>
                 <a:latin typeface="Georgia" pitchFamily="34" charset="0"/>
                 <a:ea typeface="Georgia" pitchFamily="34" charset="-122"/>
                 <a:cs typeface="Georgia" pitchFamily="34" charset="-120"/>
               </a:rPr>
-              <a:t>Six accurate labels on an everyday text: that is the whole of CS2. Yours, on a text of your own choosing.</a:t>
-            </a:r>
-            <a:endParaRPr lang="en-US" sz="1250" dirty="0"/>
+              <a:t>Six accurate labels on a media text you choose. This ad is your model.</a:t>
+            </a:r>
+            <a:endParaRPr lang="en-US" sz="1050" dirty="0"/>
           </a:p>
         </p:txBody>
       </p:sp>
@@ -5755,7 +5852,7 @@
                 <a:ea typeface="Georgia" pitchFamily="34" charset="-122"/>
                 <a:cs typeface="Georgia" pitchFamily="34" charset="-120"/>
               </a:rPr>
-              <a:t>An everyday media text of your own choosing, annotated with at least six accurate code labels. Peer-checked against the exemplar before it is collected.</a:t>
+              <a:t>Choose an everyday media text. Label it with at least six accurate code labels. Check your work against the model ad before you hand it in.</a:t>
             </a:r>
             <a:endParaRPr lang="en-US" sz="1700" dirty="0"/>
           </a:p>
@@ -5859,7 +5956,7 @@
                 <a:ea typeface="Georgia" pitchFamily="34" charset="-122"/>
                 <a:cs typeface="Georgia" pitchFamily="34" charset="-120"/>
               </a:rPr>
-              <a:t>Committed on Wednesday and logged on the blog with one line of justification. It feeds the case-study document in Lesson 15 and it is not revisitable next week.</a:t>
+              <a:t>Decide on Wednesday. Post it on the blog with one line: why this area? The choice feeds your Lesson 15 case study, and you cannot change it next week.</a:t>
             </a:r>
             <a:endParaRPr lang="en-US" sz="1700" dirty="0"/>
           </a:p>
@@ -5893,27 +5990,44 @@
         </p:nvSpPr>
         <p:spPr>
           <a:xfrm>
-            <a:off x="1097280" y="4754880"/>
-            <a:ext cx="9994392" cy="822960"/>
-          </a:xfrm>
-          <a:prstGeom prst="rect">
-            <a:avLst/>
-          </a:prstGeom>
-          <a:noFill/>
-          <a:ln/>
-        </p:spPr>
-        <p:txBody>
-          <a:bodyPr wrap="square" lIns="0" tIns="0" rIns="0" bIns="0" rtlCol="0" anchor="ctr"/>
+            <a:off x="1097280" y="4828032"/>
+            <a:ext cx="9994392" cy="685800"/>
+          </a:xfrm>
+          <a:prstGeom prst="rect">
+            <a:avLst/>
+          </a:prstGeom>
+          <a:noFill/>
+          <a:ln/>
+        </p:spPr>
+        <p:txBody>
+          <a:bodyPr wrap="square" lIns="0" tIns="0" rIns="0" bIns="0" rtlCol="0" anchor="t"/>
           <a:lstStyle/>
           <a:p>
             <a:pPr indent="0" marL="0">
               <a:lnSpc>
-                <a:spcPts val="2200"/>
+                <a:spcPts val="2100"/>
               </a:lnSpc>
               <a:buNone/>
             </a:pPr>
             <a:r>
-              <a:rPr lang="en-US" sz="1650" dirty="0">
+              <a:rPr lang="en-US" sz="1350" b="1" spc="100" kern="0" dirty="0">
+                <a:solidFill>
+                  <a:srgbClr val="4A6B5D"/>
+                </a:solidFill>
+                <a:latin typeface="Arial" pitchFamily="34" charset="0"/>
+                <a:ea typeface="Arial" pitchFamily="34" charset="-122"/>
+                <a:cs typeface="Arial" pitchFamily="34" charset="-120"/>
+              </a:rPr>
+              <a:t>THE ROAD MAP   </a:t>
+            </a:r>
+            <a:pPr indent="0" marL="0">
+              <a:lnSpc>
+                <a:spcPts val="2100"/>
+              </a:lnSpc>
+              <a:buNone/>
+            </a:pPr>
+            <a:r>
+              <a:rPr lang="en-US" sz="1550" dirty="0">
                 <a:solidFill>
                   <a:srgbClr val="24313F"/>
                 </a:solidFill>
@@ -5921,9 +6035,9 @@
                 <a:ea typeface="Georgia" pitchFamily="34" charset="-122"/>
                 <a:cs typeface="Georgia" pitchFamily="34" charset="-120"/>
               </a:rPr>
-              <a:t>The road map, said plainly: the technical family is not one bullet on that checklist. It is four lessons with equipment in your hands, and every exercise you shoot in them is a dated post in your Component 1 blog.</a:t>
-            </a:r>
-            <a:endParaRPr lang="en-US" sz="1650" dirty="0"/>
+              <a:t>Next: four lessons on the technical codes, with equipment in your hands. Every exercise you shoot becomes a dated post on your Component 1 blog.</a:t>
+            </a:r>
+            <a:endParaRPr lang="en-US" sz="1350" dirty="0"/>
           </a:p>
         </p:txBody>
       </p:sp>
@@ -6463,12 +6577,12 @@
           <a:p>
             <a:pPr indent="0" marL="0">
               <a:lnSpc>
-                <a:spcPts val="5400"/>
+                <a:spcPts val="5200"/>
               </a:lnSpc>
               <a:buNone/>
             </a:pPr>
             <a:r>
-              <a:rPr lang="en-US" sz="5000" dirty="0">
+              <a:rPr lang="en-US" sz="4400" dirty="0">
                 <a:solidFill>
                   <a:srgbClr val="FAF8F1"/>
                 </a:solidFill>
@@ -6476,19 +6590,19 @@
                 <a:ea typeface="Georgia" pitchFamily="34" charset="-122"/>
                 <a:cs typeface="Georgia" pitchFamily="34" charset="-120"/>
               </a:rPr>
-              <a:t>Foundation, not</a:t>
-            </a:r>
-            <a:endParaRPr lang="en-US" sz="5000" dirty="0"/>
+              <a:t>This week is the base.</a:t>
+            </a:r>
+            <a:endParaRPr lang="en-US" sz="4400" dirty="0"/>
           </a:p>
           <a:p>
             <a:pPr indent="0" marL="0">
               <a:lnSpc>
-                <a:spcPts val="5400"/>
+                <a:spcPts val="5200"/>
               </a:lnSpc>
               <a:buNone/>
             </a:pPr>
             <a:r>
-              <a:rPr lang="en-US" sz="5000" dirty="0">
+              <a:rPr lang="en-US" sz="4400" dirty="0">
                 <a:solidFill>
                   <a:srgbClr val="FAF8F1"/>
                 </a:solidFill>
@@ -6496,9 +6610,29 @@
                 <a:ea typeface="Georgia" pitchFamily="34" charset="-122"/>
                 <a:cs typeface="Georgia" pitchFamily="34" charset="-120"/>
               </a:rPr>
-              <a:t>the building.</a:t>
-            </a:r>
-            <a:endParaRPr lang="en-US" sz="5000" dirty="0"/>
+              <a:t>The next four weeks</a:t>
+            </a:r>
+            <a:endParaRPr lang="en-US" sz="4400" dirty="0"/>
+          </a:p>
+          <a:p>
+            <a:pPr indent="0" marL="0">
+              <a:lnSpc>
+                <a:spcPts val="5200"/>
+              </a:lnSpc>
+              <a:buNone/>
+            </a:pPr>
+            <a:r>
+              <a:rPr lang="en-US" sz="4400" dirty="0">
+                <a:solidFill>
+                  <a:srgbClr val="FAF8F1"/>
+                </a:solidFill>
+                <a:latin typeface="Georgia" pitchFamily="34" charset="0"/>
+                <a:ea typeface="Georgia" pitchFamily="34" charset="-122"/>
+                <a:cs typeface="Georgia" pitchFamily="34" charset="-120"/>
+              </a:rPr>
+              <a:t>build on it.</a:t>
+            </a:r>
+            <a:endParaRPr lang="en-US" sz="4400" dirty="0"/>
           </a:p>
         </p:txBody>
       </p:sp>
@@ -6797,7 +6931,7 @@
                 <a:ea typeface="Georgia" pitchFamily="34" charset="-122"/>
                 <a:cs typeface="Georgia" pitchFamily="34" charset="-120"/>
               </a:rPr>
-              <a:t>The form you perceive: the marks, the sound, the letters r-o-s-e.</a:t>
+              <a:t>The form you see or hear: the letters r-o-s-e, or the spoken word.</a:t>
             </a:r>
             <a:endParaRPr lang="en-US" sz="1600" dirty="0"/>
           </a:p>
@@ -6926,7 +7060,7 @@
                 <a:ea typeface="Georgia" pitchFamily="34" charset="-122"/>
                 <a:cs typeface="Georgia" pitchFamily="34" charset="-120"/>
               </a:rPr>
-              <a:t>The idea it calls up: the concept of a rose, formed in your mind.</a:t>
+              <a:t>The idea in your mind: the concept of a rose.</a:t>
             </a:r>
             <a:endParaRPr lang="en-US" sz="1600" dirty="0"/>
           </a:p>
@@ -7303,6 +7437,65 @@
               <a:t>Ferdinand de Saussure, Course in General Linguistics, 1916</a:t>
             </a:r>
             <a:endParaRPr lang="en-US" sz="1400" dirty="0"/>
+          </a:p>
+        </p:txBody>
+      </p:sp>
+      <p:sp>
+        <p:nvSpPr>
+          <p:cNvPr id="6" name="Text 4"/>
+          <p:cNvSpPr/>
+          <p:nvPr/>
+        </p:nvSpPr>
+        <p:spPr>
+          <a:xfrm>
+            <a:off x="822960" y="5806440"/>
+            <a:ext cx="10424160" cy="640080"/>
+          </a:xfrm>
+          <a:prstGeom prst="rect">
+            <a:avLst/>
+          </a:prstGeom>
+          <a:noFill/>
+          <a:ln/>
+        </p:spPr>
+        <p:txBody>
+          <a:bodyPr wrap="square" lIns="0" tIns="0" rIns="0" bIns="0" rtlCol="0" anchor="t"/>
+          <a:lstStyle/>
+          <a:p>
+            <a:pPr indent="0" marL="0">
+              <a:lnSpc>
+                <a:spcPts val="1900"/>
+              </a:lnSpc>
+              <a:buNone/>
+            </a:pPr>
+            <a:r>
+              <a:rPr lang="en-US" sz="1200" b="1" spc="100" kern="0" dirty="0">
+                <a:solidFill>
+                  <a:srgbClr val="7A7F72"/>
+                </a:solidFill>
+                <a:latin typeface="Arial" pitchFamily="34" charset="0"/>
+                <a:ea typeface="Arial" pitchFamily="34" charset="-122"/>
+                <a:cs typeface="Arial" pitchFamily="34" charset="-120"/>
+              </a:rPr>
+              <a:t>IN PLAIN WORDS   </a:t>
+            </a:r>
+            <a:pPr indent="0" marL="0">
+              <a:lnSpc>
+                <a:spcPts val="1900"/>
+              </a:lnSpc>
+              <a:buNone/>
+            </a:pPr>
+            <a:r>
+              <a:rPr lang="en-US" sz="1400" i="1" dirty="0">
+                <a:solidFill>
+                  <a:srgbClr val="4A6B5D"/>
+                </a:solidFill>
+                <a:latin typeface="Georgia" pitchFamily="34" charset="0"/>
+                <a:ea typeface="Georgia" pitchFamily="34" charset="-122"/>
+                <a:cs typeface="Georgia" pitchFamily="34" charset="-120"/>
+              </a:rPr>
+              <a:t>Arbitrary: there is no natural link between a word's form and its meaning. Only agreement links them.</a:t>
+            </a:r>
+            <a:endParaRPr lang="en-US" sz="1200" dirty="0"/>
           </a:p>
         </p:txBody>
       </p:sp>
@@ -7575,7 +7768,7 @@
         <p:spPr>
           <a:xfrm>
             <a:off x="822960" y="3657600"/>
-            <a:ext cx="6858000" cy="2103120"/>
+            <a:ext cx="6858000" cy="1645920"/>
           </a:xfrm>
           <a:prstGeom prst="rect">
             <a:avLst/>
@@ -7589,12 +7782,29 @@
           <a:p>
             <a:pPr indent="0" marL="0">
               <a:lnSpc>
-                <a:spcPts val="2600"/>
+                <a:spcPts val="2200"/>
               </a:lnSpc>
               <a:buNone/>
             </a:pPr>
             <a:r>
-              <a:rPr lang="en-US" sz="1800" dirty="0">
+              <a:rPr lang="en-US" sz="1250" b="1" spc="100" kern="0" dirty="0">
+                <a:solidFill>
+                  <a:srgbClr val="4A6B5D"/>
+                </a:solidFill>
+                <a:latin typeface="Arial" pitchFamily="34" charset="0"/>
+                <a:ea typeface="Arial" pitchFamily="34" charset="-122"/>
+                <a:cs typeface="Arial" pitchFamily="34" charset="-120"/>
+              </a:rPr>
+              <a:t>TERM   </a:t>
+            </a:r>
+            <a:pPr indent="0" marL="0">
+              <a:lnSpc>
+                <a:spcPts val="2200"/>
+              </a:lnSpc>
+              <a:buNone/>
+            </a:pPr>
+            <a:r>
+              <a:rPr lang="en-US" sz="1450" dirty="0">
                 <a:solidFill>
                   <a:srgbClr val="24313F"/>
                 </a:solidFill>
@@ -7602,9 +7812,83 @@
                 <a:ea typeface="Georgia" pitchFamily="34" charset="-122"/>
                 <a:cs typeface="Georgia" pitchFamily="34" charset="-120"/>
               </a:rPr>
-              <a:t>Each link feels natural. None of it is. Challenge every arrow with one question: who taught you that? Connotation is learned, and what is learned can be unlearned, or sold back to you.</a:t>
-            </a:r>
-            <a:endParaRPr lang="en-US" sz="1800" dirty="0"/>
+              <a:t>Connotation: the extra meaning a culture attaches to a sign.</a:t>
+            </a:r>
+            <a:endParaRPr lang="en-US" sz="1250" dirty="0"/>
+          </a:p>
+          <a:p>
+            <a:pPr indent="0" marL="0">
+              <a:lnSpc>
+                <a:spcPts val="2200"/>
+              </a:lnSpc>
+              <a:buNone/>
+            </a:pPr>
+            <a:r>
+              <a:rPr lang="en-US" sz="1250" b="1" spc="100" kern="0" dirty="0">
+                <a:solidFill>
+                  <a:srgbClr val="4A6B5D"/>
+                </a:solidFill>
+                <a:latin typeface="Arial" pitchFamily="34" charset="0"/>
+                <a:ea typeface="Arial" pitchFamily="34" charset="-122"/>
+                <a:cs typeface="Arial" pitchFamily="34" charset="-120"/>
+              </a:rPr>
+              <a:t>KEY POINT   </a:t>
+            </a:r>
+            <a:pPr indent="0" marL="0">
+              <a:lnSpc>
+                <a:spcPts val="2200"/>
+              </a:lnSpc>
+              <a:buNone/>
+            </a:pPr>
+            <a:r>
+              <a:rPr lang="en-US" sz="1450" dirty="0">
+                <a:solidFill>
+                  <a:srgbClr val="24313F"/>
+                </a:solidFill>
+                <a:latin typeface="Georgia" pitchFamily="34" charset="0"/>
+                <a:ea typeface="Georgia" pitchFamily="34" charset="-122"/>
+                <a:cs typeface="Georgia" pitchFamily="34" charset="-120"/>
+              </a:rPr>
+              <a:t>Connotation is learned, not natural. Nobody is born knowing a rose means love.</a:t>
+            </a:r>
+            <a:endParaRPr lang="en-US" sz="1250" dirty="0"/>
+          </a:p>
+          <a:p>
+            <a:pPr indent="0" marL="0">
+              <a:lnSpc>
+                <a:spcPts val="2200"/>
+              </a:lnSpc>
+              <a:buNone/>
+            </a:pPr>
+            <a:r>
+              <a:rPr lang="en-US" sz="1250" b="1" spc="100" kern="0" dirty="0">
+                <a:solidFill>
+                  <a:srgbClr val="4A6B5D"/>
+                </a:solidFill>
+                <a:latin typeface="Arial" pitchFamily="34" charset="0"/>
+                <a:ea typeface="Arial" pitchFamily="34" charset="-122"/>
+                <a:cs typeface="Arial" pitchFamily="34" charset="-120"/>
+              </a:rPr>
+              <a:t>CHECK   </a:t>
+            </a:r>
+            <a:pPr indent="0" marL="0">
+              <a:lnSpc>
+                <a:spcPts val="2200"/>
+              </a:lnSpc>
+              <a:buNone/>
+            </a:pPr>
+            <a:r>
+              <a:rPr lang="en-US" sz="1450" dirty="0">
+                <a:solidFill>
+                  <a:srgbClr val="24313F"/>
+                </a:solidFill>
+                <a:latin typeface="Georgia" pitchFamily="34" charset="0"/>
+                <a:ea typeface="Georgia" pitchFamily="34" charset="-122"/>
+                <a:cs typeface="Georgia" pitchFamily="34" charset="-120"/>
+              </a:rPr>
+              <a:t>At each arrow, ask: who taught me this meaning? Who makes money from it?</a:t>
+            </a:r>
+            <a:endParaRPr lang="en-US" sz="1250" dirty="0"/>
           </a:p>
         </p:txBody>
       </p:sp>
@@ -7774,7 +8058,7 @@
                 <a:ea typeface="Georgia" pitchFamily="34" charset="-122"/>
                 <a:cs typeface="Georgia" pitchFamily="34" charset="-120"/>
               </a:rPr>
-              <a:t>Same signifier, split meaning</a:t>
+              <a:t>Same signifier, different meanings</a:t>
             </a:r>
             <a:endParaRPr lang="en-US" sz="3200" dirty="0"/>
           </a:p>
@@ -8394,8 +8678,8 @@
         </p:nvSpPr>
         <p:spPr>
           <a:xfrm>
-            <a:off x="822960" y="4892040"/>
-            <a:ext cx="10543032" cy="640080"/>
+            <a:off x="822960" y="4864608"/>
+            <a:ext cx="10543032" cy="457200"/>
           </a:xfrm>
           <a:prstGeom prst="rect">
             <a:avLst/>
@@ -8409,22 +8693,76 @@
           <a:p>
             <a:pPr indent="0" marL="0">
               <a:lnSpc>
-                <a:spcPts val="1700"/>
+                <a:spcPts val="1600"/>
               </a:lnSpc>
               <a:buNone/>
             </a:pPr>
             <a:r>
-              <a:rPr lang="en-US" sz="1250" i="1" dirty="0">
-                <a:solidFill>
-                  <a:srgbClr val="7A7F72"/>
+              <a:rPr lang="en-US" sz="1000" b="1" spc="100" kern="0" dirty="0">
+                <a:solidFill>
+                  <a:srgbClr val="4A6B5D"/>
                 </a:solidFill>
                 <a:latin typeface="Arial" pitchFamily="34" charset="0"/>
                 <a:ea typeface="Arial" pitchFamily="34" charset="-122"/>
                 <a:cs typeface="Arial" pitchFamily="34" charset="-120"/>
               </a:rPr>
-              <a:t>The core runs on the sets a Cambridge extract trades in: red, white, black, the rose, the dove, the suit. This aside proves the wheel is culture-bound; the paper only ever asks about the first set.</a:t>
-            </a:r>
-            <a:endParaRPr lang="en-US" sz="1250" dirty="0"/>
+              <a:t>KEY POINT   </a:t>
+            </a:r>
+            <a:pPr indent="0" marL="0">
+              <a:lnSpc>
+                <a:spcPts val="1600"/>
+              </a:lnSpc>
+              <a:buNone/>
+            </a:pPr>
+            <a:r>
+              <a:rPr lang="en-US" sz="1200" dirty="0">
+                <a:solidFill>
+                  <a:srgbClr val="24313F"/>
+                </a:solidFill>
+                <a:latin typeface="Georgia" pitchFamily="34" charset="0"/>
+                <a:ea typeface="Georgia" pitchFamily="34" charset="-122"/>
+                <a:cs typeface="Georgia" pitchFamily="34" charset="-120"/>
+              </a:rPr>
+              <a:t>Connotations change from culture to culture. This table is the proof.</a:t>
+            </a:r>
+            <a:endParaRPr lang="en-US" sz="1000" dirty="0"/>
+          </a:p>
+          <a:p>
+            <a:pPr indent="0" marL="0">
+              <a:lnSpc>
+                <a:spcPts val="1600"/>
+              </a:lnSpc>
+              <a:buNone/>
+            </a:pPr>
+            <a:r>
+              <a:rPr lang="en-US" sz="1000" b="1" spc="100" kern="0" dirty="0">
+                <a:solidFill>
+                  <a:srgbClr val="4A6B5D"/>
+                </a:solidFill>
+                <a:latin typeface="Arial" pitchFamily="34" charset="0"/>
+                <a:ea typeface="Arial" pitchFamily="34" charset="-122"/>
+                <a:cs typeface="Arial" pitchFamily="34" charset="-120"/>
+              </a:rPr>
+              <a:t>EXAM NOTE   </a:t>
+            </a:r>
+            <a:pPr indent="0" marL="0">
+              <a:lnSpc>
+                <a:spcPts val="1600"/>
+              </a:lnSpc>
+              <a:buNone/>
+            </a:pPr>
+            <a:r>
+              <a:rPr lang="en-US" sz="1200" dirty="0">
+                <a:solidFill>
+                  <a:srgbClr val="24313F"/>
+                </a:solidFill>
+                <a:latin typeface="Georgia" pitchFamily="34" charset="0"/>
+                <a:ea typeface="Georgia" pitchFamily="34" charset="-122"/>
+                <a:cs typeface="Georgia" pitchFamily="34" charset="-120"/>
+              </a:rPr>
+              <a:t>The Cambridge paper uses the Western readings: red, white, black, the rose, the dove, the suit. Learn those.</a:t>
+            </a:r>
+            <a:endParaRPr lang="en-US" sz="1000" dirty="0"/>
           </a:p>
         </p:txBody>
       </p:sp>
@@ -8633,7 +8971,7 @@
                 <a:ea typeface="Arial" pitchFamily="34" charset="-122"/>
                 <a:cs typeface="Arial" pitchFamily="34" charset="-120"/>
               </a:rPr>
-              <a:t>SORT WARS · BLENDS ARE CONTESTED</a:t>
+              <a:t>SORT WARS · MIXED TYPES ARE ALLOWED</a:t>
             </a:r>
             <a:endParaRPr lang="en-US" sz="1100" dirty="0"/>
           </a:p>
@@ -8845,7 +9183,7 @@
                 <a:ea typeface="Arial" pitchFamily="34" charset="-122"/>
                 <a:cs typeface="Arial" pitchFamily="34" charset="-120"/>
               </a:rPr>
-              <a:t>Means by resembling.</a:t>
+              <a:t>It looks like the thing.</a:t>
             </a:r>
             <a:endParaRPr lang="en-US" sz="1200" dirty="0"/>
           </a:p>
@@ -8887,7 +9225,7 @@
                 <a:ea typeface="Georgia" pitchFamily="34" charset="-122"/>
                 <a:cs typeface="Georgia" pitchFamily="34" charset="-120"/>
               </a:rPr>
-              <a:t>An emoji face looks like the thing it stands for.</a:t>
+              <a:t>An emoji face looks like the face it stands for.</a:t>
             </a:r>
             <a:endParaRPr lang="en-US" sz="1400" dirty="0"/>
           </a:p>
@@ -9037,7 +9375,7 @@
                 <a:ea typeface="Arial" pitchFamily="34" charset="-122"/>
                 <a:cs typeface="Arial" pitchFamily="34" charset="-120"/>
               </a:rPr>
-              <a:t>Means by physical trace.</a:t>
+              <a:t>It is a physical trace.</a:t>
             </a:r>
             <a:endParaRPr lang="en-US" sz="1200" dirty="0"/>
           </a:p>
@@ -9079,7 +9417,7 @@
                 <a:ea typeface="Georgia" pitchFamily="34" charset="-122"/>
                 <a:cs typeface="Georgia" pitchFamily="34" charset="-120"/>
               </a:rPr>
-              <a:t>The rays passed through a real body and left this mark.</a:t>
+              <a:t>X-rays passed through a real body and left this mark.</a:t>
             </a:r>
             <a:endParaRPr lang="en-US" sz="1400" dirty="0"/>
           </a:p>
@@ -9229,7 +9567,7 @@
                 <a:ea typeface="Arial" pitchFamily="34" charset="-122"/>
                 <a:cs typeface="Arial" pitchFamily="34" charset="-120"/>
               </a:rPr>
-              <a:t>Means by convention alone.</a:t>
+              <a:t>It means by agreement only.</a:t>
             </a:r>
             <a:endParaRPr lang="en-US" sz="1200" dirty="0"/>
           </a:p>
@@ -9271,7 +9609,7 @@
                 <a:ea typeface="Georgia" pitchFamily="34" charset="-122"/>
                 <a:cs typeface="Georgia" pitchFamily="34" charset="-120"/>
               </a:rPr>
-              <a:t>Only agreement makes a flag mean a nation.</a:t>
+              <a:t>A flag means a nation only because we agree it does.</a:t>
             </a:r>
             <a:endParaRPr lang="en-US" sz="1400" dirty="0"/>
           </a:p>
@@ -9308,34 +9646,54 @@
         </p:nvSpPr>
         <p:spPr>
           <a:xfrm>
-            <a:off x="822960" y="5870448"/>
-            <a:ext cx="10058400" cy="457200"/>
-          </a:xfrm>
-          <a:prstGeom prst="rect">
-            <a:avLst/>
-          </a:prstGeom>
-          <a:noFill/>
-          <a:ln/>
-        </p:spPr>
-        <p:txBody>
-          <a:bodyPr wrap="square" lIns="0" tIns="0" rIns="0" bIns="0" rtlCol="0" anchor="ctr"/>
-          <a:lstStyle/>
-          <a:p>
-            <a:pPr indent="0" marL="0">
-              <a:buNone/>
-            </a:pPr>
-            <a:r>
-              <a:rPr lang="en-US" sz="1250" i="1" dirty="0">
-                <a:solidFill>
-                  <a:srgbClr val="7A7F72"/>
+            <a:off x="822960" y="5852160"/>
+            <a:ext cx="10058400" cy="274320"/>
+          </a:xfrm>
+          <a:prstGeom prst="rect">
+            <a:avLst/>
+          </a:prstGeom>
+          <a:noFill/>
+          <a:ln/>
+        </p:spPr>
+        <p:txBody>
+          <a:bodyPr wrap="square" lIns="0" tIns="0" rIns="0" bIns="0" rtlCol="0" anchor="t"/>
+          <a:lstStyle/>
+          <a:p>
+            <a:pPr indent="0" marL="0">
+              <a:lnSpc>
+                <a:spcPts val="1700"/>
+              </a:lnSpc>
+              <a:buNone/>
+            </a:pPr>
+            <a:r>
+              <a:rPr lang="en-US" sz="1050" b="1" spc="100" kern="0" dirty="0">
+                <a:solidFill>
+                  <a:srgbClr val="4A6B5D"/>
                 </a:solidFill>
                 <a:latin typeface="Arial" pitchFamily="34" charset="0"/>
                 <a:ea typeface="Arial" pitchFamily="34" charset="-122"/>
                 <a:cs typeface="Arial" pitchFamily="34" charset="-120"/>
               </a:rPr>
-              <a:t>The interesting case: a photograph is an index that looks like an icon. That tension runs through the whole subject.</a:t>
-            </a:r>
-            <a:endParaRPr lang="en-US" sz="1250" dirty="0"/>
+              <a:t>THE HARD CASE   </a:t>
+            </a:r>
+            <a:pPr indent="0" marL="0">
+              <a:lnSpc>
+                <a:spcPts val="1700"/>
+              </a:lnSpc>
+              <a:buNone/>
+            </a:pPr>
+            <a:r>
+              <a:rPr lang="en-US" sz="1250" dirty="0">
+                <a:solidFill>
+                  <a:srgbClr val="24313F"/>
+                </a:solidFill>
+                <a:latin typeface="Georgia" pitchFamily="34" charset="0"/>
+                <a:ea typeface="Georgia" pitchFamily="34" charset="-122"/>
+                <a:cs typeface="Georgia" pitchFamily="34" charset="-120"/>
+              </a:rPr>
+              <a:t>A photograph is an index (a light trace) that also looks like an icon. Both answers are correct.</a:t>
+            </a:r>
+            <a:endParaRPr lang="en-US" sz="1050" dirty="0"/>
           </a:p>
         </p:txBody>
       </p:sp>
@@ -9615,6 +9973,65 @@
           </a:p>
         </p:txBody>
       </p:sp>
+      <p:sp>
+        <p:nvSpPr>
+          <p:cNvPr id="6" name="Text 4"/>
+          <p:cNvSpPr/>
+          <p:nvPr/>
+        </p:nvSpPr>
+        <p:spPr>
+          <a:xfrm>
+            <a:off x="822960" y="5806440"/>
+            <a:ext cx="10424160" cy="640080"/>
+          </a:xfrm>
+          <a:prstGeom prst="rect">
+            <a:avLst/>
+          </a:prstGeom>
+          <a:noFill/>
+          <a:ln/>
+        </p:spPr>
+        <p:txBody>
+          <a:bodyPr wrap="square" lIns="0" tIns="0" rIns="0" bIns="0" rtlCol="0" anchor="t"/>
+          <a:lstStyle/>
+          <a:p>
+            <a:pPr indent="0" marL="0">
+              <a:lnSpc>
+                <a:spcPts val="1900"/>
+              </a:lnSpc>
+              <a:buNone/>
+            </a:pPr>
+            <a:r>
+              <a:rPr lang="en-US" sz="1200" b="1" spc="100" kern="0" dirty="0">
+                <a:solidFill>
+                  <a:srgbClr val="7A7F72"/>
+                </a:solidFill>
+                <a:latin typeface="Arial" pitchFamily="34" charset="0"/>
+                <a:ea typeface="Arial" pitchFamily="34" charset="-122"/>
+                <a:cs typeface="Arial" pitchFamily="34" charset="-120"/>
+              </a:rPr>
+              <a:t>IN PLAIN WORDS   </a:t>
+            </a:r>
+            <a:pPr indent="0" marL="0">
+              <a:lnSpc>
+                <a:spcPts val="1900"/>
+              </a:lnSpc>
+              <a:buNone/>
+            </a:pPr>
+            <a:r>
+              <a:rPr lang="en-US" sz="1400" i="1" dirty="0">
+                <a:solidFill>
+                  <a:srgbClr val="4A6B5D"/>
+                </a:solidFill>
+                <a:latin typeface="Georgia" pitchFamily="34" charset="0"/>
+                <a:ea typeface="Georgia" pitchFamily="34" charset="-122"/>
+                <a:cs typeface="Georgia" pitchFamily="34" charset="-120"/>
+              </a:rPr>
+              <a:t>A photograph is like a fingerprint: the real object made the mark. That is why it is an index.</a:t>
+            </a:r>
+            <a:endParaRPr lang="en-US" sz="1200" dirty="0"/>
+          </a:p>
+        </p:txBody>
+      </p:sp>
     </p:spTree>
   </p:cSld>
   <p:clrMapOvr>
@@ -9802,7 +10219,7 @@
                 <a:ea typeface="Georgia" pitchFamily="34" charset="-122"/>
                 <a:cs typeface="Georgia" pitchFamily="34" charset="-120"/>
               </a:rPr>
-              <a:t>The words pin down which meaning you take. Barthes calls it anchorage.</a:t>
+              <a:t>The caption fixes which meaning you take. Barthes calls this anchorage.</a:t>
             </a:r>
             <a:endParaRPr lang="en-US" sz="1800" dirty="0"/>
           </a:p>

--- a/content/decks/media-studies/media-studies-s1-lesson-02-semiotics-signs-and-codes.pptx
+++ b/content/decks/media-studies/media-studies-s1-lesson-02-semiotics-signs-and-codes.pptx
@@ -6314,7 +6314,7 @@
                 <a:ea typeface="Georgia" pitchFamily="34" charset="-122"/>
                 <a:cs typeface="Georgia" pitchFamily="34" charset="-120"/>
               </a:rPr>
-              <a:t>Lesson 03. Shots, angles, movement, composition, and on Tuesday you shoot six of them.</a:t>
+              <a:t>Lesson 03. Shots, angles, movement, composition, and on Thursday you shoot six of them.</a:t>
             </a:r>
             <a:endParaRPr lang="en-US" sz="2200" dirty="0"/>
           </a:p>
